--- a/delivery/edap-executive-slide-pack.pptx
+++ b/delivery/edap-executive-slide-pack.pptx
@@ -3111,7 +3111,6 @@
           <a:ln>
             <a:noFill/>
           </a:ln>
-          <a:effectLst/>
         </p:spPr>
         <p:style>
           <a:lnRef idx="1">
@@ -3137,75 +3136,7 @@
       </p:sp>
       <p:sp>
         <p:nvSpPr>
-          <p:cNvPr id="3" name="TextBox 2"/>
-          <p:cNvSpPr txBox="1"/>
-          <p:nvPr/>
-        </p:nvSpPr>
-        <p:spPr>
-          <a:xfrm>
-            <a:off x="274320" y="109728"/>
-            <a:ext cx="8229600" cy="502920"/>
-          </a:xfrm>
-          <a:prstGeom prst="rect">
-            <a:avLst/>
-          </a:prstGeom>
-          <a:noFill/>
-        </p:spPr>
-        <p:txBody>
-          <a:bodyPr wrap="square">
-            <a:spAutoFit/>
-          </a:bodyPr>
-          <a:lstStyle/>
-          <a:p>
-            <a:pPr algn="l"/>
-            <a:r>
-              <a:rPr sz="2200" b="1" i="0">
-                <a:solidFill>
-                  <a:srgbClr val="FFFFFF"/>
-                </a:solidFill>
-              </a:rPr>
-              <a:t>The Enterprise Imperative</a:t>
-            </a:r>
-          </a:p>
-        </p:txBody>
-      </p:sp>
-      <p:sp>
-        <p:nvSpPr>
-          <p:cNvPr id="4" name="TextBox 3"/>
-          <p:cNvSpPr txBox="1"/>
-          <p:nvPr/>
-        </p:nvSpPr>
-        <p:spPr>
-          <a:xfrm>
-            <a:off x="274320" y="621792"/>
-            <a:ext cx="8229600" cy="347472"/>
-          </a:xfrm>
-          <a:prstGeom prst="rect">
-            <a:avLst/>
-          </a:prstGeom>
-          <a:noFill/>
-        </p:spPr>
-        <p:txBody>
-          <a:bodyPr wrap="square">
-            <a:spAutoFit/>
-          </a:bodyPr>
-          <a:lstStyle/>
-          <a:p>
-            <a:pPr algn="l"/>
-            <a:r>
-              <a:rPr sz="1100" b="0" i="0">
-                <a:solidFill>
-                  <a:srgbClr val="B0C8E0"/>
-                </a:solidFill>
-              </a:rPr>
-              <a:t>Why EDAP exists — and what it changes for Water Corporation</a:t>
-            </a:r>
-          </a:p>
-        </p:txBody>
-      </p:sp>
-      <p:sp>
-        <p:nvSpPr>
-          <p:cNvPr id="5" name="Rectangle 4"/>
+          <p:cNvPr id="3" name="Rectangle 2"/>
           <p:cNvSpPr/>
           <p:nvPr/>
         </p:nvSpPr>
@@ -3223,7 +3154,6 @@
           <a:ln>
             <a:noFill/>
           </a:ln>
-          <a:effectLst/>
         </p:spPr>
         <p:style>
           <a:lnRef idx="1">
@@ -3249,7 +3179,7 @@
       </p:sp>
       <p:sp>
         <p:nvSpPr>
-          <p:cNvPr id="6" name="Rectangle 5"/>
+          <p:cNvPr id="4" name="Rectangle 3"/>
           <p:cNvSpPr/>
           <p:nvPr/>
         </p:nvSpPr>
@@ -3267,7 +3197,6 @@
           <a:ln>
             <a:noFill/>
           </a:ln>
-          <a:effectLst/>
         </p:spPr>
         <p:style>
           <a:lnRef idx="1">
@@ -3293,14 +3222,14 @@
       </p:sp>
       <p:sp>
         <p:nvSpPr>
-          <p:cNvPr id="7" name="TextBox 6"/>
+          <p:cNvPr id="5" name="TextBox 4"/>
           <p:cNvSpPr txBox="1"/>
           <p:nvPr/>
         </p:nvSpPr>
         <p:spPr>
           <a:xfrm>
-            <a:off x="274320" y="6638544"/>
-            <a:ext cx="6400800" cy="201168"/>
+            <a:off x="274320" y="109728"/>
+            <a:ext cx="8595360" cy="503000"/>
           </a:xfrm>
           <a:prstGeom prst="rect">
             <a:avLst/>
@@ -3315,26 +3244,26 @@
           <a:p>
             <a:pPr algn="l"/>
             <a:r>
-              <a:rPr sz="800" b="0" i="0">
-                <a:solidFill>
-                  <a:srgbClr val="B0C8E0"/>
-                </a:solidFill>
-              </a:rPr>
-              <a:t>Water Corporation  |  EDAP Programme  |  March 2026</a:t>
-            </a:r>
-          </a:p>
-        </p:txBody>
-      </p:sp>
-      <p:sp>
-        <p:nvSpPr>
-          <p:cNvPr id="8" name="TextBox 7"/>
+              <a:rPr sz="2200" b="1" i="0">
+                <a:solidFill>
+                  <a:srgbClr val="FFFFFF"/>
+                </a:solidFill>
+              </a:rPr>
+              <a:t>The EDAP Portfolio Vision</a:t>
+            </a:r>
+          </a:p>
+        </p:txBody>
+      </p:sp>
+      <p:sp>
+        <p:nvSpPr>
+          <p:cNvPr id="6" name="TextBox 5"/>
           <p:cNvSpPr txBox="1"/>
           <p:nvPr/>
         </p:nvSpPr>
         <p:spPr>
           <a:xfrm>
-            <a:off x="8503920" y="6638544"/>
-            <a:ext cx="548640" cy="201168"/>
+            <a:off x="274320" y="619000"/>
+            <a:ext cx="8595360" cy="380000"/>
           </a:xfrm>
           <a:prstGeom prst="rect">
             <a:avLst/>
@@ -3347,28 +3276,28 @@
           </a:bodyPr>
           <a:lstStyle/>
           <a:p>
-            <a:pPr algn="r"/>
-            <a:r>
-              <a:rPr sz="800" b="0" i="0">
+            <a:pPr algn="l"/>
+            <a:r>
+              <a:rPr sz="1100" b="0" i="0">
                 <a:solidFill>
                   <a:srgbClr val="B0C8E0"/>
                 </a:solidFill>
               </a:rPr>
-              <a:t>1 / 4</a:t>
-            </a:r>
-          </a:p>
-        </p:txBody>
-      </p:sp>
-      <p:sp>
-        <p:nvSpPr>
-          <p:cNvPr id="9" name="TextBox 8"/>
+              <a:t>The strategic intent driving Water Corporation’s enterprise data transformation</a:t>
+            </a:r>
+          </a:p>
+        </p:txBody>
+      </p:sp>
+      <p:sp>
+        <p:nvSpPr>
+          <p:cNvPr id="7" name="TextBox 6"/>
           <p:cNvSpPr txBox="1"/>
           <p:nvPr/>
         </p:nvSpPr>
         <p:spPr>
           <a:xfrm>
-            <a:off x="274320" y="1207008"/>
-            <a:ext cx="8595360" cy="411480"/>
+            <a:off x="274320" y="6674400"/>
+            <a:ext cx="6858000" cy="180000"/>
           </a:xfrm>
           <a:prstGeom prst="rect">
             <a:avLst/>
@@ -3383,12 +3312,80 @@
           <a:p>
             <a:pPr algn="l"/>
             <a:r>
-              <a:rPr sz="1050" b="0" i="0">
+              <a:rPr sz="800" b="0" i="0">
+                <a:solidFill>
+                  <a:srgbClr val="B0C8E0"/>
+                </a:solidFill>
+              </a:rPr>
+              <a:t>Water Corporation  |  EDAP Programme  |  March 2026</a:t>
+            </a:r>
+          </a:p>
+        </p:txBody>
+      </p:sp>
+      <p:sp>
+        <p:nvSpPr>
+          <p:cNvPr id="8" name="TextBox 7"/>
+          <p:cNvSpPr txBox="1"/>
+          <p:nvPr/>
+        </p:nvSpPr>
+        <p:spPr>
+          <a:xfrm>
+            <a:off x="8319680" y="6674400"/>
+            <a:ext cx="550000" cy="180000"/>
+          </a:xfrm>
+          <a:prstGeom prst="rect">
+            <a:avLst/>
+          </a:prstGeom>
+          <a:noFill/>
+        </p:spPr>
+        <p:txBody>
+          <a:bodyPr wrap="square">
+            <a:spAutoFit/>
+          </a:bodyPr>
+          <a:lstStyle/>
+          <a:p>
+            <a:pPr algn="r"/>
+            <a:r>
+              <a:rPr sz="800" b="0" i="0">
+                <a:solidFill>
+                  <a:srgbClr val="B0C8E0"/>
+                </a:solidFill>
+              </a:rPr>
+              <a:t>1 / 4</a:t>
+            </a:r>
+          </a:p>
+        </p:txBody>
+      </p:sp>
+      <p:sp>
+        <p:nvSpPr>
+          <p:cNvPr id="9" name="TextBox 8"/>
+          <p:cNvSpPr txBox="1"/>
+          <p:nvPr/>
+        </p:nvSpPr>
+        <p:spPr>
+          <a:xfrm>
+            <a:off x="274320" y="1196424"/>
+            <a:ext cx="8595360" cy="260000"/>
+          </a:xfrm>
+          <a:prstGeom prst="rect">
+            <a:avLst/>
+          </a:prstGeom>
+          <a:noFill/>
+        </p:spPr>
+        <p:txBody>
+          <a:bodyPr wrap="square">
+            <a:spAutoFit/>
+          </a:bodyPr>
+          <a:lstStyle/>
+          <a:p>
+            <a:pPr algn="l"/>
+            <a:r>
+              <a:rPr sz="1050" b="0" i="1">
                 <a:solidFill>
                   <a:srgbClr val="2C2C2C"/>
                 </a:solidFill>
               </a:rPr>
-              <a:t>Water Corporation's data landscape has grown organically across seven business domains, creating fragmentation that undermines trust, slows decisions, and complicates compliance.</a:t>
+              <a:t>Water Corporation’s data capability has grown organically across seven domains. EDAP exists to consolidate, govern, and unlock it.</a:t>
             </a:r>
           </a:p>
         </p:txBody>
@@ -3401,21 +3398,18 @@
         </p:nvSpPr>
         <p:spPr>
           <a:xfrm>
-            <a:off x="274320" y="1709928"/>
-            <a:ext cx="4160520" cy="2560320"/>
+            <a:off x="274320" y="1496424"/>
+            <a:ext cx="8595360" cy="1100000"/>
           </a:xfrm>
           <a:prstGeom prst="rect">
             <a:avLst/>
           </a:prstGeom>
           <a:solidFill>
-            <a:srgbClr val="F2F4F7"/>
+            <a:srgbClr val="1B2A4A"/>
           </a:solidFill>
-          <a:ln w="9525">
-            <a:solidFill>
-              <a:srgbClr val="CCD6E0"/>
-            </a:solidFill>
+          <a:ln>
+            <a:noFill/>
           </a:ln>
-          <a:effectLst/>
         </p:spPr>
         <p:style>
           <a:lnRef idx="1">
@@ -3441,48 +3435,14 @@
       </p:sp>
       <p:sp>
         <p:nvSpPr>
-          <p:cNvPr id="11" name="TextBox 10"/>
-          <p:cNvSpPr txBox="1"/>
-          <p:nvPr/>
-        </p:nvSpPr>
-        <p:spPr>
-          <a:xfrm>
-            <a:off x="384048" y="1783080"/>
-            <a:ext cx="3977639" cy="256032"/>
-          </a:xfrm>
-          <a:prstGeom prst="rect">
-            <a:avLst/>
-          </a:prstGeom>
-          <a:noFill/>
-        </p:spPr>
-        <p:txBody>
-          <a:bodyPr wrap="square">
-            <a:spAutoFit/>
-          </a:bodyPr>
-          <a:lstStyle/>
-          <a:p>
-            <a:pPr algn="l"/>
-            <a:r>
-              <a:rPr sz="1000" b="1" i="0">
-                <a:solidFill>
-                  <a:srgbClr val="006E8C"/>
-                </a:solidFill>
-              </a:rPr>
-              <a:t>Current State — Fragmented by Design</a:t>
-            </a:r>
-          </a:p>
-        </p:txBody>
-      </p:sp>
-      <p:sp>
-        <p:nvSpPr>
-          <p:cNvPr id="12" name="Rectangle 11"/>
+          <p:cNvPr id="11" name="Rectangle 10"/>
           <p:cNvSpPr/>
           <p:nvPr/>
         </p:nvSpPr>
         <p:spPr>
           <a:xfrm>
-            <a:off x="384048" y="2039112"/>
-            <a:ext cx="3941063" cy="22860"/>
+            <a:off x="274320" y="1496424"/>
+            <a:ext cx="18000" cy="1100000"/>
           </a:xfrm>
           <a:prstGeom prst="rect">
             <a:avLst/>
@@ -3493,7 +3453,6 @@
           <a:ln>
             <a:noFill/>
           </a:ln>
-          <a:effectLst/>
         </p:spPr>
         <p:style>
           <a:lnRef idx="1">
@@ -3519,14 +3478,14 @@
       </p:sp>
       <p:sp>
         <p:nvSpPr>
-          <p:cNvPr id="13" name="TextBox 12"/>
+          <p:cNvPr id="12" name="TextBox 11"/>
           <p:cNvSpPr txBox="1"/>
           <p:nvPr/>
         </p:nvSpPr>
         <p:spPr>
           <a:xfrm>
-            <a:off x="384048" y="2093976"/>
-            <a:ext cx="3941063" cy="2057400"/>
+            <a:off x="334320" y="1606152"/>
+            <a:ext cx="8515360" cy="880544"/>
           </a:xfrm>
           <a:prstGeom prst="rect">
             <a:avLst/>
@@ -3539,92 +3498,43 @@
           </a:bodyPr>
           <a:lstStyle/>
           <a:p>
-            <a:pPr>
-              <a:spcBef>
-                <a:spcPts val="200"/>
-              </a:spcBef>
+            <a:pPr algn="l">
+              <a:spcAft>
+                <a:spcPts val="1200"/>
+              </a:spcAft>
             </a:pPr>
             <a:r>
-              <a:rPr sz="950">
-                <a:solidFill>
-                  <a:srgbClr val="2C2C2C"/>
-                </a:solidFill>
-              </a:rPr>
-              <a:t>• Six source systems (SAP, Maximo, SCADA, GIS, Salesforce, CASS) in silos</a:t>
-            </a:r>
-          </a:p>
-          <a:p>
-            <a:pPr>
-              <a:spcBef>
-                <a:spcPts val="200"/>
-              </a:spcBef>
-            </a:pPr>
-            <a:r>
-              <a:rPr sz="950">
-                <a:solidFill>
-                  <a:srgbClr val="2C2C2C"/>
-                </a:solidFill>
-              </a:rPr>
-              <a:t>• Multiple incompatible pipeline technologies: Glue, ADF, SAP DS, SageMaker</a:t>
-            </a:r>
-          </a:p>
-          <a:p>
-            <a:pPr>
-              <a:spcBef>
-                <a:spcPts val="200"/>
-              </a:spcBef>
-            </a:pPr>
-            <a:r>
-              <a:rPr sz="950">
-                <a:solidFill>
-                  <a:srgbClr val="2C2C2C"/>
-                </a:solidFill>
-              </a:rPr>
-              <a:t>• No unified governance — classification inconsistent, access ad hoc</a:t>
-            </a:r>
-          </a:p>
-          <a:p>
-            <a:pPr>
-              <a:spcBef>
-                <a:spcPts val="200"/>
-              </a:spcBef>
-            </a:pPr>
-            <a:r>
-              <a:rPr sz="950">
-                <a:solidFill>
-                  <a:srgbClr val="2C2C2C"/>
-                </a:solidFill>
-              </a:rPr>
-              <a:t>• Knowledge concentrated in individuals, not embedded in platform</a:t>
-            </a:r>
-          </a:p>
-          <a:p>
-            <a:pPr>
-              <a:spcBef>
-                <a:spcPts val="200"/>
-              </a:spcBef>
-            </a:pPr>
-            <a:r>
-              <a:rPr sz="950">
-                <a:solidFill>
-                  <a:srgbClr val="2C2C2C"/>
-                </a:solidFill>
-              </a:rPr>
-              <a:t>• Regulatory obligations (PRIS Act, SOCI Act, WAICP) met manually, not systematically</a:t>
-            </a:r>
-          </a:p>
-        </p:txBody>
-      </p:sp>
-      <p:sp>
-        <p:nvSpPr>
-          <p:cNvPr id="14" name="Rectangle 13"/>
+              <a:rPr sz="1400" b="0" i="1">
+                <a:solidFill>
+                  <a:srgbClr val="FFFFFF"/>
+                </a:solidFill>
+              </a:rPr>
+              <a:t>“Transition Water Corporation from fragmented, reactive data practices to a proactive, intelligence-driven utility — where compliance by design and data liquidity accelerate operational resilience and innovation.”</a:t>
+            </a:r>
+          </a:p>
+          <a:p>
+            <a:pPr algn="l"/>
+            <a:r>
+              <a:rPr sz="900" b="0" i="0">
+                <a:solidFill>
+                  <a:srgbClr val="B0C8E0"/>
+                </a:solidFill>
+              </a:rPr>
+              <a:t>EDAP Portfolio Vision  |  Water Corporation Data &amp; Analytics Programme</a:t>
+            </a:r>
+          </a:p>
+        </p:txBody>
+      </p:sp>
+      <p:sp>
+        <p:nvSpPr>
+          <p:cNvPr id="13" name="Rectangle 12"/>
           <p:cNvSpPr/>
           <p:nvPr/>
         </p:nvSpPr>
         <p:spPr>
           <a:xfrm>
-            <a:off x="4709160" y="1709928"/>
-            <a:ext cx="4160520" cy="2560320"/>
+            <a:off x="274320" y="2706424"/>
+            <a:ext cx="2824800" cy="3842976"/>
           </a:xfrm>
           <a:prstGeom prst="rect">
             <a:avLst/>
@@ -3634,10 +3544,9 @@
           </a:solidFill>
           <a:ln w="9525">
             <a:solidFill>
-              <a:srgbClr val="CCD6E0"/>
+              <a:srgbClr val="006E8C"/>
             </a:solidFill>
           </a:ln>
-          <a:effectLst/>
         </p:spPr>
         <p:style>
           <a:lnRef idx="1">
@@ -3663,48 +3572,14 @@
       </p:sp>
       <p:sp>
         <p:nvSpPr>
-          <p:cNvPr id="15" name="TextBox 14"/>
-          <p:cNvSpPr txBox="1"/>
-          <p:nvPr/>
-        </p:nvSpPr>
-        <p:spPr>
-          <a:xfrm>
-            <a:off x="4818888" y="1783080"/>
-            <a:ext cx="3977639" cy="256032"/>
-          </a:xfrm>
-          <a:prstGeom prst="rect">
-            <a:avLst/>
-          </a:prstGeom>
-          <a:noFill/>
-        </p:spPr>
-        <p:txBody>
-          <a:bodyPr wrap="square">
-            <a:spAutoFit/>
-          </a:bodyPr>
-          <a:lstStyle/>
-          <a:p>
-            <a:pPr algn="l"/>
-            <a:r>
-              <a:rPr sz="1000" b="1" i="0">
-                <a:solidFill>
-                  <a:srgbClr val="006E8C"/>
-                </a:solidFill>
-              </a:rPr>
-              <a:t>Target State — Governed by Architecture</a:t>
-            </a:r>
-          </a:p>
-        </p:txBody>
-      </p:sp>
-      <p:sp>
-        <p:nvSpPr>
-          <p:cNvPr id="16" name="Rectangle 15"/>
+          <p:cNvPr id="14" name="Rectangle 13"/>
           <p:cNvSpPr/>
           <p:nvPr/>
         </p:nvSpPr>
         <p:spPr>
           <a:xfrm>
-            <a:off x="4818888" y="2039112"/>
-            <a:ext cx="3941063" cy="22860"/>
+            <a:off x="274320" y="2706424"/>
+            <a:ext cx="2824800" cy="310000"/>
           </a:xfrm>
           <a:prstGeom prst="rect">
             <a:avLst/>
@@ -3715,7 +3590,6 @@
           <a:ln>
             <a:noFill/>
           </a:ln>
-          <a:effectLst/>
         </p:spPr>
         <p:style>
           <a:lnRef idx="1">
@@ -3741,14 +3615,14 @@
       </p:sp>
       <p:sp>
         <p:nvSpPr>
-          <p:cNvPr id="17" name="TextBox 16"/>
+          <p:cNvPr id="15" name="TextBox 14"/>
           <p:cNvSpPr txBox="1"/>
           <p:nvPr/>
         </p:nvSpPr>
         <p:spPr>
           <a:xfrm>
-            <a:off x="4818888" y="2093976"/>
-            <a:ext cx="3941063" cy="2057400"/>
+            <a:off x="384048" y="2776424"/>
+            <a:ext cx="2605344" cy="200000"/>
           </a:xfrm>
           <a:prstGeom prst="rect">
             <a:avLst/>
@@ -3761,79 +3635,170 @@
           </a:bodyPr>
           <a:lstStyle/>
           <a:p>
-            <a:pPr>
+            <a:pPr algn="l"/>
+            <a:r>
+              <a:rPr sz="1100" b="1" i="0">
+                <a:solidFill>
+                  <a:srgbClr val="FFFFFF"/>
+                </a:solidFill>
+              </a:rPr>
+              <a:t>The Challenge</a:t>
+            </a:r>
+          </a:p>
+        </p:txBody>
+      </p:sp>
+      <p:sp>
+        <p:nvSpPr>
+          <p:cNvPr id="16" name="TextBox 15"/>
+          <p:cNvSpPr txBox="1"/>
+          <p:nvPr/>
+        </p:nvSpPr>
+        <p:spPr>
+          <a:xfrm>
+            <a:off x="384048" y="3076424"/>
+            <a:ext cx="2605344" cy="3422976"/>
+          </a:xfrm>
+          <a:prstGeom prst="rect">
+            <a:avLst/>
+          </a:prstGeom>
+          <a:noFill/>
+        </p:spPr>
+        <p:txBody>
+          <a:bodyPr wrap="square">
+            <a:spAutoFit/>
+          </a:bodyPr>
+          <a:lstStyle/>
+          <a:p>
+            <a:pPr algn="l">
+              <a:spcAft>
+                <a:spcPts val="300"/>
+              </a:spcAft>
+            </a:pPr>
+            <a:r>
+              <a:rPr sz="950" b="0" i="0">
+                <a:solidFill>
+                  <a:srgbClr val="2C2C2C"/>
+                </a:solidFill>
+              </a:rPr>
+              <a:t>•  Six source systems in operational silos</a:t>
+            </a:r>
+          </a:p>
+          <a:p>
+            <a:pPr algn="l">
               <a:spcBef>
-                <a:spcPts val="200"/>
+                <a:spcPts val="300"/>
               </a:spcBef>
+              <a:spcAft>
+                <a:spcPts val="300"/>
+              </a:spcAft>
             </a:pPr>
             <a:r>
-              <a:rPr sz="950">
+              <a:rPr sz="950" b="0" i="0">
                 <a:solidFill>
                   <a:srgbClr val="2C2C2C"/>
                 </a:solidFill>
               </a:rPr>
-              <a:t>• Single platform: Databricks + Unity Catalog across all seven domains</a:t>
-            </a:r>
-          </a:p>
-          <a:p>
-            <a:pPr>
+              <a:t>•  Four pipeline technologies (Glue, ADF, SAP DS, SageMaker) uncoordinated</a:t>
+            </a:r>
+          </a:p>
+          <a:p>
+            <a:pPr algn="l">
               <a:spcBef>
-                <a:spcPts val="200"/>
+                <a:spcPts val="300"/>
               </a:spcBef>
+              <a:spcAft>
+                <a:spcPts val="300"/>
+              </a:spcAft>
             </a:pPr>
             <a:r>
-              <a:rPr sz="950">
+              <a:rPr sz="950" b="0" i="0">
                 <a:solidFill>
                   <a:srgbClr val="2C2C2C"/>
                 </a:solidFill>
               </a:rPr>
-              <a:t>• Metadata-driven pipelines — new source onboarded in days, not weeks</a:t>
-            </a:r>
-          </a:p>
-          <a:p>
-            <a:pPr>
+              <a:t>•  No unified governance — classification inconsistent, access ad hoc</a:t>
+            </a:r>
+          </a:p>
+          <a:p>
+            <a:pPr algn="l">
               <a:spcBef>
-                <a:spcPts val="200"/>
+                <a:spcPts val="300"/>
               </a:spcBef>
+              <a:spcAft>
+                <a:spcPts val="300"/>
+              </a:spcAft>
             </a:pPr>
             <a:r>
-              <a:rPr sz="950">
+              <a:rPr sz="950" b="0" i="0">
                 <a:solidFill>
                   <a:srgbClr val="2C2C2C"/>
                 </a:solidFill>
               </a:rPr>
-              <a:t>• Self-governing data: WAICP classification enforced at column level via ABAC</a:t>
-            </a:r>
-          </a:p>
-          <a:p>
-            <a:pPr>
+              <a:t>•  Regulatory obligations met manually and reactively</a:t>
+            </a:r>
+          </a:p>
+          <a:p>
+            <a:pPr algn="l">
               <a:spcBef>
-                <a:spcPts val="200"/>
+                <a:spcPts val="300"/>
               </a:spcBef>
+              <a:spcAft>
+                <a:spcPts val="300"/>
+              </a:spcAft>
             </a:pPr>
             <a:r>
-              <a:rPr sz="950">
+              <a:rPr sz="950" b="0" i="0">
                 <a:solidFill>
                   <a:srgbClr val="2C2C2C"/>
                 </a:solidFill>
               </a:rPr>
-              <a:t>• Certified data products with contracts, SLAs, and quality scores</a:t>
-            </a:r>
-          </a:p>
-          <a:p>
-            <a:pPr>
-              <a:spcBef>
-                <a:spcPts val="200"/>
-              </a:spcBef>
-            </a:pPr>
-            <a:r>
-              <a:rPr sz="950">
-                <a:solidFill>
-                  <a:srgbClr val="2C2C2C"/>
-                </a:solidFill>
-              </a:rPr>
-              <a:t>• AI/ML as a first-class citizen with model inventory and risk classification</a:t>
-            </a:r>
+              <a:t>•  Knowledge concentrated in individuals, not the platform</a:t>
+            </a:r>
+          </a:p>
+        </p:txBody>
+      </p:sp>
+      <p:sp>
+        <p:nvSpPr>
+          <p:cNvPr id="17" name="Rectangle 16"/>
+          <p:cNvSpPr/>
+          <p:nvPr/>
+        </p:nvSpPr>
+        <p:spPr>
+          <a:xfrm>
+            <a:off x="3159600" y="2706424"/>
+            <a:ext cx="2824800" cy="3842976"/>
+          </a:xfrm>
+          <a:prstGeom prst="rect">
+            <a:avLst/>
+          </a:prstGeom>
+          <a:solidFill>
+            <a:srgbClr val="F2F4F7"/>
+          </a:solidFill>
+          <a:ln w="9525">
+            <a:solidFill>
+              <a:srgbClr val="006E8C"/>
+            </a:solidFill>
+          </a:ln>
+        </p:spPr>
+        <p:style>
+          <a:lnRef idx="1">
+            <a:schemeClr val="accent1"/>
+          </a:lnRef>
+          <a:fillRef idx="3">
+            <a:schemeClr val="accent1"/>
+          </a:fillRef>
+          <a:effectRef idx="2">
+            <a:schemeClr val="accent1"/>
+          </a:effectRef>
+          <a:fontRef idx="minor">
+            <a:schemeClr val="lt1"/>
+          </a:fontRef>
+        </p:style>
+        <p:txBody>
+          <a:bodyPr rtlCol="0" anchor="ctr"/>
+          <a:lstStyle/>
+          <a:p>
+            <a:pPr algn="ctr"/>
           </a:p>
         </p:txBody>
       </p:sp>
@@ -3845,8 +3810,8 @@
         </p:nvSpPr>
         <p:spPr>
           <a:xfrm>
-            <a:off x="4325112" y="2606040"/>
-            <a:ext cx="493776" cy="411480"/>
+            <a:off x="3159600" y="2706424"/>
+            <a:ext cx="2824800" cy="310000"/>
           </a:xfrm>
           <a:prstGeom prst="rect">
             <a:avLst/>
@@ -3857,7 +3822,6 @@
           <a:ln>
             <a:noFill/>
           </a:ln>
-          <a:effectLst/>
         </p:spPr>
         <p:style>
           <a:lnRef idx="1">
@@ -3889,8 +3853,8 @@
         </p:nvSpPr>
         <p:spPr>
           <a:xfrm>
-            <a:off x="4325112" y="2587752"/>
-            <a:ext cx="493776" cy="411480"/>
+            <a:off x="3269328" y="2776424"/>
+            <a:ext cx="2605344" cy="200000"/>
           </a:xfrm>
           <a:prstGeom prst="rect">
             <a:avLst/>
@@ -3903,41 +3867,150 @@
           </a:bodyPr>
           <a:lstStyle/>
           <a:p>
-            <a:pPr algn="ctr"/>
-            <a:r>
-              <a:rPr sz="2200" b="1" i="0">
+            <a:pPr algn="l"/>
+            <a:r>
+              <a:rPr sz="1100" b="1" i="0">
                 <a:solidFill>
                   <a:srgbClr val="FFFFFF"/>
                 </a:solidFill>
               </a:rPr>
-              <a:t>→</a:t>
-            </a:r>
-          </a:p>
-        </p:txBody>
-      </p:sp>
-      <p:sp>
-        <p:nvSpPr>
-          <p:cNvPr id="20" name="Rectangle 19"/>
+              <a:t>The Aspiration</a:t>
+            </a:r>
+          </a:p>
+        </p:txBody>
+      </p:sp>
+      <p:sp>
+        <p:nvSpPr>
+          <p:cNvPr id="20" name="TextBox 19"/>
+          <p:cNvSpPr txBox="1"/>
+          <p:nvPr/>
+        </p:nvSpPr>
+        <p:spPr>
+          <a:xfrm>
+            <a:off x="3269328" y="3076424"/>
+            <a:ext cx="2605344" cy="3422976"/>
+          </a:xfrm>
+          <a:prstGeom prst="rect">
+            <a:avLst/>
+          </a:prstGeom>
+          <a:noFill/>
+        </p:spPr>
+        <p:txBody>
+          <a:bodyPr wrap="square">
+            <a:spAutoFit/>
+          </a:bodyPr>
+          <a:lstStyle/>
+          <a:p>
+            <a:pPr algn="l">
+              <a:spcAft>
+                <a:spcPts val="300"/>
+              </a:spcAft>
+            </a:pPr>
+            <a:r>
+              <a:rPr sz="950" b="0" i="0">
+                <a:solidFill>
+                  <a:srgbClr val="2C2C2C"/>
+                </a:solidFill>
+              </a:rPr>
+              <a:t>•  Single governed platform across all seven business domains</a:t>
+            </a:r>
+          </a:p>
+          <a:p>
+            <a:pPr algn="l">
+              <a:spcBef>
+                <a:spcPts val="300"/>
+              </a:spcBef>
+              <a:spcAft>
+                <a:spcPts val="300"/>
+              </a:spcAft>
+            </a:pPr>
+            <a:r>
+              <a:rPr sz="950" b="0" i="0">
+                <a:solidFill>
+                  <a:srgbClr val="2C2C2C"/>
+                </a:solidFill>
+              </a:rPr>
+              <a:t>•  New data source onboarded in days via configuration, not code</a:t>
+            </a:r>
+          </a:p>
+          <a:p>
+            <a:pPr algn="l">
+              <a:spcBef>
+                <a:spcPts val="300"/>
+              </a:spcBef>
+              <a:spcAft>
+                <a:spcPts val="300"/>
+              </a:spcAft>
+            </a:pPr>
+            <a:r>
+              <a:rPr sz="950" b="0" i="0">
+                <a:solidFill>
+                  <a:srgbClr val="2C2C2C"/>
+                </a:solidFill>
+              </a:rPr>
+              <a:t>•  Compliance enforced architecturally at column level via ABAC</a:t>
+            </a:r>
+          </a:p>
+          <a:p>
+            <a:pPr algn="l">
+              <a:spcBef>
+                <a:spcPts val="300"/>
+              </a:spcBef>
+              <a:spcAft>
+                <a:spcPts val="300"/>
+              </a:spcAft>
+            </a:pPr>
+            <a:r>
+              <a:rPr sz="950" b="0" i="0">
+                <a:solidFill>
+                  <a:srgbClr val="2C2C2C"/>
+                </a:solidFill>
+              </a:rPr>
+              <a:t>•  Certified data products with quality contracts and SLAs</a:t>
+            </a:r>
+          </a:p>
+          <a:p>
+            <a:pPr algn="l">
+              <a:spcBef>
+                <a:spcPts val="300"/>
+              </a:spcBef>
+              <a:spcAft>
+                <a:spcPts val="300"/>
+              </a:spcAft>
+            </a:pPr>
+            <a:r>
+              <a:rPr sz="950" b="0" i="0">
+                <a:solidFill>
+                  <a:srgbClr val="2C2C2C"/>
+                </a:solidFill>
+              </a:rPr>
+              <a:t>•  Analytics and AI governed from experiment through to production</a:t>
+            </a:r>
+          </a:p>
+        </p:txBody>
+      </p:sp>
+      <p:sp>
+        <p:nvSpPr>
+          <p:cNvPr id="21" name="Rectangle 20"/>
           <p:cNvSpPr/>
           <p:nvPr/>
         </p:nvSpPr>
         <p:spPr>
           <a:xfrm>
-            <a:off x="274320" y="4407408"/>
-            <a:ext cx="2743200" cy="896112"/>
+            <a:off x="6044880" y="2706424"/>
+            <a:ext cx="2824800" cy="3842976"/>
           </a:xfrm>
           <a:prstGeom prst="rect">
             <a:avLst/>
           </a:prstGeom>
           <a:solidFill>
-            <a:srgbClr val="1B2A4A"/>
+            <a:srgbClr val="F2F4F7"/>
           </a:solidFill>
-          <a:ln w="12700">
+          <a:ln w="9525">
             <a:solidFill>
               <a:srgbClr val="006E8C"/>
             </a:solidFill>
           </a:ln>
-          <a:effectLst/>
         </p:spPr>
         <p:style>
           <a:lnRef idx="1">
@@ -3963,96 +4036,24 @@
       </p:sp>
       <p:sp>
         <p:nvSpPr>
-          <p:cNvPr id="21" name="TextBox 20"/>
-          <p:cNvSpPr txBox="1"/>
-          <p:nvPr/>
-        </p:nvSpPr>
-        <p:spPr>
-          <a:xfrm>
-            <a:off x="384048" y="4480560"/>
-            <a:ext cx="2542032" cy="256032"/>
-          </a:xfrm>
-          <a:prstGeom prst="rect">
-            <a:avLst/>
-          </a:prstGeom>
-          <a:noFill/>
-        </p:spPr>
-        <p:txBody>
-          <a:bodyPr wrap="square">
-            <a:spAutoFit/>
-          </a:bodyPr>
-          <a:lstStyle/>
-          <a:p>
-            <a:pPr algn="l"/>
-            <a:r>
-              <a:rPr sz="950" b="1" i="0">
-                <a:solidFill>
-                  <a:srgbClr val="006E8C"/>
-                </a:solidFill>
-              </a:rPr>
-              <a:t>Comply by Design</a:t>
-            </a:r>
-          </a:p>
-        </p:txBody>
-      </p:sp>
-      <p:sp>
-        <p:nvSpPr>
-          <p:cNvPr id="22" name="TextBox 21"/>
-          <p:cNvSpPr txBox="1"/>
-          <p:nvPr/>
-        </p:nvSpPr>
-        <p:spPr>
-          <a:xfrm>
-            <a:off x="384048" y="4736592"/>
-            <a:ext cx="2542032" cy="512064"/>
-          </a:xfrm>
-          <a:prstGeom prst="rect">
-            <a:avLst/>
-          </a:prstGeom>
-          <a:noFill/>
-        </p:spPr>
-        <p:txBody>
-          <a:bodyPr wrap="square">
-            <a:spAutoFit/>
-          </a:bodyPr>
-          <a:lstStyle/>
-          <a:p>
-            <a:pPr algn="l"/>
-            <a:r>
-              <a:rPr sz="850" b="0" i="0">
-                <a:solidFill>
-                  <a:srgbClr val="FFFFFF"/>
-                </a:solidFill>
-              </a:rPr>
-              <a:t>PRIS, SOCI, WAICP, State Records
-enforced architecturally — not manually</a:t>
-            </a:r>
-          </a:p>
-        </p:txBody>
-      </p:sp>
-      <p:sp>
-        <p:nvSpPr>
-          <p:cNvPr id="23" name="Rectangle 22"/>
+          <p:cNvPr id="22" name="Rectangle 21"/>
           <p:cNvSpPr/>
           <p:nvPr/>
         </p:nvSpPr>
         <p:spPr>
           <a:xfrm>
-            <a:off x="3108960" y="4407408"/>
-            <a:ext cx="2743200" cy="896112"/>
+            <a:off x="6044880" y="2706424"/>
+            <a:ext cx="2824800" cy="310000"/>
           </a:xfrm>
           <a:prstGeom prst="rect">
             <a:avLst/>
           </a:prstGeom>
           <a:solidFill>
-            <a:srgbClr val="1B2A4A"/>
+            <a:srgbClr val="006E8C"/>
           </a:solidFill>
-          <a:ln w="12700">
-            <a:solidFill>
-              <a:srgbClr val="006E8C"/>
-            </a:solidFill>
+          <a:ln>
+            <a:noFill/>
           </a:ln>
-          <a:effectLst/>
         </p:spPr>
         <p:style>
           <a:lnRef idx="1">
@@ -4078,14 +4079,14 @@
       </p:sp>
       <p:sp>
         <p:nvSpPr>
-          <p:cNvPr id="24" name="TextBox 23"/>
+          <p:cNvPr id="23" name="TextBox 22"/>
           <p:cNvSpPr txBox="1"/>
           <p:nvPr/>
         </p:nvSpPr>
         <p:spPr>
           <a:xfrm>
-            <a:off x="3218688" y="4480560"/>
-            <a:ext cx="2542032" cy="256032"/>
+            <a:off x="6154608" y="2776424"/>
+            <a:ext cx="2605344" cy="200000"/>
           </a:xfrm>
           <a:prstGeom prst="rect">
             <a:avLst/>
@@ -4100,26 +4101,26 @@
           <a:p>
             <a:pPr algn="l"/>
             <a:r>
-              <a:rPr sz="950" b="1" i="0">
-                <a:solidFill>
-                  <a:srgbClr val="006E8C"/>
-                </a:solidFill>
-              </a:rPr>
-              <a:t>Data as a Product</a:t>
-            </a:r>
-          </a:p>
-        </p:txBody>
-      </p:sp>
-      <p:sp>
-        <p:nvSpPr>
-          <p:cNvPr id="25" name="TextBox 24"/>
+              <a:rPr sz="1100" b="1" i="0">
+                <a:solidFill>
+                  <a:srgbClr val="FFFFFF"/>
+                </a:solidFill>
+              </a:rPr>
+              <a:t>How EDAP Delivers</a:t>
+            </a:r>
+          </a:p>
+        </p:txBody>
+      </p:sp>
+      <p:sp>
+        <p:nvSpPr>
+          <p:cNvPr id="24" name="TextBox 23"/>
           <p:cNvSpPr txBox="1"/>
           <p:nvPr/>
         </p:nvSpPr>
         <p:spPr>
           <a:xfrm>
-            <a:off x="3218688" y="4736592"/>
-            <a:ext cx="2542032" cy="512064"/>
+            <a:off x="6154608" y="3076424"/>
+            <a:ext cx="2605344" cy="3422976"/>
           </a:xfrm>
           <a:prstGeom prst="rect">
             <a:avLst/>
@@ -4132,130 +4133,90 @@
           </a:bodyPr>
           <a:lstStyle/>
           <a:p>
-            <a:pPr algn="l"/>
-            <a:r>
-              <a:rPr sz="850" b="0" i="0">
-                <a:solidFill>
-                  <a:srgbClr val="FFFFFF"/>
-                </a:solidFill>
-              </a:rPr>
-              <a:t>Findable, accessible, understandable,
-quality-assured, dependable</a:t>
-            </a:r>
-          </a:p>
-        </p:txBody>
-      </p:sp>
-      <p:sp>
-        <p:nvSpPr>
-          <p:cNvPr id="26" name="Rectangle 25"/>
-          <p:cNvSpPr/>
-          <p:nvPr/>
-        </p:nvSpPr>
-        <p:spPr>
-          <a:xfrm>
-            <a:off x="5943600" y="4407408"/>
-            <a:ext cx="2743200" cy="896112"/>
-          </a:xfrm>
-          <a:prstGeom prst="rect">
-            <a:avLst/>
-          </a:prstGeom>
-          <a:solidFill>
-            <a:srgbClr val="1B2A4A"/>
-          </a:solidFill>
-          <a:ln w="12700">
-            <a:solidFill>
-              <a:srgbClr val="006E8C"/>
-            </a:solidFill>
-          </a:ln>
-          <a:effectLst/>
-        </p:spPr>
-        <p:style>
-          <a:lnRef idx="1">
-            <a:schemeClr val="accent1"/>
-          </a:lnRef>
-          <a:fillRef idx="3">
-            <a:schemeClr val="accent1"/>
-          </a:fillRef>
-          <a:effectRef idx="2">
-            <a:schemeClr val="accent1"/>
-          </a:effectRef>
-          <a:fontRef idx="minor">
-            <a:schemeClr val="lt1"/>
-          </a:fontRef>
-        </p:style>
-        <p:txBody>
-          <a:bodyPr rtlCol="0" anchor="ctr"/>
-          <a:lstStyle/>
-          <a:p>
-            <a:pPr algn="ctr"/>
-          </a:p>
-        </p:txBody>
-      </p:sp>
-      <p:sp>
-        <p:nvSpPr>
-          <p:cNvPr id="27" name="TextBox 26"/>
-          <p:cNvSpPr txBox="1"/>
-          <p:nvPr/>
-        </p:nvSpPr>
-        <p:spPr>
-          <a:xfrm>
-            <a:off x="6053328" y="4480560"/>
-            <a:ext cx="2542032" cy="256032"/>
-          </a:xfrm>
-          <a:prstGeom prst="rect">
-            <a:avLst/>
-          </a:prstGeom>
-          <a:noFill/>
-        </p:spPr>
-        <p:txBody>
-          <a:bodyPr wrap="square">
-            <a:spAutoFit/>
-          </a:bodyPr>
-          <a:lstStyle/>
-          <a:p>
-            <a:pPr algn="l"/>
-            <a:r>
-              <a:rPr sz="950" b="1" i="0">
-                <a:solidFill>
-                  <a:srgbClr val="006E8C"/>
-                </a:solidFill>
-              </a:rPr>
-              <a:t>Team Self-Sufficiency</a:t>
-            </a:r>
-          </a:p>
-        </p:txBody>
-      </p:sp>
-      <p:sp>
-        <p:nvSpPr>
-          <p:cNvPr id="28" name="TextBox 27"/>
-          <p:cNvSpPr txBox="1"/>
-          <p:nvPr/>
-        </p:nvSpPr>
-        <p:spPr>
-          <a:xfrm>
-            <a:off x="6053328" y="4736592"/>
-            <a:ext cx="2542032" cy="512064"/>
-          </a:xfrm>
-          <a:prstGeom prst="rect">
-            <a:avLst/>
-          </a:prstGeom>
-          <a:noFill/>
-        </p:spPr>
-        <p:txBody>
-          <a:bodyPr wrap="square">
-            <a:spAutoFit/>
-          </a:bodyPr>
-          <a:lstStyle/>
-          <a:p>
-            <a:pPr algn="l"/>
-            <a:r>
-              <a:rPr sz="850" b="0" i="0">
-                <a:solidFill>
-                  <a:srgbClr val="FFFFFF"/>
-                </a:solidFill>
-              </a:rPr>
-              <a:t>WC engineers own their domains;
-SI transfers capability, not dependency</a:t>
+            <a:pPr algn="l">
+              <a:spcAft>
+                <a:spcPts val="300"/>
+              </a:spcAft>
+            </a:pPr>
+            <a:r>
+              <a:rPr sz="950" b="0" i="0">
+                <a:solidFill>
+                  <a:srgbClr val="2C2C2C"/>
+                </a:solidFill>
+              </a:rPr>
+              <a:t>•  Databricks lakehouse + Unity Catalog across Dev / Test / Prod</a:t>
+            </a:r>
+          </a:p>
+          <a:p>
+            <a:pPr algn="l">
+              <a:spcBef>
+                <a:spcPts val="300"/>
+              </a:spcBef>
+              <a:spcAft>
+                <a:spcPts val="300"/>
+              </a:spcAft>
+            </a:pPr>
+            <a:r>
+              <a:rPr sz="950" b="0" i="0">
+                <a:solidFill>
+                  <a:srgbClr val="2C2C2C"/>
+                </a:solidFill>
+              </a:rPr>
+              <a:t>•  Medallion architecture — 10 structured zones from landing to gold</a:t>
+            </a:r>
+          </a:p>
+          <a:p>
+            <a:pPr algn="l">
+              <a:spcBef>
+                <a:spcPts val="300"/>
+              </a:spcBef>
+              <a:spcAft>
+                <a:spcPts val="300"/>
+              </a:spcAft>
+            </a:pPr>
+            <a:r>
+              <a:rPr sz="950" b="0" i="0">
+                <a:solidFill>
+                  <a:srgbClr val="2C2C2C"/>
+                </a:solidFill>
+              </a:rPr>
+              <a:t>•  4-layer tagging: WAICP → sensitivity → access → operational metadata</a:t>
+            </a:r>
+          </a:p>
+          <a:p>
+            <a:pPr algn="l">
+              <a:spcBef>
+                <a:spcPts val="300"/>
+              </a:spcBef>
+              <a:spcAft>
+                <a:spcPts val="300"/>
+              </a:spcAft>
+            </a:pPr>
+            <a:r>
+              <a:rPr sz="950" b="0" i="0">
+                <a:solidFill>
+                  <a:srgbClr val="2C2C2C"/>
+                </a:solidFill>
+              </a:rPr>
+              <a:t>•  9 epics, 95 features, SAFe PI delivery cadence</a:t>
+            </a:r>
+          </a:p>
+          <a:p>
+            <a:pPr algn="l">
+              <a:spcBef>
+                <a:spcPts val="300"/>
+              </a:spcBef>
+              <a:spcAft>
+                <a:spcPts val="300"/>
+              </a:spcAft>
+            </a:pPr>
+            <a:r>
+              <a:rPr sz="950" b="0" i="0">
+                <a:solidFill>
+                  <a:srgbClr val="2C2C2C"/>
+                </a:solidFill>
+              </a:rPr>
+              <a:t>•  WC engineers certified, embedded, and self-sufficient at close</a:t>
             </a:r>
           </a:p>
         </p:txBody>
@@ -4298,7 +4259,6 @@
           <a:ln>
             <a:noFill/>
           </a:ln>
-          <a:effectLst/>
         </p:spPr>
         <p:style>
           <a:lnRef idx="1">
@@ -4324,75 +4284,7 @@
       </p:sp>
       <p:sp>
         <p:nvSpPr>
-          <p:cNvPr id="3" name="TextBox 2"/>
-          <p:cNvSpPr txBox="1"/>
-          <p:nvPr/>
-        </p:nvSpPr>
-        <p:spPr>
-          <a:xfrm>
-            <a:off x="274320" y="109728"/>
-            <a:ext cx="8229600" cy="502920"/>
-          </a:xfrm>
-          <a:prstGeom prst="rect">
-            <a:avLst/>
-          </a:prstGeom>
-          <a:noFill/>
-        </p:spPr>
-        <p:txBody>
-          <a:bodyPr wrap="square">
-            <a:spAutoFit/>
-          </a:bodyPr>
-          <a:lstStyle/>
-          <a:p>
-            <a:pPr algn="l"/>
-            <a:r>
-              <a:rPr sz="2200" b="1" i="0">
-                <a:solidFill>
-                  <a:srgbClr val="FFFFFF"/>
-                </a:solidFill>
-              </a:rPr>
-              <a:t>The Enterprise Architecture</a:t>
-            </a:r>
-          </a:p>
-        </p:txBody>
-      </p:sp>
-      <p:sp>
-        <p:nvSpPr>
-          <p:cNvPr id="4" name="TextBox 3"/>
-          <p:cNvSpPr txBox="1"/>
-          <p:nvPr/>
-        </p:nvSpPr>
-        <p:spPr>
-          <a:xfrm>
-            <a:off x="274320" y="621792"/>
-            <a:ext cx="8229600" cy="347472"/>
-          </a:xfrm>
-          <a:prstGeom prst="rect">
-            <a:avLst/>
-          </a:prstGeom>
-          <a:noFill/>
-        </p:spPr>
-        <p:txBody>
-          <a:bodyPr wrap="square">
-            <a:spAutoFit/>
-          </a:bodyPr>
-          <a:lstStyle/>
-          <a:p>
-            <a:pPr algn="l"/>
-            <a:r>
-              <a:rPr sz="1100" b="0" i="0">
-                <a:solidFill>
-                  <a:srgbClr val="B0C8E0"/>
-                </a:solidFill>
-              </a:rPr>
-              <a:t>Medallion lakehouse with Unity Catalog governance — the foundation all delivery work builds on</a:t>
-            </a:r>
-          </a:p>
-        </p:txBody>
-      </p:sp>
-      <p:sp>
-        <p:nvSpPr>
-          <p:cNvPr id="5" name="Rectangle 4"/>
+          <p:cNvPr id="3" name="Rectangle 2"/>
           <p:cNvSpPr/>
           <p:nvPr/>
         </p:nvSpPr>
@@ -4410,7 +4302,6 @@
           <a:ln>
             <a:noFill/>
           </a:ln>
-          <a:effectLst/>
         </p:spPr>
         <p:style>
           <a:lnRef idx="1">
@@ -4436,7 +4327,7 @@
       </p:sp>
       <p:sp>
         <p:nvSpPr>
-          <p:cNvPr id="6" name="Rectangle 5"/>
+          <p:cNvPr id="4" name="Rectangle 3"/>
           <p:cNvSpPr/>
           <p:nvPr/>
         </p:nvSpPr>
@@ -4454,7 +4345,6 @@
           <a:ln>
             <a:noFill/>
           </a:ln>
-          <a:effectLst/>
         </p:spPr>
         <p:style>
           <a:lnRef idx="1">
@@ -4480,14 +4370,14 @@
       </p:sp>
       <p:sp>
         <p:nvSpPr>
-          <p:cNvPr id="7" name="TextBox 6"/>
+          <p:cNvPr id="5" name="TextBox 4"/>
           <p:cNvSpPr txBox="1"/>
           <p:nvPr/>
         </p:nvSpPr>
         <p:spPr>
           <a:xfrm>
-            <a:off x="274320" y="6638544"/>
-            <a:ext cx="6400800" cy="201168"/>
+            <a:off x="274320" y="109728"/>
+            <a:ext cx="8595360" cy="503000"/>
           </a:xfrm>
           <a:prstGeom prst="rect">
             <a:avLst/>
@@ -4502,26 +4392,26 @@
           <a:p>
             <a:pPr algn="l"/>
             <a:r>
-              <a:rPr sz="800" b="0" i="0">
-                <a:solidFill>
-                  <a:srgbClr val="B0C8E0"/>
-                </a:solidFill>
-              </a:rPr>
-              <a:t>Water Corporation  |  EDAP Programme  |  March 2026</a:t>
-            </a:r>
-          </a:p>
-        </p:txBody>
-      </p:sp>
-      <p:sp>
-        <p:nvSpPr>
-          <p:cNvPr id="8" name="TextBox 7"/>
+              <a:rPr sz="2200" b="1" i="0">
+                <a:solidFill>
+                  <a:srgbClr val="FFFFFF"/>
+                </a:solidFill>
+              </a:rPr>
+              <a:t>Program Strategic Themes</a:t>
+            </a:r>
+          </a:p>
+        </p:txBody>
+      </p:sp>
+      <p:sp>
+        <p:nvSpPr>
+          <p:cNvPr id="6" name="TextBox 5"/>
           <p:cNvSpPr txBox="1"/>
           <p:nvPr/>
         </p:nvSpPr>
         <p:spPr>
           <a:xfrm>
-            <a:off x="8503920" y="6638544"/>
-            <a:ext cx="548640" cy="201168"/>
+            <a:off x="274320" y="619000"/>
+            <a:ext cx="8595360" cy="380000"/>
           </a:xfrm>
           <a:prstGeom prst="rect">
             <a:avLst/>
@@ -4534,28 +4424,28 @@
           </a:bodyPr>
           <a:lstStyle/>
           <a:p>
-            <a:pPr algn="r"/>
-            <a:r>
-              <a:rPr sz="800" b="0" i="0">
+            <a:pPr algn="l"/>
+            <a:r>
+              <a:rPr sz="1100" b="0" i="0">
                 <a:solidFill>
                   <a:srgbClr val="B0C8E0"/>
                 </a:solidFill>
               </a:rPr>
-              <a:t>2 / 4</a:t>
-            </a:r>
-          </a:p>
-        </p:txBody>
-      </p:sp>
-      <p:sp>
-        <p:nvSpPr>
-          <p:cNvPr id="9" name="TextBox 8"/>
+              <a:t>Five themes that define what the EDAP Programme delivers for Water Corporation</a:t>
+            </a:r>
+          </a:p>
+        </p:txBody>
+      </p:sp>
+      <p:sp>
+        <p:nvSpPr>
+          <p:cNvPr id="7" name="TextBox 6"/>
           <p:cNvSpPr txBox="1"/>
           <p:nvPr/>
         </p:nvSpPr>
         <p:spPr>
           <a:xfrm>
-            <a:off x="274320" y="1207008"/>
-            <a:ext cx="8595360" cy="292608"/>
+            <a:off x="274320" y="6674400"/>
+            <a:ext cx="6858000" cy="180000"/>
           </a:xfrm>
           <a:prstGeom prst="rect">
             <a:avLst/>
@@ -4570,12 +4460,80 @@
           <a:p>
             <a:pPr algn="l"/>
             <a:r>
-              <a:rPr sz="1050" b="0" i="0">
+              <a:rPr sz="800" b="0" i="0">
+                <a:solidFill>
+                  <a:srgbClr val="B0C8E0"/>
+                </a:solidFill>
+              </a:rPr>
+              <a:t>Water Corporation  |  EDAP Programme  |  March 2026</a:t>
+            </a:r>
+          </a:p>
+        </p:txBody>
+      </p:sp>
+      <p:sp>
+        <p:nvSpPr>
+          <p:cNvPr id="8" name="TextBox 7"/>
+          <p:cNvSpPr txBox="1"/>
+          <p:nvPr/>
+        </p:nvSpPr>
+        <p:spPr>
+          <a:xfrm>
+            <a:off x="8319680" y="6674400"/>
+            <a:ext cx="550000" cy="180000"/>
+          </a:xfrm>
+          <a:prstGeom prst="rect">
+            <a:avLst/>
+          </a:prstGeom>
+          <a:noFill/>
+        </p:spPr>
+        <p:txBody>
+          <a:bodyPr wrap="square">
+            <a:spAutoFit/>
+          </a:bodyPr>
+          <a:lstStyle/>
+          <a:p>
+            <a:pPr algn="r"/>
+            <a:r>
+              <a:rPr sz="800" b="0" i="0">
+                <a:solidFill>
+                  <a:srgbClr val="B0C8E0"/>
+                </a:solidFill>
+              </a:rPr>
+              <a:t>2 / 4</a:t>
+            </a:r>
+          </a:p>
+        </p:txBody>
+      </p:sp>
+      <p:sp>
+        <p:nvSpPr>
+          <p:cNvPr id="9" name="TextBox 8"/>
+          <p:cNvSpPr txBox="1"/>
+          <p:nvPr/>
+        </p:nvSpPr>
+        <p:spPr>
+          <a:xfrm>
+            <a:off x="274320" y="1196424"/>
+            <a:ext cx="8595360" cy="260000"/>
+          </a:xfrm>
+          <a:prstGeom prst="rect">
+            <a:avLst/>
+          </a:prstGeom>
+          <a:noFill/>
+        </p:spPr>
+        <p:txBody>
+          <a:bodyPr wrap="square">
+            <a:spAutoFit/>
+          </a:bodyPr>
+          <a:lstStyle/>
+          <a:p>
+            <a:pPr algn="l"/>
+            <a:r>
+              <a:rPr sz="1050" b="0" i="1">
                 <a:solidFill>
                   <a:srgbClr val="2C2C2C"/>
                 </a:solidFill>
               </a:rPr>
-              <a:t>The wikis define the architecture that precedes delivery. Every scope item implements a layer of this stack.</a:t>
+              <a:t>Each theme maps directly to one or more delivery epics. Together they describe the transformation EDAP is contracted to deliver.</a:t>
             </a:r>
           </a:p>
         </p:txBody>
@@ -4588,19 +4546,20 @@
         </p:nvSpPr>
         <p:spPr>
           <a:xfrm>
-            <a:off x="274320" y="1572768"/>
-            <a:ext cx="4846320" cy="457200"/>
+            <a:off x="274320" y="1466424"/>
+            <a:ext cx="8595360" cy="840000"/>
           </a:xfrm>
           <a:prstGeom prst="rect">
             <a:avLst/>
           </a:prstGeom>
           <a:solidFill>
-            <a:srgbClr val="B85C1A"/>
+            <a:srgbClr val="F2F4F7"/>
           </a:solidFill>
-          <a:ln>
-            <a:noFill/>
+          <a:ln w="9525">
+            <a:solidFill>
+              <a:srgbClr val="006E8C"/>
+            </a:solidFill>
           </a:ln>
-          <a:effectLst/>
         </p:spPr>
         <p:style>
           <a:lnRef idx="1">
@@ -4626,564 +4585,14 @@
       </p:sp>
       <p:sp>
         <p:nvSpPr>
-          <p:cNvPr id="11" name="TextBox 10"/>
-          <p:cNvSpPr txBox="1"/>
-          <p:nvPr/>
-        </p:nvSpPr>
-        <p:spPr>
-          <a:xfrm>
-            <a:off x="347472" y="1627632"/>
-            <a:ext cx="685800" cy="320040"/>
-          </a:xfrm>
-          <a:prstGeom prst="rect">
-            <a:avLst/>
-          </a:prstGeom>
-          <a:noFill/>
-        </p:spPr>
-        <p:txBody>
-          <a:bodyPr wrap="square">
-            <a:spAutoFit/>
-          </a:bodyPr>
-          <a:lstStyle/>
-          <a:p>
-            <a:pPr algn="l"/>
-            <a:r>
-              <a:rPr sz="800" b="1" i="0">
-                <a:solidFill>
-                  <a:srgbClr val="FFFFFF"/>
-                </a:solidFill>
-              </a:rPr>
-              <a:t>GOLD</a:t>
-            </a:r>
-          </a:p>
-        </p:txBody>
-      </p:sp>
-      <p:sp>
-        <p:nvSpPr>
-          <p:cNvPr id="12" name="TextBox 11"/>
-          <p:cNvSpPr txBox="1"/>
-          <p:nvPr/>
-        </p:nvSpPr>
-        <p:spPr>
-          <a:xfrm>
-            <a:off x="1097280" y="1664208"/>
-            <a:ext cx="3931920" cy="274320"/>
-          </a:xfrm>
-          <a:prstGeom prst="rect">
-            <a:avLst/>
-          </a:prstGeom>
-          <a:noFill/>
-        </p:spPr>
-        <p:txBody>
-          <a:bodyPr wrap="square">
-            <a:spAutoFit/>
-          </a:bodyPr>
-          <a:lstStyle/>
-          <a:p>
-            <a:pPr algn="l"/>
-            <a:r>
-              <a:rPr sz="900" b="0" i="0">
-                <a:solidFill>
-                  <a:srgbClr val="FFFFFF"/>
-                </a:solidFill>
-              </a:rPr>
-              <a:t>Dimensional  |  BI Dashboards  |  Genie (conversational)  |  AI/BI</a:t>
-            </a:r>
-          </a:p>
-        </p:txBody>
-      </p:sp>
-      <p:sp>
-        <p:nvSpPr>
-          <p:cNvPr id="13" name="Rectangle 12"/>
+          <p:cNvPr id="11" name="Rectangle 10"/>
           <p:cNvSpPr/>
           <p:nvPr/>
         </p:nvSpPr>
         <p:spPr>
           <a:xfrm>
-            <a:off x="274320" y="2084832"/>
-            <a:ext cx="4846320" cy="457200"/>
-          </a:xfrm>
-          <a:prstGeom prst="rect">
-            <a:avLst/>
-          </a:prstGeom>
-          <a:solidFill>
-            <a:srgbClr val="B85C1A"/>
-          </a:solidFill>
-          <a:ln>
-            <a:noFill/>
-          </a:ln>
-          <a:effectLst/>
-        </p:spPr>
-        <p:style>
-          <a:lnRef idx="1">
-            <a:schemeClr val="accent1"/>
-          </a:lnRef>
-          <a:fillRef idx="3">
-            <a:schemeClr val="accent1"/>
-          </a:fillRef>
-          <a:effectRef idx="2">
-            <a:schemeClr val="accent1"/>
-          </a:effectRef>
-          <a:fontRef idx="minor">
-            <a:schemeClr val="lt1"/>
-          </a:fontRef>
-        </p:style>
-        <p:txBody>
-          <a:bodyPr rtlCol="0" anchor="ctr"/>
-          <a:lstStyle/>
-          <a:p>
-            <a:pPr algn="ctr"/>
-          </a:p>
-        </p:txBody>
-      </p:sp>
-      <p:sp>
-        <p:nvSpPr>
-          <p:cNvPr id="14" name="TextBox 13"/>
-          <p:cNvSpPr txBox="1"/>
-          <p:nvPr/>
-        </p:nvSpPr>
-        <p:spPr>
-          <a:xfrm>
-            <a:off x="347472" y="2139696"/>
-            <a:ext cx="685800" cy="320040"/>
-          </a:xfrm>
-          <a:prstGeom prst="rect">
-            <a:avLst/>
-          </a:prstGeom>
-          <a:noFill/>
-        </p:spPr>
-        <p:txBody>
-          <a:bodyPr wrap="square">
-            <a:spAutoFit/>
-          </a:bodyPr>
-          <a:lstStyle/>
-          <a:p>
-            <a:pPr algn="l"/>
-            <a:r>
-              <a:rPr sz="800" b="1" i="0">
-                <a:solidFill>
-                  <a:srgbClr val="FFFFFF"/>
-                </a:solidFill>
-              </a:rPr>
-              <a:t>GOLD</a:t>
-            </a:r>
-          </a:p>
-        </p:txBody>
-      </p:sp>
-      <p:sp>
-        <p:nvSpPr>
-          <p:cNvPr id="15" name="TextBox 14"/>
-          <p:cNvSpPr txBox="1"/>
-          <p:nvPr/>
-        </p:nvSpPr>
-        <p:spPr>
-          <a:xfrm>
-            <a:off x="1097280" y="2176272"/>
-            <a:ext cx="3931920" cy="274320"/>
-          </a:xfrm>
-          <a:prstGeom prst="rect">
-            <a:avLst/>
-          </a:prstGeom>
-          <a:noFill/>
-        </p:spPr>
-        <p:txBody>
-          <a:bodyPr wrap="square">
-            <a:spAutoFit/>
-          </a:bodyPr>
-          <a:lstStyle/>
-          <a:p>
-            <a:pPr algn="l"/>
-            <a:r>
-              <a:rPr sz="900" b="0" i="0">
-                <a:solidFill>
-                  <a:srgbClr val="FFFFFF"/>
-                </a:solidFill>
-              </a:rPr>
-              <a:t>Enriched  |  Exploratory  |  Sandbox</a:t>
-            </a:r>
-          </a:p>
-        </p:txBody>
-      </p:sp>
-      <p:sp>
-        <p:nvSpPr>
-          <p:cNvPr id="16" name="Rectangle 15"/>
-          <p:cNvSpPr/>
-          <p:nvPr/>
-        </p:nvSpPr>
-        <p:spPr>
-          <a:xfrm>
-            <a:off x="274320" y="2596896"/>
-            <a:ext cx="4846320" cy="457200"/>
-          </a:xfrm>
-          <a:prstGeom prst="rect">
-            <a:avLst/>
-          </a:prstGeom>
-          <a:solidFill>
-            <a:srgbClr val="708EB0"/>
-          </a:solidFill>
-          <a:ln>
-            <a:noFill/>
-          </a:ln>
-          <a:effectLst/>
-        </p:spPr>
-        <p:style>
-          <a:lnRef idx="1">
-            <a:schemeClr val="accent1"/>
-          </a:lnRef>
-          <a:fillRef idx="3">
-            <a:schemeClr val="accent1"/>
-          </a:fillRef>
-          <a:effectRef idx="2">
-            <a:schemeClr val="accent1"/>
-          </a:effectRef>
-          <a:fontRef idx="minor">
-            <a:schemeClr val="lt1"/>
-          </a:fontRef>
-        </p:style>
-        <p:txBody>
-          <a:bodyPr rtlCol="0" anchor="ctr"/>
-          <a:lstStyle/>
-          <a:p>
-            <a:pPr algn="ctr"/>
-          </a:p>
-        </p:txBody>
-      </p:sp>
-      <p:sp>
-        <p:nvSpPr>
-          <p:cNvPr id="17" name="TextBox 16"/>
-          <p:cNvSpPr txBox="1"/>
-          <p:nvPr/>
-        </p:nvSpPr>
-        <p:spPr>
-          <a:xfrm>
-            <a:off x="347472" y="2651760"/>
-            <a:ext cx="685800" cy="320040"/>
-          </a:xfrm>
-          <a:prstGeom prst="rect">
-            <a:avLst/>
-          </a:prstGeom>
-          <a:noFill/>
-        </p:spPr>
-        <p:txBody>
-          <a:bodyPr wrap="square">
-            <a:spAutoFit/>
-          </a:bodyPr>
-          <a:lstStyle/>
-          <a:p>
-            <a:pPr algn="l"/>
-            <a:r>
-              <a:rPr sz="800" b="1" i="0">
-                <a:solidFill>
-                  <a:srgbClr val="FFFFFF"/>
-                </a:solidFill>
-              </a:rPr>
-              <a:t>SILVER</a:t>
-            </a:r>
-          </a:p>
-        </p:txBody>
-      </p:sp>
-      <p:sp>
-        <p:nvSpPr>
-          <p:cNvPr id="18" name="TextBox 17"/>
-          <p:cNvSpPr txBox="1"/>
-          <p:nvPr/>
-        </p:nvSpPr>
-        <p:spPr>
-          <a:xfrm>
-            <a:off x="1097280" y="2688336"/>
-            <a:ext cx="3931920" cy="274320"/>
-          </a:xfrm>
-          <a:prstGeom prst="rect">
-            <a:avLst/>
-          </a:prstGeom>
-          <a:noFill/>
-        </p:spPr>
-        <p:txBody>
-          <a:bodyPr wrap="square">
-            <a:spAutoFit/>
-          </a:bodyPr>
-          <a:lstStyle/>
-          <a:p>
-            <a:pPr algn="l"/>
-            <a:r>
-              <a:rPr sz="900" b="0" i="0">
-                <a:solidFill>
-                  <a:srgbClr val="FFFFFF"/>
-                </a:solidFill>
-              </a:rPr>
-              <a:t>Base  |  Protected (PI-masked)</a:t>
-            </a:r>
-          </a:p>
-        </p:txBody>
-      </p:sp>
-      <p:sp>
-        <p:nvSpPr>
-          <p:cNvPr id="19" name="Rectangle 18"/>
-          <p:cNvSpPr/>
-          <p:nvPr/>
-        </p:nvSpPr>
-        <p:spPr>
-          <a:xfrm>
-            <a:off x="274320" y="3108960"/>
-            <a:ext cx="4846320" cy="457200"/>
-          </a:xfrm>
-          <a:prstGeom prst="rect">
-            <a:avLst/>
-          </a:prstGeom>
-          <a:solidFill>
-            <a:srgbClr val="708EB0"/>
-          </a:solidFill>
-          <a:ln>
-            <a:noFill/>
-          </a:ln>
-          <a:effectLst/>
-        </p:spPr>
-        <p:style>
-          <a:lnRef idx="1">
-            <a:schemeClr val="accent1"/>
-          </a:lnRef>
-          <a:fillRef idx="3">
-            <a:schemeClr val="accent1"/>
-          </a:fillRef>
-          <a:effectRef idx="2">
-            <a:schemeClr val="accent1"/>
-          </a:effectRef>
-          <a:fontRef idx="minor">
-            <a:schemeClr val="lt1"/>
-          </a:fontRef>
-        </p:style>
-        <p:txBody>
-          <a:bodyPr rtlCol="0" anchor="ctr"/>
-          <a:lstStyle/>
-          <a:p>
-            <a:pPr algn="ctr"/>
-          </a:p>
-        </p:txBody>
-      </p:sp>
-      <p:sp>
-        <p:nvSpPr>
-          <p:cNvPr id="20" name="TextBox 19"/>
-          <p:cNvSpPr txBox="1"/>
-          <p:nvPr/>
-        </p:nvSpPr>
-        <p:spPr>
-          <a:xfrm>
-            <a:off x="347472" y="3163824"/>
-            <a:ext cx="685800" cy="320040"/>
-          </a:xfrm>
-          <a:prstGeom prst="rect">
-            <a:avLst/>
-          </a:prstGeom>
-          <a:noFill/>
-        </p:spPr>
-        <p:txBody>
-          <a:bodyPr wrap="square">
-            <a:spAutoFit/>
-          </a:bodyPr>
-          <a:lstStyle/>
-          <a:p>
-            <a:pPr algn="l"/>
-            <a:r>
-              <a:rPr sz="800" b="1" i="0">
-                <a:solidFill>
-                  <a:srgbClr val="FFFFFF"/>
-                </a:solidFill>
-              </a:rPr>
-              <a:t>SILVER</a:t>
-            </a:r>
-          </a:p>
-        </p:txBody>
-      </p:sp>
-      <p:sp>
-        <p:nvSpPr>
-          <p:cNvPr id="21" name="TextBox 20"/>
-          <p:cNvSpPr txBox="1"/>
-          <p:nvPr/>
-        </p:nvSpPr>
-        <p:spPr>
-          <a:xfrm>
-            <a:off x="1097280" y="3200400"/>
-            <a:ext cx="3931920" cy="274320"/>
-          </a:xfrm>
-          <a:prstGeom prst="rect">
-            <a:avLst/>
-          </a:prstGeom>
-          <a:noFill/>
-        </p:spPr>
-        <p:txBody>
-          <a:bodyPr wrap="square">
-            <a:spAutoFit/>
-          </a:bodyPr>
-          <a:lstStyle/>
-          <a:p>
-            <a:pPr algn="l"/>
-            <a:r>
-              <a:rPr sz="900" b="0" i="0">
-                <a:solidFill>
-                  <a:srgbClr val="FFFFFF"/>
-                </a:solidFill>
-              </a:rPr>
-              <a:t>Processed  |  Raw</a:t>
-            </a:r>
-          </a:p>
-        </p:txBody>
-      </p:sp>
-      <p:sp>
-        <p:nvSpPr>
-          <p:cNvPr id="22" name="Rectangle 21"/>
-          <p:cNvSpPr/>
-          <p:nvPr/>
-        </p:nvSpPr>
-        <p:spPr>
-          <a:xfrm>
-            <a:off x="274320" y="3621024"/>
-            <a:ext cx="4846320" cy="457200"/>
-          </a:xfrm>
-          <a:prstGeom prst="rect">
-            <a:avLst/>
-          </a:prstGeom>
-          <a:solidFill>
-            <a:srgbClr val="8B6E4A"/>
-          </a:solidFill>
-          <a:ln>
-            <a:noFill/>
-          </a:ln>
-          <a:effectLst/>
-        </p:spPr>
-        <p:style>
-          <a:lnRef idx="1">
-            <a:schemeClr val="accent1"/>
-          </a:lnRef>
-          <a:fillRef idx="3">
-            <a:schemeClr val="accent1"/>
-          </a:fillRef>
-          <a:effectRef idx="2">
-            <a:schemeClr val="accent1"/>
-          </a:effectRef>
-          <a:fontRef idx="minor">
-            <a:schemeClr val="lt1"/>
-          </a:fontRef>
-        </p:style>
-        <p:txBody>
-          <a:bodyPr rtlCol="0" anchor="ctr"/>
-          <a:lstStyle/>
-          <a:p>
-            <a:pPr algn="ctr"/>
-          </a:p>
-        </p:txBody>
-      </p:sp>
-      <p:sp>
-        <p:nvSpPr>
-          <p:cNvPr id="23" name="TextBox 22"/>
-          <p:cNvSpPr txBox="1"/>
-          <p:nvPr/>
-        </p:nvSpPr>
-        <p:spPr>
-          <a:xfrm>
-            <a:off x="347472" y="3675887"/>
-            <a:ext cx="685800" cy="320040"/>
-          </a:xfrm>
-          <a:prstGeom prst="rect">
-            <a:avLst/>
-          </a:prstGeom>
-          <a:noFill/>
-        </p:spPr>
-        <p:txBody>
-          <a:bodyPr wrap="square">
-            <a:spAutoFit/>
-          </a:bodyPr>
-          <a:lstStyle/>
-          <a:p>
-            <a:pPr algn="l"/>
-            <a:r>
-              <a:rPr sz="800" b="1" i="0">
-                <a:solidFill>
-                  <a:srgbClr val="FFFFFF"/>
-                </a:solidFill>
-              </a:rPr>
-              <a:t>BRONZE</a:t>
-            </a:r>
-          </a:p>
-        </p:txBody>
-      </p:sp>
-      <p:sp>
-        <p:nvSpPr>
-          <p:cNvPr id="24" name="TextBox 23"/>
-          <p:cNvSpPr txBox="1"/>
-          <p:nvPr/>
-        </p:nvSpPr>
-        <p:spPr>
-          <a:xfrm>
-            <a:off x="1097280" y="3712463"/>
-            <a:ext cx="3931920" cy="274320"/>
-          </a:xfrm>
-          <a:prstGeom prst="rect">
-            <a:avLst/>
-          </a:prstGeom>
-          <a:noFill/>
-        </p:spPr>
-        <p:txBody>
-          <a:bodyPr wrap="square">
-            <a:spAutoFit/>
-          </a:bodyPr>
-          <a:lstStyle/>
-          <a:p>
-            <a:pPr algn="l"/>
-            <a:r>
-              <a:rPr sz="900" b="0" i="0">
-                <a:solidFill>
-                  <a:srgbClr val="FFFFFF"/>
-                </a:solidFill>
-              </a:rPr>
-              <a:t>Landing  |  Quarantine</a:t>
-            </a:r>
-          </a:p>
-        </p:txBody>
-      </p:sp>
-      <p:sp>
-        <p:nvSpPr>
-          <p:cNvPr id="25" name="TextBox 24"/>
-          <p:cNvSpPr txBox="1"/>
-          <p:nvPr/>
-        </p:nvSpPr>
-        <p:spPr>
-          <a:xfrm>
-            <a:off x="274320" y="1316736"/>
-            <a:ext cx="4846320" cy="219456"/>
-          </a:xfrm>
-          <a:prstGeom prst="rect">
-            <a:avLst/>
-          </a:prstGeom>
-          <a:noFill/>
-        </p:spPr>
-        <p:txBody>
-          <a:bodyPr wrap="square">
-            <a:spAutoFit/>
-          </a:bodyPr>
-          <a:lstStyle/>
-          <a:p>
-            <a:pPr algn="l"/>
-            <a:r>
-              <a:rPr sz="900" b="1" i="0">
-                <a:solidFill>
-                  <a:srgbClr val="006E8C"/>
-                </a:solidFill>
-              </a:rPr>
-              <a:t>Medallion Architecture  (10 zones)</a:t>
-            </a:r>
-          </a:p>
-        </p:txBody>
-      </p:sp>
-      <p:sp>
-        <p:nvSpPr>
-          <p:cNvPr id="26" name="Rectangle 25"/>
-          <p:cNvSpPr/>
-          <p:nvPr/>
-        </p:nvSpPr>
-        <p:spPr>
-          <a:xfrm>
-            <a:off x="274320" y="4169664"/>
-            <a:ext cx="4846320" cy="274320"/>
+            <a:off x="274320" y="1466424"/>
+            <a:ext cx="1620000" cy="840000"/>
           </a:xfrm>
           <a:prstGeom prst="rect">
             <a:avLst/>
@@ -5194,7 +4603,6 @@
           <a:ln>
             <a:noFill/>
           </a:ln>
-          <a:effectLst/>
         </p:spPr>
         <p:style>
           <a:lnRef idx="1">
@@ -5220,14 +4628,14 @@
       </p:sp>
       <p:sp>
         <p:nvSpPr>
-          <p:cNvPr id="27" name="TextBox 26"/>
+          <p:cNvPr id="12" name="TextBox 11"/>
           <p:cNvSpPr txBox="1"/>
           <p:nvPr/>
         </p:nvSpPr>
         <p:spPr>
           <a:xfrm>
-            <a:off x="365760" y="4197096"/>
-            <a:ext cx="4709159" cy="201168"/>
+            <a:off x="384048" y="1546424"/>
+            <a:ext cx="400000" cy="310000"/>
           </a:xfrm>
           <a:prstGeom prst="rect">
             <a:avLst/>
@@ -5242,26 +4650,26 @@
           <a:p>
             <a:pPr algn="l"/>
             <a:r>
-              <a:rPr sz="850" b="0" i="0">
-                <a:solidFill>
-                  <a:srgbClr val="B0C8E0"/>
-                </a:solidFill>
-              </a:rPr>
-              <a:t>Unity Catalog  —  single metastore, domain-based catalogs, ABAC tag enforcement</a:t>
-            </a:r>
-          </a:p>
-        </p:txBody>
-      </p:sp>
-      <p:sp>
-        <p:nvSpPr>
-          <p:cNvPr id="28" name="TextBox 27"/>
+              <a:rPr sz="2200" b="1" i="0">
+                <a:solidFill>
+                  <a:srgbClr val="006E8C"/>
+                </a:solidFill>
+              </a:rPr>
+              <a:t>01</a:t>
+            </a:r>
+          </a:p>
+        </p:txBody>
+      </p:sp>
+      <p:sp>
+        <p:nvSpPr>
+          <p:cNvPr id="13" name="TextBox 12"/>
           <p:cNvSpPr txBox="1"/>
           <p:nvPr/>
         </p:nvSpPr>
         <p:spPr>
           <a:xfrm>
-            <a:off x="5394960" y="1316736"/>
-            <a:ext cx="3566160" cy="219456"/>
+            <a:off x="384048" y="1866424"/>
+            <a:ext cx="1400544" cy="300000"/>
           </a:xfrm>
           <a:prstGeom prst="rect">
             <a:avLst/>
@@ -5276,26 +4684,94 @@
           <a:p>
             <a:pPr algn="l"/>
             <a:r>
-              <a:rPr sz="900" b="1" i="0">
+              <a:rPr sz="1050" b="1" i="0">
+                <a:solidFill>
+                  <a:srgbClr val="B0C8E0"/>
+                </a:solidFill>
+              </a:rPr>
+              <a:t>Trusted Data Foundation</a:t>
+            </a:r>
+          </a:p>
+        </p:txBody>
+      </p:sp>
+      <p:sp>
+        <p:nvSpPr>
+          <p:cNvPr id="14" name="TextBox 13"/>
+          <p:cNvSpPr txBox="1"/>
+          <p:nvPr/>
+        </p:nvSpPr>
+        <p:spPr>
+          <a:xfrm>
+            <a:off x="384048" y="2111424"/>
+            <a:ext cx="1400544" cy="170000"/>
+          </a:xfrm>
+          <a:prstGeom prst="rect">
+            <a:avLst/>
+          </a:prstGeom>
+          <a:noFill/>
+        </p:spPr>
+        <p:txBody>
+          <a:bodyPr wrap="square">
+            <a:spAutoFit/>
+          </a:bodyPr>
+          <a:lstStyle/>
+          <a:p>
+            <a:pPr algn="l"/>
+            <a:r>
+              <a:rPr sz="850" b="0" i="0">
                 <a:solidFill>
                   <a:srgbClr val="006E8C"/>
                 </a:solidFill>
               </a:rPr>
-              <a:t>Governance Pillars</a:t>
-            </a:r>
-          </a:p>
-        </p:txBody>
-      </p:sp>
-      <p:sp>
-        <p:nvSpPr>
-          <p:cNvPr id="29" name="Rectangle 28"/>
+              <a:t>Epics: E1 · E2 · E3</a:t>
+            </a:r>
+          </a:p>
+        </p:txBody>
+      </p:sp>
+      <p:sp>
+        <p:nvSpPr>
+          <p:cNvPr id="15" name="TextBox 14"/>
+          <p:cNvSpPr txBox="1"/>
+          <p:nvPr/>
+        </p:nvSpPr>
+        <p:spPr>
+          <a:xfrm>
+            <a:off x="2004048" y="1554206"/>
+            <a:ext cx="6755904" cy="664436"/>
+          </a:xfrm>
+          <a:prstGeom prst="rect">
+            <a:avLst/>
+          </a:prstGeom>
+          <a:noFill/>
+        </p:spPr>
+        <p:txBody>
+          <a:bodyPr wrap="square">
+            <a:spAutoFit/>
+          </a:bodyPr>
+          <a:lstStyle/>
+          <a:p>
+            <a:pPr algn="l"/>
+            <a:r>
+              <a:rPr sz="950" b="0" i="0">
+                <a:solidFill>
+                  <a:srgbClr val="2C2C2C"/>
+                </a:solidFill>
+              </a:rPr>
+              <a:t>Build and operationalise a single governed lakehouse platform — replacing four fragmented pipeline technologies with a metadata-driven framework on Databricks. Medallion architecture across 10 structured zones, Unity Catalog for access governance, and certified data products with contractual quality guarantees.</a:t>
+            </a:r>
+          </a:p>
+        </p:txBody>
+      </p:sp>
+      <p:sp>
+        <p:nvSpPr>
+          <p:cNvPr id="16" name="Rectangle 15"/>
           <p:cNvSpPr/>
           <p:nvPr/>
         </p:nvSpPr>
         <p:spPr>
           <a:xfrm>
-            <a:off x="5394960" y="1572768"/>
-            <a:ext cx="3493008" cy="950976"/>
+            <a:off x="274320" y="2358424"/>
+            <a:ext cx="8595360" cy="840000"/>
           </a:xfrm>
           <a:prstGeom prst="rect">
             <a:avLst/>
@@ -5305,10 +4781,9 @@
           </a:solidFill>
           <a:ln w="9525">
             <a:solidFill>
-              <a:srgbClr val="CCD6E0"/>
+              <a:srgbClr val="006E8C"/>
             </a:solidFill>
           </a:ln>
-          <a:effectLst/>
         </p:spPr>
         <p:style>
           <a:lnRef idx="1">
@@ -5334,59 +4809,24 @@
       </p:sp>
       <p:sp>
         <p:nvSpPr>
-          <p:cNvPr id="30" name="TextBox 29"/>
-          <p:cNvSpPr txBox="1"/>
-          <p:nvPr/>
-        </p:nvSpPr>
-        <p:spPr>
-          <a:xfrm>
-            <a:off x="5504688" y="1645920"/>
-            <a:ext cx="3310127" cy="256032"/>
-          </a:xfrm>
-          <a:prstGeom prst="rect">
-            <a:avLst/>
-          </a:prstGeom>
-          <a:noFill/>
-        </p:spPr>
-        <p:txBody>
-          <a:bodyPr wrap="square">
-            <a:spAutoFit/>
-          </a:bodyPr>
-          <a:lstStyle/>
-          <a:p>
-            <a:pPr algn="l"/>
-            <a:r>
-              <a:rPr sz="1000" b="1" i="0">
-                <a:solidFill>
-                  <a:srgbClr val="006E8C"/>
-                </a:solidFill>
-              </a:rPr>
-              <a:t>4-Layer Tagging Model</a:t>
-            </a:r>
-          </a:p>
-        </p:txBody>
-      </p:sp>
-      <p:sp>
-        <p:nvSpPr>
-          <p:cNvPr id="31" name="Rectangle 30"/>
+          <p:cNvPr id="17" name="Rectangle 16"/>
           <p:cNvSpPr/>
           <p:nvPr/>
         </p:nvSpPr>
         <p:spPr>
           <a:xfrm>
-            <a:off x="5504688" y="1901952"/>
-            <a:ext cx="3273552" cy="22860"/>
+            <a:off x="274320" y="2358424"/>
+            <a:ext cx="1620000" cy="840000"/>
           </a:xfrm>
           <a:prstGeom prst="rect">
             <a:avLst/>
           </a:prstGeom>
           <a:solidFill>
-            <a:srgbClr val="006E8C"/>
+            <a:srgbClr val="1B2A4A"/>
           </a:solidFill>
           <a:ln>
             <a:noFill/>
           </a:ln>
-          <a:effectLst/>
         </p:spPr>
         <p:style>
           <a:lnRef idx="1">
@@ -5412,14 +4852,14 @@
       </p:sp>
       <p:sp>
         <p:nvSpPr>
-          <p:cNvPr id="32" name="TextBox 31"/>
+          <p:cNvPr id="18" name="TextBox 17"/>
           <p:cNvSpPr txBox="1"/>
           <p:nvPr/>
         </p:nvSpPr>
         <p:spPr>
           <a:xfrm>
-            <a:off x="5504688" y="1956816"/>
-            <a:ext cx="3273552" cy="448056"/>
+            <a:off x="384048" y="2438424"/>
+            <a:ext cx="400000" cy="310000"/>
           </a:xfrm>
           <a:prstGeom prst="rect">
             <a:avLst/>
@@ -5432,77 +4872,130 @@
           </a:bodyPr>
           <a:lstStyle/>
           <a:p>
-            <a:pPr>
-              <a:spcBef>
-                <a:spcPts val="200"/>
-              </a:spcBef>
-            </a:pPr>
-            <a:r>
-              <a:rPr sz="850">
+            <a:pPr algn="l"/>
+            <a:r>
+              <a:rPr sz="2200" b="1" i="0">
+                <a:solidFill>
+                  <a:srgbClr val="006E8C"/>
+                </a:solidFill>
+              </a:rPr>
+              <a:t>02</a:t>
+            </a:r>
+          </a:p>
+        </p:txBody>
+      </p:sp>
+      <p:sp>
+        <p:nvSpPr>
+          <p:cNvPr id="19" name="TextBox 18"/>
+          <p:cNvSpPr txBox="1"/>
+          <p:nvPr/>
+        </p:nvSpPr>
+        <p:spPr>
+          <a:xfrm>
+            <a:off x="384048" y="2758424"/>
+            <a:ext cx="1400544" cy="300000"/>
+          </a:xfrm>
+          <a:prstGeom prst="rect">
+            <a:avLst/>
+          </a:prstGeom>
+          <a:noFill/>
+        </p:spPr>
+        <p:txBody>
+          <a:bodyPr wrap="square">
+            <a:spAutoFit/>
+          </a:bodyPr>
+          <a:lstStyle/>
+          <a:p>
+            <a:pPr algn="l"/>
+            <a:r>
+              <a:rPr sz="1050" b="1" i="0">
+                <a:solidFill>
+                  <a:srgbClr val="B0C8E0"/>
+                </a:solidFill>
+              </a:rPr>
+              <a:t>Compliance by Design</a:t>
+            </a:r>
+          </a:p>
+        </p:txBody>
+      </p:sp>
+      <p:sp>
+        <p:nvSpPr>
+          <p:cNvPr id="20" name="TextBox 19"/>
+          <p:cNvSpPr txBox="1"/>
+          <p:nvPr/>
+        </p:nvSpPr>
+        <p:spPr>
+          <a:xfrm>
+            <a:off x="384048" y="3003424"/>
+            <a:ext cx="1400544" cy="170000"/>
+          </a:xfrm>
+          <a:prstGeom prst="rect">
+            <a:avLst/>
+          </a:prstGeom>
+          <a:noFill/>
+        </p:spPr>
+        <p:txBody>
+          <a:bodyPr wrap="square">
+            <a:spAutoFit/>
+          </a:bodyPr>
+          <a:lstStyle/>
+          <a:p>
+            <a:pPr algn="l"/>
+            <a:r>
+              <a:rPr sz="850" b="0" i="0">
+                <a:solidFill>
+                  <a:srgbClr val="006E8C"/>
+                </a:solidFill>
+              </a:rPr>
+              <a:t>Epics: E4</a:t>
+            </a:r>
+          </a:p>
+        </p:txBody>
+      </p:sp>
+      <p:sp>
+        <p:nvSpPr>
+          <p:cNvPr id="21" name="TextBox 20"/>
+          <p:cNvSpPr txBox="1"/>
+          <p:nvPr/>
+        </p:nvSpPr>
+        <p:spPr>
+          <a:xfrm>
+            <a:off x="2004048" y="2446206"/>
+            <a:ext cx="6755904" cy="664436"/>
+          </a:xfrm>
+          <a:prstGeom prst="rect">
+            <a:avLst/>
+          </a:prstGeom>
+          <a:noFill/>
+        </p:spPr>
+        <p:txBody>
+          <a:bodyPr wrap="square">
+            <a:spAutoFit/>
+          </a:bodyPr>
+          <a:lstStyle/>
+          <a:p>
+            <a:pPr algn="l"/>
+            <a:r>
+              <a:rPr sz="950" b="0" i="0">
                 <a:solidFill>
                   <a:srgbClr val="2C2C2C"/>
                 </a:solidFill>
               </a:rPr>
-              <a:t>• Layer 1: WAICP Classification (mandatory)</a:t>
-            </a:r>
-          </a:p>
-          <a:p>
-            <a:pPr>
-              <a:spcBef>
-                <a:spcPts val="200"/>
-              </a:spcBef>
-            </a:pPr>
-            <a:r>
-              <a:rPr sz="850">
-                <a:solidFill>
-                  <a:srgbClr val="2C2C2C"/>
-                </a:solidFill>
-              </a:rPr>
-              <a:t>• Layer 2: Sensitivity Reason (PII, SOCI, AI)</a:t>
-            </a:r>
-          </a:p>
-          <a:p>
-            <a:pPr>
-              <a:spcBef>
-                <a:spcPts val="200"/>
-              </a:spcBef>
-            </a:pPr>
-            <a:r>
-              <a:rPr sz="850">
-                <a:solidFill>
-                  <a:srgbClr val="2C2C2C"/>
-                </a:solidFill>
-              </a:rPr>
-              <a:t>• Layer 3: Access &amp; Handling (masking, contracts)</a:t>
-            </a:r>
-          </a:p>
-          <a:p>
-            <a:pPr>
-              <a:spcBef>
-                <a:spcPts val="200"/>
-              </a:spcBef>
-            </a:pPr>
-            <a:r>
-              <a:rPr sz="850">
-                <a:solidFill>
-                  <a:srgbClr val="2C2C2C"/>
-                </a:solidFill>
-              </a:rPr>
-              <a:t>• Layer 4: Operational Metadata (owner, refresh, SLA)</a:t>
-            </a:r>
-          </a:p>
-        </p:txBody>
-      </p:sp>
-      <p:sp>
-        <p:nvSpPr>
-          <p:cNvPr id="33" name="Rectangle 32"/>
+              <a:t>Embed regulatory compliance architecturally rather than managing it manually. WAICP, PRIS Act 2024, SOCI Act 2018, and State Records Act obligations enforced through tag-driven attribute-based access control (ABAC) and complete audit trails in Unity Catalog — demonstrable on demand.</a:t>
+            </a:r>
+          </a:p>
+        </p:txBody>
+      </p:sp>
+      <p:sp>
+        <p:nvSpPr>
+          <p:cNvPr id="22" name="Rectangle 21"/>
           <p:cNvSpPr/>
           <p:nvPr/>
         </p:nvSpPr>
         <p:spPr>
           <a:xfrm>
-            <a:off x="5394960" y="2578608"/>
-            <a:ext cx="3493008" cy="950976"/>
+            <a:off x="274320" y="3250424"/>
+            <a:ext cx="8595360" cy="840000"/>
           </a:xfrm>
           <a:prstGeom prst="rect">
             <a:avLst/>
@@ -5512,10 +5005,9 @@
           </a:solidFill>
           <a:ln w="9525">
             <a:solidFill>
-              <a:srgbClr val="CCD6E0"/>
+              <a:srgbClr val="006E8C"/>
             </a:solidFill>
           </a:ln>
-          <a:effectLst/>
         </p:spPr>
         <p:style>
           <a:lnRef idx="1">
@@ -5541,59 +5033,24 @@
       </p:sp>
       <p:sp>
         <p:nvSpPr>
-          <p:cNvPr id="34" name="TextBox 33"/>
-          <p:cNvSpPr txBox="1"/>
-          <p:nvPr/>
-        </p:nvSpPr>
-        <p:spPr>
-          <a:xfrm>
-            <a:off x="5504688" y="2651760"/>
-            <a:ext cx="3310127" cy="256032"/>
-          </a:xfrm>
-          <a:prstGeom prst="rect">
-            <a:avLst/>
-          </a:prstGeom>
-          <a:noFill/>
-        </p:spPr>
-        <p:txBody>
-          <a:bodyPr wrap="square">
-            <a:spAutoFit/>
-          </a:bodyPr>
-          <a:lstStyle/>
-          <a:p>
-            <a:pPr algn="l"/>
-            <a:r>
-              <a:rPr sz="1000" b="1" i="0">
-                <a:solidFill>
-                  <a:srgbClr val="006E8C"/>
-                </a:solidFill>
-              </a:rPr>
-              <a:t>Access Control (ABAC)</a:t>
-            </a:r>
-          </a:p>
-        </p:txBody>
-      </p:sp>
-      <p:sp>
-        <p:nvSpPr>
-          <p:cNvPr id="35" name="Rectangle 34"/>
+          <p:cNvPr id="23" name="Rectangle 22"/>
           <p:cNvSpPr/>
           <p:nvPr/>
         </p:nvSpPr>
         <p:spPr>
           <a:xfrm>
-            <a:off x="5504688" y="2907792"/>
-            <a:ext cx="3273552" cy="22860"/>
+            <a:off x="274320" y="3250424"/>
+            <a:ext cx="1620000" cy="840000"/>
           </a:xfrm>
           <a:prstGeom prst="rect">
             <a:avLst/>
           </a:prstGeom>
           <a:solidFill>
-            <a:srgbClr val="006E8C"/>
+            <a:srgbClr val="1B2A4A"/>
           </a:solidFill>
           <a:ln>
             <a:noFill/>
           </a:ln>
-          <a:effectLst/>
         </p:spPr>
         <p:style>
           <a:lnRef idx="1">
@@ -5619,14 +5076,14 @@
       </p:sp>
       <p:sp>
         <p:nvSpPr>
-          <p:cNvPr id="36" name="TextBox 35"/>
+          <p:cNvPr id="24" name="TextBox 23"/>
           <p:cNvSpPr txBox="1"/>
           <p:nvPr/>
         </p:nvSpPr>
         <p:spPr>
           <a:xfrm>
-            <a:off x="5504688" y="2962656"/>
-            <a:ext cx="3273552" cy="448056"/>
+            <a:off x="384048" y="3330424"/>
+            <a:ext cx="400000" cy="310000"/>
           </a:xfrm>
           <a:prstGeom prst="rect">
             <a:avLst/>
@@ -5639,62 +5096,130 @@
           </a:bodyPr>
           <a:lstStyle/>
           <a:p>
-            <a:pPr>
-              <a:spcBef>
-                <a:spcPts val="200"/>
-              </a:spcBef>
-            </a:pPr>
-            <a:r>
-              <a:rPr sz="850">
+            <a:pPr algn="l"/>
+            <a:r>
+              <a:rPr sz="2200" b="1" i="0">
+                <a:solidFill>
+                  <a:srgbClr val="006E8C"/>
+                </a:solidFill>
+              </a:rPr>
+              <a:t>03</a:t>
+            </a:r>
+          </a:p>
+        </p:txBody>
+      </p:sp>
+      <p:sp>
+        <p:nvSpPr>
+          <p:cNvPr id="25" name="TextBox 24"/>
+          <p:cNvSpPr txBox="1"/>
+          <p:nvPr/>
+        </p:nvSpPr>
+        <p:spPr>
+          <a:xfrm>
+            <a:off x="384048" y="3650424"/>
+            <a:ext cx="1400544" cy="300000"/>
+          </a:xfrm>
+          <a:prstGeom prst="rect">
+            <a:avLst/>
+          </a:prstGeom>
+          <a:noFill/>
+        </p:spPr>
+        <p:txBody>
+          <a:bodyPr wrap="square">
+            <a:spAutoFit/>
+          </a:bodyPr>
+          <a:lstStyle/>
+          <a:p>
+            <a:pPr algn="l"/>
+            <a:r>
+              <a:rPr sz="1050" b="1" i="0">
+                <a:solidFill>
+                  <a:srgbClr val="B0C8E0"/>
+                </a:solidFill>
+              </a:rPr>
+              <a:t>Discoverable and Liquid Data</a:t>
+            </a:r>
+          </a:p>
+        </p:txBody>
+      </p:sp>
+      <p:sp>
+        <p:nvSpPr>
+          <p:cNvPr id="26" name="TextBox 25"/>
+          <p:cNvSpPr txBox="1"/>
+          <p:nvPr/>
+        </p:nvSpPr>
+        <p:spPr>
+          <a:xfrm>
+            <a:off x="384048" y="3895424"/>
+            <a:ext cx="1400544" cy="170000"/>
+          </a:xfrm>
+          <a:prstGeom prst="rect">
+            <a:avLst/>
+          </a:prstGeom>
+          <a:noFill/>
+        </p:spPr>
+        <p:txBody>
+          <a:bodyPr wrap="square">
+            <a:spAutoFit/>
+          </a:bodyPr>
+          <a:lstStyle/>
+          <a:p>
+            <a:pPr algn="l"/>
+            <a:r>
+              <a:rPr sz="850" b="0" i="0">
+                <a:solidFill>
+                  <a:srgbClr val="006E8C"/>
+                </a:solidFill>
+              </a:rPr>
+              <a:t>Epics: E3 · E6</a:t>
+            </a:r>
+          </a:p>
+        </p:txBody>
+      </p:sp>
+      <p:sp>
+        <p:nvSpPr>
+          <p:cNvPr id="27" name="TextBox 26"/>
+          <p:cNvSpPr txBox="1"/>
+          <p:nvPr/>
+        </p:nvSpPr>
+        <p:spPr>
+          <a:xfrm>
+            <a:off x="2004048" y="3338206"/>
+            <a:ext cx="6755904" cy="664436"/>
+          </a:xfrm>
+          <a:prstGeom prst="rect">
+            <a:avLst/>
+          </a:prstGeom>
+          <a:noFill/>
+        </p:spPr>
+        <p:txBody>
+          <a:bodyPr wrap="square">
+            <a:spAutoFit/>
+          </a:bodyPr>
+          <a:lstStyle/>
+          <a:p>
+            <a:pPr algn="l"/>
+            <a:r>
+              <a:rPr sz="950" b="0" i="0">
                 <a:solidFill>
                   <a:srgbClr val="2C2C2C"/>
                 </a:solidFill>
               </a:rPr>
-              <a:t>• Tag-driven row/column masking at query time</a:t>
-            </a:r>
-          </a:p>
-          <a:p>
-            <a:pPr>
-              <a:spcBef>
-                <a:spcPts val="200"/>
-              </a:spcBef>
-            </a:pPr>
-            <a:r>
-              <a:rPr sz="850">
-                <a:solidFill>
-                  <a:srgbClr val="2C2C2C"/>
-                </a:solidFill>
-              </a:rPr>
-              <a:t>• Domain-federated ownership via MANAGE privilege</a:t>
-            </a:r>
-          </a:p>
-          <a:p>
-            <a:pPr>
-              <a:spcBef>
-                <a:spcPts val="200"/>
-              </a:spcBef>
-            </a:pPr>
-            <a:r>
-              <a:rPr sz="850">
-                <a:solidFill>
-                  <a:srgbClr val="2C2C2C"/>
-                </a:solidFill>
-              </a:rPr>
-              <a:t>• Break-glass audit trail in Unity Catalog system tables</a:t>
-            </a:r>
-          </a:p>
-        </p:txBody>
-      </p:sp>
-      <p:sp>
-        <p:nvSpPr>
-          <p:cNvPr id="37" name="Rectangle 36"/>
+              <a:t>Make every data asset across all seven domains findable in Alation with full lineage from source through to Gold. Metadata stays current automatically via the OCF connector. Domain teams access and share data through governed, configuration-driven interfaces — not platform tickets.</a:t>
+            </a:r>
+          </a:p>
+        </p:txBody>
+      </p:sp>
+      <p:sp>
+        <p:nvSpPr>
+          <p:cNvPr id="28" name="Rectangle 27"/>
           <p:cNvSpPr/>
           <p:nvPr/>
         </p:nvSpPr>
         <p:spPr>
           <a:xfrm>
-            <a:off x="5394960" y="3584448"/>
-            <a:ext cx="3493008" cy="950976"/>
+            <a:off x="274320" y="4142424"/>
+            <a:ext cx="8595360" cy="840000"/>
           </a:xfrm>
           <a:prstGeom prst="rect">
             <a:avLst/>
@@ -5704,10 +5229,9 @@
           </a:solidFill>
           <a:ln w="9525">
             <a:solidFill>
-              <a:srgbClr val="CCD6E0"/>
+              <a:srgbClr val="006E8C"/>
             </a:solidFill>
           </a:ln>
-          <a:effectLst/>
         </p:spPr>
         <p:style>
           <a:lnRef idx="1">
@@ -5733,59 +5257,24 @@
       </p:sp>
       <p:sp>
         <p:nvSpPr>
-          <p:cNvPr id="38" name="TextBox 37"/>
-          <p:cNvSpPr txBox="1"/>
-          <p:nvPr/>
-        </p:nvSpPr>
-        <p:spPr>
-          <a:xfrm>
-            <a:off x="5504688" y="3657600"/>
-            <a:ext cx="3310127" cy="256032"/>
-          </a:xfrm>
-          <a:prstGeom prst="rect">
-            <a:avLst/>
-          </a:prstGeom>
-          <a:noFill/>
-        </p:spPr>
-        <p:txBody>
-          <a:bodyPr wrap="square">
-            <a:spAutoFit/>
-          </a:bodyPr>
-          <a:lstStyle/>
-          <a:p>
-            <a:pPr algn="l"/>
-            <a:r>
-              <a:rPr sz="1000" b="1" i="0">
-                <a:solidFill>
-                  <a:srgbClr val="006E8C"/>
-                </a:solidFill>
-              </a:rPr>
-              <a:t>Compliance by Architecture</a:t>
-            </a:r>
-          </a:p>
-        </p:txBody>
-      </p:sp>
-      <p:sp>
-        <p:nvSpPr>
-          <p:cNvPr id="39" name="Rectangle 38"/>
+          <p:cNvPr id="29" name="Rectangle 28"/>
           <p:cNvSpPr/>
           <p:nvPr/>
         </p:nvSpPr>
         <p:spPr>
           <a:xfrm>
-            <a:off x="5504688" y="3913632"/>
-            <a:ext cx="3273552" cy="22860"/>
+            <a:off x="274320" y="4142424"/>
+            <a:ext cx="1620000" cy="840000"/>
           </a:xfrm>
           <a:prstGeom prst="rect">
             <a:avLst/>
           </a:prstGeom>
           <a:solidFill>
-            <a:srgbClr val="006E8C"/>
+            <a:srgbClr val="1B2A4A"/>
           </a:solidFill>
           <a:ln>
             <a:noFill/>
           </a:ln>
-          <a:effectLst/>
         </p:spPr>
         <p:style>
           <a:lnRef idx="1">
@@ -5811,14 +5300,14 @@
       </p:sp>
       <p:sp>
         <p:nvSpPr>
-          <p:cNvPr id="40" name="TextBox 39"/>
+          <p:cNvPr id="30" name="TextBox 29"/>
           <p:cNvSpPr txBox="1"/>
           <p:nvPr/>
         </p:nvSpPr>
         <p:spPr>
           <a:xfrm>
-            <a:off x="5504688" y="3968496"/>
-            <a:ext cx="3273552" cy="448056"/>
+            <a:off x="384048" y="4222424"/>
+            <a:ext cx="400000" cy="310000"/>
           </a:xfrm>
           <a:prstGeom prst="rect">
             <a:avLst/>
@@ -5831,48 +5320,340 @@
           </a:bodyPr>
           <a:lstStyle/>
           <a:p>
-            <a:pPr>
-              <a:spcBef>
-                <a:spcPts val="200"/>
-              </a:spcBef>
-            </a:pPr>
-            <a:r>
-              <a:rPr sz="850">
+            <a:pPr algn="l"/>
+            <a:r>
+              <a:rPr sz="2200" b="1" i="0">
+                <a:solidFill>
+                  <a:srgbClr val="006E8C"/>
+                </a:solidFill>
+              </a:rPr>
+              <a:t>04</a:t>
+            </a:r>
+          </a:p>
+        </p:txBody>
+      </p:sp>
+      <p:sp>
+        <p:nvSpPr>
+          <p:cNvPr id="31" name="TextBox 30"/>
+          <p:cNvSpPr txBox="1"/>
+          <p:nvPr/>
+        </p:nvSpPr>
+        <p:spPr>
+          <a:xfrm>
+            <a:off x="384048" y="4542424"/>
+            <a:ext cx="1400544" cy="300000"/>
+          </a:xfrm>
+          <a:prstGeom prst="rect">
+            <a:avLst/>
+          </a:prstGeom>
+          <a:noFill/>
+        </p:spPr>
+        <p:txBody>
+          <a:bodyPr wrap="square">
+            <a:spAutoFit/>
+          </a:bodyPr>
+          <a:lstStyle/>
+          <a:p>
+            <a:pPr algn="l"/>
+            <a:r>
+              <a:rPr sz="1050" b="1" i="0">
+                <a:solidFill>
+                  <a:srgbClr val="B0C8E0"/>
+                </a:solidFill>
+              </a:rPr>
+              <a:t>Intelligence at Scale</a:t>
+            </a:r>
+          </a:p>
+        </p:txBody>
+      </p:sp>
+      <p:sp>
+        <p:nvSpPr>
+          <p:cNvPr id="32" name="TextBox 31"/>
+          <p:cNvSpPr txBox="1"/>
+          <p:nvPr/>
+        </p:nvSpPr>
+        <p:spPr>
+          <a:xfrm>
+            <a:off x="384048" y="4787424"/>
+            <a:ext cx="1400544" cy="170000"/>
+          </a:xfrm>
+          <a:prstGeom prst="rect">
+            <a:avLst/>
+          </a:prstGeom>
+          <a:noFill/>
+        </p:spPr>
+        <p:txBody>
+          <a:bodyPr wrap="square">
+            <a:spAutoFit/>
+          </a:bodyPr>
+          <a:lstStyle/>
+          <a:p>
+            <a:pPr algn="l"/>
+            <a:r>
+              <a:rPr sz="850" b="0" i="0">
+                <a:solidFill>
+                  <a:srgbClr val="006E8C"/>
+                </a:solidFill>
+              </a:rPr>
+              <a:t>Epics: E7 · E8</a:t>
+            </a:r>
+          </a:p>
+        </p:txBody>
+      </p:sp>
+      <p:sp>
+        <p:nvSpPr>
+          <p:cNvPr id="33" name="TextBox 32"/>
+          <p:cNvSpPr txBox="1"/>
+          <p:nvPr/>
+        </p:nvSpPr>
+        <p:spPr>
+          <a:xfrm>
+            <a:off x="2004048" y="4230206"/>
+            <a:ext cx="6755904" cy="664436"/>
+          </a:xfrm>
+          <a:prstGeom prst="rect">
+            <a:avLst/>
+          </a:prstGeom>
+          <a:noFill/>
+        </p:spPr>
+        <p:txBody>
+          <a:bodyPr wrap="square">
+            <a:spAutoFit/>
+          </a:bodyPr>
+          <a:lstStyle/>
+          <a:p>
+            <a:pPr algn="l"/>
+            <a:r>
+              <a:rPr sz="950" b="0" i="0">
                 <a:solidFill>
                   <a:srgbClr val="2C2C2C"/>
                 </a:solidFill>
               </a:rPr>
-              <a:t>• PRIS Act 2024 — PI masking, anonymisation at source</a:t>
-            </a:r>
-          </a:p>
-          <a:p>
-            <a:pPr>
-              <a:spcBef>
-                <a:spcPts val="200"/>
-              </a:spcBef>
-            </a:pPr>
-            <a:r>
-              <a:rPr sz="850">
+              <a:t>Enable the full ML lifecycle on EDAP — experiment, train, register, deploy, and monitor models with governance from day one. Document and prove clear migration pathways from legacy platforms (Glue, ADF, SAP DS, SageMaker) so legacy workloads have a costed, proven path forward.</a:t>
+            </a:r>
+          </a:p>
+        </p:txBody>
+      </p:sp>
+      <p:sp>
+        <p:nvSpPr>
+          <p:cNvPr id="34" name="Rectangle 33"/>
+          <p:cNvSpPr/>
+          <p:nvPr/>
+        </p:nvSpPr>
+        <p:spPr>
+          <a:xfrm>
+            <a:off x="274320" y="5034424"/>
+            <a:ext cx="8595360" cy="840000"/>
+          </a:xfrm>
+          <a:prstGeom prst="rect">
+            <a:avLst/>
+          </a:prstGeom>
+          <a:solidFill>
+            <a:srgbClr val="F2F4F7"/>
+          </a:solidFill>
+          <a:ln w="9525">
+            <a:solidFill>
+              <a:srgbClr val="006E8C"/>
+            </a:solidFill>
+          </a:ln>
+        </p:spPr>
+        <p:style>
+          <a:lnRef idx="1">
+            <a:schemeClr val="accent1"/>
+          </a:lnRef>
+          <a:fillRef idx="3">
+            <a:schemeClr val="accent1"/>
+          </a:fillRef>
+          <a:effectRef idx="2">
+            <a:schemeClr val="accent1"/>
+          </a:effectRef>
+          <a:fontRef idx="minor">
+            <a:schemeClr val="lt1"/>
+          </a:fontRef>
+        </p:style>
+        <p:txBody>
+          <a:bodyPr rtlCol="0" anchor="ctr"/>
+          <a:lstStyle/>
+          <a:p>
+            <a:pPr algn="ctr"/>
+          </a:p>
+        </p:txBody>
+      </p:sp>
+      <p:sp>
+        <p:nvSpPr>
+          <p:cNvPr id="35" name="Rectangle 34"/>
+          <p:cNvSpPr/>
+          <p:nvPr/>
+        </p:nvSpPr>
+        <p:spPr>
+          <a:xfrm>
+            <a:off x="274320" y="5034424"/>
+            <a:ext cx="1620000" cy="840000"/>
+          </a:xfrm>
+          <a:prstGeom prst="rect">
+            <a:avLst/>
+          </a:prstGeom>
+          <a:solidFill>
+            <a:srgbClr val="1B2A4A"/>
+          </a:solidFill>
+          <a:ln>
+            <a:noFill/>
+          </a:ln>
+        </p:spPr>
+        <p:style>
+          <a:lnRef idx="1">
+            <a:schemeClr val="accent1"/>
+          </a:lnRef>
+          <a:fillRef idx="3">
+            <a:schemeClr val="accent1"/>
+          </a:fillRef>
+          <a:effectRef idx="2">
+            <a:schemeClr val="accent1"/>
+          </a:effectRef>
+          <a:fontRef idx="minor">
+            <a:schemeClr val="lt1"/>
+          </a:fontRef>
+        </p:style>
+        <p:txBody>
+          <a:bodyPr rtlCol="0" anchor="ctr"/>
+          <a:lstStyle/>
+          <a:p>
+            <a:pPr algn="ctr"/>
+          </a:p>
+        </p:txBody>
+      </p:sp>
+      <p:sp>
+        <p:nvSpPr>
+          <p:cNvPr id="36" name="TextBox 35"/>
+          <p:cNvSpPr txBox="1"/>
+          <p:nvPr/>
+        </p:nvSpPr>
+        <p:spPr>
+          <a:xfrm>
+            <a:off x="384048" y="5114424"/>
+            <a:ext cx="400000" cy="310000"/>
+          </a:xfrm>
+          <a:prstGeom prst="rect">
+            <a:avLst/>
+          </a:prstGeom>
+          <a:noFill/>
+        </p:spPr>
+        <p:txBody>
+          <a:bodyPr wrap="square">
+            <a:spAutoFit/>
+          </a:bodyPr>
+          <a:lstStyle/>
+          <a:p>
+            <a:pPr algn="l"/>
+            <a:r>
+              <a:rPr sz="2200" b="1" i="0">
+                <a:solidFill>
+                  <a:srgbClr val="006E8C"/>
+                </a:solidFill>
+              </a:rPr>
+              <a:t>05</a:t>
+            </a:r>
+          </a:p>
+        </p:txBody>
+      </p:sp>
+      <p:sp>
+        <p:nvSpPr>
+          <p:cNvPr id="37" name="TextBox 36"/>
+          <p:cNvSpPr txBox="1"/>
+          <p:nvPr/>
+        </p:nvSpPr>
+        <p:spPr>
+          <a:xfrm>
+            <a:off x="384048" y="5434424"/>
+            <a:ext cx="1400544" cy="300000"/>
+          </a:xfrm>
+          <a:prstGeom prst="rect">
+            <a:avLst/>
+          </a:prstGeom>
+          <a:noFill/>
+        </p:spPr>
+        <p:txBody>
+          <a:bodyPr wrap="square">
+            <a:spAutoFit/>
+          </a:bodyPr>
+          <a:lstStyle/>
+          <a:p>
+            <a:pPr algn="l"/>
+            <a:r>
+              <a:rPr sz="1050" b="1" i="0">
+                <a:solidFill>
+                  <a:srgbClr val="B0C8E0"/>
+                </a:solidFill>
+              </a:rPr>
+              <a:t>Enduring Capability</a:t>
+            </a:r>
+          </a:p>
+        </p:txBody>
+      </p:sp>
+      <p:sp>
+        <p:nvSpPr>
+          <p:cNvPr id="38" name="TextBox 37"/>
+          <p:cNvSpPr txBox="1"/>
+          <p:nvPr/>
+        </p:nvSpPr>
+        <p:spPr>
+          <a:xfrm>
+            <a:off x="384048" y="5679424"/>
+            <a:ext cx="1400544" cy="170000"/>
+          </a:xfrm>
+          <a:prstGeom prst="rect">
+            <a:avLst/>
+          </a:prstGeom>
+          <a:noFill/>
+        </p:spPr>
+        <p:txBody>
+          <a:bodyPr wrap="square">
+            <a:spAutoFit/>
+          </a:bodyPr>
+          <a:lstStyle/>
+          <a:p>
+            <a:pPr algn="l"/>
+            <a:r>
+              <a:rPr sz="850" b="0" i="0">
+                <a:solidFill>
+                  <a:srgbClr val="006E8C"/>
+                </a:solidFill>
+              </a:rPr>
+              <a:t>Epics: E5 · E9</a:t>
+            </a:r>
+          </a:p>
+        </p:txBody>
+      </p:sp>
+      <p:sp>
+        <p:nvSpPr>
+          <p:cNvPr id="39" name="TextBox 38"/>
+          <p:cNvSpPr txBox="1"/>
+          <p:nvPr/>
+        </p:nvSpPr>
+        <p:spPr>
+          <a:xfrm>
+            <a:off x="2004048" y="5122206"/>
+            <a:ext cx="6755904" cy="664436"/>
+          </a:xfrm>
+          <a:prstGeom prst="rect">
+            <a:avLst/>
+          </a:prstGeom>
+          <a:noFill/>
+        </p:spPr>
+        <p:txBody>
+          <a:bodyPr wrap="square">
+            <a:spAutoFit/>
+          </a:bodyPr>
+          <a:lstStyle/>
+          <a:p>
+            <a:pPr algn="l"/>
+            <a:r>
+              <a:rPr sz="950" b="0" i="0">
                 <a:solidFill>
                   <a:srgbClr val="2C2C2C"/>
                 </a:solidFill>
               </a:rPr>
-              <a:t>• SOCI Act 2018 — CMK encryption, critical infra controls</a:t>
-            </a:r>
-          </a:p>
-          <a:p>
-            <a:pPr>
-              <a:spcBef>
-                <a:spcPts val="200"/>
-              </a:spcBef>
-            </a:pPr>
-            <a:r>
-              <a:rPr sz="850">
-                <a:solidFill>
-                  <a:srgbClr val="2C2C2C"/>
-                </a:solidFill>
-              </a:rPr>
-              <a:t>• State Records Act — retention &amp; disposal metadata</a:t>
+              <a:t>Deliver a self-sustaining platform and a self-sufficient WC team. DataOps excellence embeds CI/CD, automated testing, and non-prod cost guardrails into every pipeline. WC engineers are Databricks-certified, embedded hands-on through delivery, and own their domains at project close.</a:t>
             </a:r>
           </a:p>
         </p:txBody>
@@ -5915,7 +5696,6 @@
           <a:ln>
             <a:noFill/>
           </a:ln>
-          <a:effectLst/>
         </p:spPr>
         <p:style>
           <a:lnRef idx="1">
@@ -5941,75 +5721,7 @@
       </p:sp>
       <p:sp>
         <p:nvSpPr>
-          <p:cNvPr id="3" name="TextBox 2"/>
-          <p:cNvSpPr txBox="1"/>
-          <p:nvPr/>
-        </p:nvSpPr>
-        <p:spPr>
-          <a:xfrm>
-            <a:off x="274320" y="109728"/>
-            <a:ext cx="8229600" cy="502920"/>
-          </a:xfrm>
-          <a:prstGeom prst="rect">
-            <a:avLst/>
-          </a:prstGeom>
-          <a:noFill/>
-        </p:spPr>
-        <p:txBody>
-          <a:bodyPr wrap="square">
-            <a:spAutoFit/>
-          </a:bodyPr>
-          <a:lstStyle/>
-          <a:p>
-            <a:pPr algn="l"/>
-            <a:r>
-              <a:rPr sz="2200" b="1" i="0">
-                <a:solidFill>
-                  <a:srgbClr val="FFFFFF"/>
-                </a:solidFill>
-              </a:rPr>
-              <a:t>Nine Epics — Delivery Scope Mapped to the Architecture</a:t>
-            </a:r>
-          </a:p>
-        </p:txBody>
-      </p:sp>
-      <p:sp>
-        <p:nvSpPr>
-          <p:cNvPr id="4" name="TextBox 3"/>
-          <p:cNvSpPr txBox="1"/>
-          <p:nvPr/>
-        </p:nvSpPr>
-        <p:spPr>
-          <a:xfrm>
-            <a:off x="274320" y="621792"/>
-            <a:ext cx="8229600" cy="347472"/>
-          </a:xfrm>
-          <a:prstGeom prst="rect">
-            <a:avLst/>
-          </a:prstGeom>
-          <a:noFill/>
-        </p:spPr>
-        <p:txBody>
-          <a:bodyPr wrap="square">
-            <a:spAutoFit/>
-          </a:bodyPr>
-          <a:lstStyle/>
-          <a:p>
-            <a:pPr algn="l"/>
-            <a:r>
-              <a:rPr sz="1100" b="0" i="0">
-                <a:solidFill>
-                  <a:srgbClr val="B0C8E0"/>
-                </a:solidFill>
-              </a:rPr>
-              <a:t>95 features, sequenced foundation-first, each implementing a layer of the enterprise design</a:t>
-            </a:r>
-          </a:p>
-        </p:txBody>
-      </p:sp>
-      <p:sp>
-        <p:nvSpPr>
-          <p:cNvPr id="5" name="Rectangle 4"/>
+          <p:cNvPr id="3" name="Rectangle 2"/>
           <p:cNvSpPr/>
           <p:nvPr/>
         </p:nvSpPr>
@@ -6027,7 +5739,6 @@
           <a:ln>
             <a:noFill/>
           </a:ln>
-          <a:effectLst/>
         </p:spPr>
         <p:style>
           <a:lnRef idx="1">
@@ -6053,7 +5764,7 @@
       </p:sp>
       <p:sp>
         <p:nvSpPr>
-          <p:cNvPr id="6" name="Rectangle 5"/>
+          <p:cNvPr id="4" name="Rectangle 3"/>
           <p:cNvSpPr/>
           <p:nvPr/>
         </p:nvSpPr>
@@ -6071,7 +5782,6 @@
           <a:ln>
             <a:noFill/>
           </a:ln>
-          <a:effectLst/>
         </p:spPr>
         <p:style>
           <a:lnRef idx="1">
@@ -6097,14 +5807,14 @@
       </p:sp>
       <p:sp>
         <p:nvSpPr>
-          <p:cNvPr id="7" name="TextBox 6"/>
+          <p:cNvPr id="5" name="TextBox 4"/>
           <p:cNvSpPr txBox="1"/>
           <p:nvPr/>
         </p:nvSpPr>
         <p:spPr>
           <a:xfrm>
-            <a:off x="274320" y="6638544"/>
-            <a:ext cx="6400800" cy="201168"/>
+            <a:off x="274320" y="109728"/>
+            <a:ext cx="8595360" cy="503000"/>
           </a:xfrm>
           <a:prstGeom prst="rect">
             <a:avLst/>
@@ -6119,26 +5829,26 @@
           <a:p>
             <a:pPr algn="l"/>
             <a:r>
-              <a:rPr sz="800" b="0" i="0">
-                <a:solidFill>
-                  <a:srgbClr val="B0C8E0"/>
-                </a:solidFill>
-              </a:rPr>
-              <a:t>Water Corporation  |  EDAP Programme  |  March 2026</a:t>
-            </a:r>
-          </a:p>
-        </p:txBody>
-      </p:sp>
-      <p:sp>
-        <p:nvSpPr>
-          <p:cNvPr id="8" name="TextBox 7"/>
+              <a:rPr sz="2200" b="1" i="0">
+                <a:solidFill>
+                  <a:srgbClr val="FFFFFF"/>
+                </a:solidFill>
+              </a:rPr>
+              <a:t>Program Scope — Nine Epics Across the Delivery</a:t>
+            </a:r>
+          </a:p>
+        </p:txBody>
+      </p:sp>
+      <p:sp>
+        <p:nvSpPr>
+          <p:cNvPr id="6" name="TextBox 5"/>
           <p:cNvSpPr txBox="1"/>
           <p:nvPr/>
         </p:nvSpPr>
         <p:spPr>
           <a:xfrm>
-            <a:off x="8503920" y="6638544"/>
-            <a:ext cx="548640" cy="201168"/>
+            <a:off x="274320" y="619000"/>
+            <a:ext cx="8595360" cy="380000"/>
           </a:xfrm>
           <a:prstGeom prst="rect">
             <a:avLst/>
@@ -6151,28 +5861,28 @@
           </a:bodyPr>
           <a:lstStyle/>
           <a:p>
-            <a:pPr algn="r"/>
-            <a:r>
-              <a:rPr sz="800" b="0" i="0">
+            <a:pPr algn="l"/>
+            <a:r>
+              <a:rPr sz="1100" b="0" i="0">
                 <a:solidFill>
                   <a:srgbClr val="B0C8E0"/>
                 </a:solidFill>
               </a:rPr>
-              <a:t>3 / 4</a:t>
-            </a:r>
-          </a:p>
-        </p:txBody>
-      </p:sp>
-      <p:sp>
-        <p:nvSpPr>
-          <p:cNvPr id="9" name="TextBox 8"/>
+              <a:t>95 features, sequenced foundation-first, spanning platform, governance, intelligence, and capability</a:t>
+            </a:r>
+          </a:p>
+        </p:txBody>
+      </p:sp>
+      <p:sp>
+        <p:nvSpPr>
+          <p:cNvPr id="7" name="TextBox 6"/>
           <p:cNvSpPr txBox="1"/>
           <p:nvPr/>
         </p:nvSpPr>
         <p:spPr>
           <a:xfrm>
-            <a:off x="274320" y="1207008"/>
-            <a:ext cx="8595360" cy="347472"/>
+            <a:off x="274320" y="6674400"/>
+            <a:ext cx="6858000" cy="180000"/>
           </a:xfrm>
           <a:prstGeom prst="rect">
             <a:avLst/>
@@ -6187,12 +5897,80 @@
           <a:p>
             <a:pPr algn="l"/>
             <a:r>
-              <a:rPr sz="1050" b="0" i="0">
+              <a:rPr sz="800" b="0" i="0">
+                <a:solidFill>
+                  <a:srgbClr val="B0C8E0"/>
+                </a:solidFill>
+              </a:rPr>
+              <a:t>Water Corporation  |  EDAP Programme  |  March 2026</a:t>
+            </a:r>
+          </a:p>
+        </p:txBody>
+      </p:sp>
+      <p:sp>
+        <p:nvSpPr>
+          <p:cNvPr id="8" name="TextBox 7"/>
+          <p:cNvSpPr txBox="1"/>
+          <p:nvPr/>
+        </p:nvSpPr>
+        <p:spPr>
+          <a:xfrm>
+            <a:off x="8319680" y="6674400"/>
+            <a:ext cx="550000" cy="180000"/>
+          </a:xfrm>
+          <a:prstGeom prst="rect">
+            <a:avLst/>
+          </a:prstGeom>
+          <a:noFill/>
+        </p:spPr>
+        <p:txBody>
+          <a:bodyPr wrap="square">
+            <a:spAutoFit/>
+          </a:bodyPr>
+          <a:lstStyle/>
+          <a:p>
+            <a:pPr algn="r"/>
+            <a:r>
+              <a:rPr sz="800" b="0" i="0">
+                <a:solidFill>
+                  <a:srgbClr val="B0C8E0"/>
+                </a:solidFill>
+              </a:rPr>
+              <a:t>3 / 4</a:t>
+            </a:r>
+          </a:p>
+        </p:txBody>
+      </p:sp>
+      <p:sp>
+        <p:nvSpPr>
+          <p:cNvPr id="9" name="TextBox 8"/>
+          <p:cNvSpPr txBox="1"/>
+          <p:nvPr/>
+        </p:nvSpPr>
+        <p:spPr>
+          <a:xfrm>
+            <a:off x="274320" y="1196424"/>
+            <a:ext cx="8595360" cy="260000"/>
+          </a:xfrm>
+          <a:prstGeom prst="rect">
+            <a:avLst/>
+          </a:prstGeom>
+          <a:noFill/>
+        </p:spPr>
+        <p:txBody>
+          <a:bodyPr wrap="square">
+            <a:spAutoFit/>
+          </a:bodyPr>
+          <a:lstStyle/>
+          <a:p>
+            <a:pPr algn="l"/>
+            <a:r>
+              <a:rPr sz="1050" b="0" i="1">
                 <a:solidFill>
                   <a:srgbClr val="2C2C2C"/>
                 </a:solidFill>
               </a:rPr>
-              <a:t>The nine epics are not independent workstreams — they are ordered architectural layers. This PI establishes the foundation that all subsequent capability depends on.</a:t>
+              <a:t>The nine epics are ordered architectural layers, not independent workstreams. E1 is the foundation for all that follows. E9 runs in parallel throughout delivery.</a:t>
             </a:r>
           </a:p>
         </p:txBody>
@@ -6205,8 +5983,53 @@
         </p:nvSpPr>
         <p:spPr>
           <a:xfrm>
-            <a:off x="274320" y="1664208"/>
-            <a:ext cx="2514600" cy="292608"/>
+            <a:off x="274320" y="1476424"/>
+            <a:ext cx="2828453" cy="1660992"/>
+          </a:xfrm>
+          <a:prstGeom prst="rect">
+            <a:avLst/>
+          </a:prstGeom>
+          <a:solidFill>
+            <a:srgbClr val="F2F4F7"/>
+          </a:solidFill>
+          <a:ln w="9525">
+            <a:solidFill>
+              <a:srgbClr val="006E8C"/>
+            </a:solidFill>
+          </a:ln>
+        </p:spPr>
+        <p:style>
+          <a:lnRef idx="1">
+            <a:schemeClr val="accent1"/>
+          </a:lnRef>
+          <a:fillRef idx="3">
+            <a:schemeClr val="accent1"/>
+          </a:fillRef>
+          <a:effectRef idx="2">
+            <a:schemeClr val="accent1"/>
+          </a:effectRef>
+          <a:fontRef idx="minor">
+            <a:schemeClr val="lt1"/>
+          </a:fontRef>
+        </p:style>
+        <p:txBody>
+          <a:bodyPr rtlCol="0" anchor="ctr"/>
+          <a:lstStyle/>
+          <a:p>
+            <a:pPr algn="ctr"/>
+          </a:p>
+        </p:txBody>
+      </p:sp>
+      <p:sp>
+        <p:nvSpPr>
+          <p:cNvPr id="11" name="Rectangle 10"/>
+          <p:cNvSpPr/>
+          <p:nvPr/>
+        </p:nvSpPr>
+        <p:spPr>
+          <a:xfrm>
+            <a:off x="274320" y="1476424"/>
+            <a:ext cx="2828453" cy="265000"/>
           </a:xfrm>
           <a:prstGeom prst="rect">
             <a:avLst/>
@@ -6217,7 +6040,6 @@
           <a:ln>
             <a:noFill/>
           </a:ln>
-          <a:effectLst/>
         </p:spPr>
         <p:style>
           <a:lnRef idx="1">
@@ -6243,14 +6065,14 @@
       </p:sp>
       <p:sp>
         <p:nvSpPr>
-          <p:cNvPr id="11" name="TextBox 10"/>
+          <p:cNvPr id="12" name="TextBox 11"/>
           <p:cNvSpPr txBox="1"/>
           <p:nvPr/>
         </p:nvSpPr>
         <p:spPr>
           <a:xfrm>
-            <a:off x="347472" y="1700784"/>
-            <a:ext cx="2395727" cy="219456"/>
+            <a:off x="384048" y="1524424"/>
+            <a:ext cx="2308997" cy="200000"/>
           </a:xfrm>
           <a:prstGeom prst="rect">
             <a:avLst/>
@@ -6265,26 +6087,1089 @@
           <a:p>
             <a:pPr algn="l"/>
             <a:r>
-              <a:rPr sz="900" b="1" i="0">
+              <a:rPr sz="1050" b="1" i="0">
                 <a:solidFill>
                   <a:srgbClr val="FFFFFF"/>
                 </a:solidFill>
               </a:rPr>
-              <a:t>Epic</a:t>
-            </a:r>
-          </a:p>
-        </p:txBody>
-      </p:sp>
-      <p:sp>
-        <p:nvSpPr>
-          <p:cNvPr id="12" name="Rectangle 11"/>
+              <a:t>E1  Platform Foundation</a:t>
+            </a:r>
+          </a:p>
+        </p:txBody>
+      </p:sp>
+      <p:sp>
+        <p:nvSpPr>
+          <p:cNvPr id="13" name="TextBox 12"/>
+          <p:cNvSpPr txBox="1"/>
+          <p:nvPr/>
+        </p:nvSpPr>
+        <p:spPr>
+          <a:xfrm>
+            <a:off x="2613045" y="1546424"/>
+            <a:ext cx="380000" cy="160000"/>
+          </a:xfrm>
+          <a:prstGeom prst="rect">
+            <a:avLst/>
+          </a:prstGeom>
+          <a:noFill/>
+        </p:spPr>
+        <p:txBody>
+          <a:bodyPr wrap="square">
+            <a:spAutoFit/>
+          </a:bodyPr>
+          <a:lstStyle/>
+          <a:p>
+            <a:pPr algn="r"/>
+            <a:r>
+              <a:rPr sz="850" b="0" i="0">
+                <a:solidFill>
+                  <a:srgbClr val="B0C8E0"/>
+                </a:solidFill>
+              </a:rPr>
+              <a:t>19 features</a:t>
+            </a:r>
+          </a:p>
+        </p:txBody>
+      </p:sp>
+      <p:sp>
+        <p:nvSpPr>
+          <p:cNvPr id="14" name="TextBox 13"/>
+          <p:cNvSpPr txBox="1"/>
+          <p:nvPr/>
+        </p:nvSpPr>
+        <p:spPr>
+          <a:xfrm>
+            <a:off x="384048" y="1801424"/>
+            <a:ext cx="2608997" cy="1295992"/>
+          </a:xfrm>
+          <a:prstGeom prst="rect">
+            <a:avLst/>
+          </a:prstGeom>
+          <a:noFill/>
+        </p:spPr>
+        <p:txBody>
+          <a:bodyPr wrap="square">
+            <a:spAutoFit/>
+          </a:bodyPr>
+          <a:lstStyle/>
+          <a:p>
+            <a:pPr algn="l"/>
+            <a:r>
+              <a:rPr sz="950" b="0" i="0">
+                <a:solidFill>
+                  <a:srgbClr val="2C2C2C"/>
+                </a:solidFill>
+              </a:rPr>
+              <a:t>EDAP environments operational, governed, and ready for development — the foundation everything else depends on</a:t>
+            </a:r>
+          </a:p>
+        </p:txBody>
+      </p:sp>
+      <p:sp>
+        <p:nvSpPr>
+          <p:cNvPr id="15" name="Rectangle 14"/>
           <p:cNvSpPr/>
           <p:nvPr/>
         </p:nvSpPr>
         <p:spPr>
           <a:xfrm>
-            <a:off x="2926080" y="1664208"/>
-            <a:ext cx="3154680" cy="292608"/>
+            <a:off x="3157773" y="1476424"/>
+            <a:ext cx="2828453" cy="1660992"/>
+          </a:xfrm>
+          <a:prstGeom prst="rect">
+            <a:avLst/>
+          </a:prstGeom>
+          <a:solidFill>
+            <a:srgbClr val="F2F4F7"/>
+          </a:solidFill>
+          <a:ln w="9525">
+            <a:solidFill>
+              <a:srgbClr val="006E8C"/>
+            </a:solidFill>
+          </a:ln>
+        </p:spPr>
+        <p:style>
+          <a:lnRef idx="1">
+            <a:schemeClr val="accent1"/>
+          </a:lnRef>
+          <a:fillRef idx="3">
+            <a:schemeClr val="accent1"/>
+          </a:fillRef>
+          <a:effectRef idx="2">
+            <a:schemeClr val="accent1"/>
+          </a:effectRef>
+          <a:fontRef idx="minor">
+            <a:schemeClr val="lt1"/>
+          </a:fontRef>
+        </p:style>
+        <p:txBody>
+          <a:bodyPr rtlCol="0" anchor="ctr"/>
+          <a:lstStyle/>
+          <a:p>
+            <a:pPr algn="ctr"/>
+          </a:p>
+        </p:txBody>
+      </p:sp>
+      <p:sp>
+        <p:nvSpPr>
+          <p:cNvPr id="16" name="Rectangle 15"/>
+          <p:cNvSpPr/>
+          <p:nvPr/>
+        </p:nvSpPr>
+        <p:spPr>
+          <a:xfrm>
+            <a:off x="3157773" y="1476424"/>
+            <a:ext cx="2828453" cy="265000"/>
+          </a:xfrm>
+          <a:prstGeom prst="rect">
+            <a:avLst/>
+          </a:prstGeom>
+          <a:solidFill>
+            <a:srgbClr val="006E8C"/>
+          </a:solidFill>
+          <a:ln>
+            <a:noFill/>
+          </a:ln>
+        </p:spPr>
+        <p:style>
+          <a:lnRef idx="1">
+            <a:schemeClr val="accent1"/>
+          </a:lnRef>
+          <a:fillRef idx="3">
+            <a:schemeClr val="accent1"/>
+          </a:fillRef>
+          <a:effectRef idx="2">
+            <a:schemeClr val="accent1"/>
+          </a:effectRef>
+          <a:fontRef idx="minor">
+            <a:schemeClr val="lt1"/>
+          </a:fontRef>
+        </p:style>
+        <p:txBody>
+          <a:bodyPr rtlCol="0" anchor="ctr"/>
+          <a:lstStyle/>
+          <a:p>
+            <a:pPr algn="ctr"/>
+          </a:p>
+        </p:txBody>
+      </p:sp>
+      <p:sp>
+        <p:nvSpPr>
+          <p:cNvPr id="17" name="TextBox 16"/>
+          <p:cNvSpPr txBox="1"/>
+          <p:nvPr/>
+        </p:nvSpPr>
+        <p:spPr>
+          <a:xfrm>
+            <a:off x="3267501" y="1524424"/>
+            <a:ext cx="2308997" cy="200000"/>
+          </a:xfrm>
+          <a:prstGeom prst="rect">
+            <a:avLst/>
+          </a:prstGeom>
+          <a:noFill/>
+        </p:spPr>
+        <p:txBody>
+          <a:bodyPr wrap="square">
+            <a:spAutoFit/>
+          </a:bodyPr>
+          <a:lstStyle/>
+          <a:p>
+            <a:pPr algn="l"/>
+            <a:r>
+              <a:rPr sz="1050" b="1" i="0">
+                <a:solidFill>
+                  <a:srgbClr val="FFFFFF"/>
+                </a:solidFill>
+              </a:rPr>
+              <a:t>E2  Data Ingestion &amp; Integration</a:t>
+            </a:r>
+          </a:p>
+        </p:txBody>
+      </p:sp>
+      <p:sp>
+        <p:nvSpPr>
+          <p:cNvPr id="18" name="TextBox 17"/>
+          <p:cNvSpPr txBox="1"/>
+          <p:nvPr/>
+        </p:nvSpPr>
+        <p:spPr>
+          <a:xfrm>
+            <a:off x="5496498" y="1546424"/>
+            <a:ext cx="380000" cy="160000"/>
+          </a:xfrm>
+          <a:prstGeom prst="rect">
+            <a:avLst/>
+          </a:prstGeom>
+          <a:noFill/>
+        </p:spPr>
+        <p:txBody>
+          <a:bodyPr wrap="square">
+            <a:spAutoFit/>
+          </a:bodyPr>
+          <a:lstStyle/>
+          <a:p>
+            <a:pPr algn="r"/>
+            <a:r>
+              <a:rPr sz="850" b="0" i="0">
+                <a:solidFill>
+                  <a:srgbClr val="B0C8E0"/>
+                </a:solidFill>
+              </a:rPr>
+              <a:t>14 features</a:t>
+            </a:r>
+          </a:p>
+        </p:txBody>
+      </p:sp>
+      <p:sp>
+        <p:nvSpPr>
+          <p:cNvPr id="19" name="TextBox 18"/>
+          <p:cNvSpPr txBox="1"/>
+          <p:nvPr/>
+        </p:nvSpPr>
+        <p:spPr>
+          <a:xfrm>
+            <a:off x="3267501" y="1801424"/>
+            <a:ext cx="2608997" cy="1295992"/>
+          </a:xfrm>
+          <a:prstGeom prst="rect">
+            <a:avLst/>
+          </a:prstGeom>
+          <a:noFill/>
+        </p:spPr>
+        <p:txBody>
+          <a:bodyPr wrap="square">
+            <a:spAutoFit/>
+          </a:bodyPr>
+          <a:lstStyle/>
+          <a:p>
+            <a:pPr algn="l"/>
+            <a:r>
+              <a:rPr sz="950" b="0" i="0">
+                <a:solidFill>
+                  <a:srgbClr val="2C2C2C"/>
+                </a:solidFill>
+              </a:rPr>
+              <a:t>Data flowing reliably from source systems into EDAP Bronze layer via batch, CDC, streaming, and file-based patterns</a:t>
+            </a:r>
+          </a:p>
+        </p:txBody>
+      </p:sp>
+      <p:sp>
+        <p:nvSpPr>
+          <p:cNvPr id="20" name="Rectangle 19"/>
+          <p:cNvSpPr/>
+          <p:nvPr/>
+        </p:nvSpPr>
+        <p:spPr>
+          <a:xfrm>
+            <a:off x="6041226" y="1476424"/>
+            <a:ext cx="2828453" cy="1660992"/>
+          </a:xfrm>
+          <a:prstGeom prst="rect">
+            <a:avLst/>
+          </a:prstGeom>
+          <a:solidFill>
+            <a:srgbClr val="F2F4F7"/>
+          </a:solidFill>
+          <a:ln w="9525">
+            <a:solidFill>
+              <a:srgbClr val="006E8C"/>
+            </a:solidFill>
+          </a:ln>
+        </p:spPr>
+        <p:style>
+          <a:lnRef idx="1">
+            <a:schemeClr val="accent1"/>
+          </a:lnRef>
+          <a:fillRef idx="3">
+            <a:schemeClr val="accent1"/>
+          </a:fillRef>
+          <a:effectRef idx="2">
+            <a:schemeClr val="accent1"/>
+          </a:effectRef>
+          <a:fontRef idx="minor">
+            <a:schemeClr val="lt1"/>
+          </a:fontRef>
+        </p:style>
+        <p:txBody>
+          <a:bodyPr rtlCol="0" anchor="ctr"/>
+          <a:lstStyle/>
+          <a:p>
+            <a:pPr algn="ctr"/>
+          </a:p>
+        </p:txBody>
+      </p:sp>
+      <p:sp>
+        <p:nvSpPr>
+          <p:cNvPr id="21" name="Rectangle 20"/>
+          <p:cNvSpPr/>
+          <p:nvPr/>
+        </p:nvSpPr>
+        <p:spPr>
+          <a:xfrm>
+            <a:off x="6041226" y="1476424"/>
+            <a:ext cx="2828453" cy="265000"/>
+          </a:xfrm>
+          <a:prstGeom prst="rect">
+            <a:avLst/>
+          </a:prstGeom>
+          <a:solidFill>
+            <a:srgbClr val="006E8C"/>
+          </a:solidFill>
+          <a:ln>
+            <a:noFill/>
+          </a:ln>
+        </p:spPr>
+        <p:style>
+          <a:lnRef idx="1">
+            <a:schemeClr val="accent1"/>
+          </a:lnRef>
+          <a:fillRef idx="3">
+            <a:schemeClr val="accent1"/>
+          </a:fillRef>
+          <a:effectRef idx="2">
+            <a:schemeClr val="accent1"/>
+          </a:effectRef>
+          <a:fontRef idx="minor">
+            <a:schemeClr val="lt1"/>
+          </a:fontRef>
+        </p:style>
+        <p:txBody>
+          <a:bodyPr rtlCol="0" anchor="ctr"/>
+          <a:lstStyle/>
+          <a:p>
+            <a:pPr algn="ctr"/>
+          </a:p>
+        </p:txBody>
+      </p:sp>
+      <p:sp>
+        <p:nvSpPr>
+          <p:cNvPr id="22" name="TextBox 21"/>
+          <p:cNvSpPr txBox="1"/>
+          <p:nvPr/>
+        </p:nvSpPr>
+        <p:spPr>
+          <a:xfrm>
+            <a:off x="6150954" y="1524424"/>
+            <a:ext cx="2308997" cy="200000"/>
+          </a:xfrm>
+          <a:prstGeom prst="rect">
+            <a:avLst/>
+          </a:prstGeom>
+          <a:noFill/>
+        </p:spPr>
+        <p:txBody>
+          <a:bodyPr wrap="square">
+            <a:spAutoFit/>
+          </a:bodyPr>
+          <a:lstStyle/>
+          <a:p>
+            <a:pPr algn="l"/>
+            <a:r>
+              <a:rPr sz="1050" b="1" i="0">
+                <a:solidFill>
+                  <a:srgbClr val="FFFFFF"/>
+                </a:solidFill>
+              </a:rPr>
+              <a:t>E3  Transformation &amp; Data Products</a:t>
+            </a:r>
+          </a:p>
+        </p:txBody>
+      </p:sp>
+      <p:sp>
+        <p:nvSpPr>
+          <p:cNvPr id="23" name="TextBox 22"/>
+          <p:cNvSpPr txBox="1"/>
+          <p:nvPr/>
+        </p:nvSpPr>
+        <p:spPr>
+          <a:xfrm>
+            <a:off x="8379951" y="1546424"/>
+            <a:ext cx="380000" cy="160000"/>
+          </a:xfrm>
+          <a:prstGeom prst="rect">
+            <a:avLst/>
+          </a:prstGeom>
+          <a:noFill/>
+        </p:spPr>
+        <p:txBody>
+          <a:bodyPr wrap="square">
+            <a:spAutoFit/>
+          </a:bodyPr>
+          <a:lstStyle/>
+          <a:p>
+            <a:pPr algn="r"/>
+            <a:r>
+              <a:rPr sz="850" b="0" i="0">
+                <a:solidFill>
+                  <a:srgbClr val="B0C8E0"/>
+                </a:solidFill>
+              </a:rPr>
+              <a:t>13 features</a:t>
+            </a:r>
+          </a:p>
+        </p:txBody>
+      </p:sp>
+      <p:sp>
+        <p:nvSpPr>
+          <p:cNvPr id="24" name="TextBox 23"/>
+          <p:cNvSpPr txBox="1"/>
+          <p:nvPr/>
+        </p:nvSpPr>
+        <p:spPr>
+          <a:xfrm>
+            <a:off x="6150954" y="1801424"/>
+            <a:ext cx="2608997" cy="1295992"/>
+          </a:xfrm>
+          <a:prstGeom prst="rect">
+            <a:avLst/>
+          </a:prstGeom>
+          <a:noFill/>
+        </p:spPr>
+        <p:txBody>
+          <a:bodyPr wrap="square">
+            <a:spAutoFit/>
+          </a:bodyPr>
+          <a:lstStyle/>
+          <a:p>
+            <a:pPr algn="l"/>
+            <a:r>
+              <a:rPr sz="950" b="0" i="0">
+                <a:solidFill>
+                  <a:srgbClr val="2C2C2C"/>
+                </a:solidFill>
+              </a:rPr>
+              <a:t>Clean, conformed, business-ready data products in the Gold layer with dimensional models, semantic metrics, and quality contracts</a:t>
+            </a:r>
+          </a:p>
+        </p:txBody>
+      </p:sp>
+      <p:sp>
+        <p:nvSpPr>
+          <p:cNvPr id="25" name="Rectangle 24"/>
+          <p:cNvSpPr/>
+          <p:nvPr/>
+        </p:nvSpPr>
+        <p:spPr>
+          <a:xfrm>
+            <a:off x="274320" y="3192416"/>
+            <a:ext cx="2828453" cy="1660992"/>
+          </a:xfrm>
+          <a:prstGeom prst="rect">
+            <a:avLst/>
+          </a:prstGeom>
+          <a:solidFill>
+            <a:srgbClr val="F2F4F7"/>
+          </a:solidFill>
+          <a:ln w="9525">
+            <a:solidFill>
+              <a:srgbClr val="006E8C"/>
+            </a:solidFill>
+          </a:ln>
+        </p:spPr>
+        <p:style>
+          <a:lnRef idx="1">
+            <a:schemeClr val="accent1"/>
+          </a:lnRef>
+          <a:fillRef idx="3">
+            <a:schemeClr val="accent1"/>
+          </a:fillRef>
+          <a:effectRef idx="2">
+            <a:schemeClr val="accent1"/>
+          </a:effectRef>
+          <a:fontRef idx="minor">
+            <a:schemeClr val="lt1"/>
+          </a:fontRef>
+        </p:style>
+        <p:txBody>
+          <a:bodyPr rtlCol="0" anchor="ctr"/>
+          <a:lstStyle/>
+          <a:p>
+            <a:pPr algn="ctr"/>
+          </a:p>
+        </p:txBody>
+      </p:sp>
+      <p:sp>
+        <p:nvSpPr>
+          <p:cNvPr id="26" name="Rectangle 25"/>
+          <p:cNvSpPr/>
+          <p:nvPr/>
+        </p:nvSpPr>
+        <p:spPr>
+          <a:xfrm>
+            <a:off x="274320" y="3192416"/>
+            <a:ext cx="2828453" cy="265000"/>
+          </a:xfrm>
+          <a:prstGeom prst="rect">
+            <a:avLst/>
+          </a:prstGeom>
+          <a:solidFill>
+            <a:srgbClr val="004E6A"/>
+          </a:solidFill>
+          <a:ln>
+            <a:noFill/>
+          </a:ln>
+        </p:spPr>
+        <p:style>
+          <a:lnRef idx="1">
+            <a:schemeClr val="accent1"/>
+          </a:lnRef>
+          <a:fillRef idx="3">
+            <a:schemeClr val="accent1"/>
+          </a:fillRef>
+          <a:effectRef idx="2">
+            <a:schemeClr val="accent1"/>
+          </a:effectRef>
+          <a:fontRef idx="minor">
+            <a:schemeClr val="lt1"/>
+          </a:fontRef>
+        </p:style>
+        <p:txBody>
+          <a:bodyPr rtlCol="0" anchor="ctr"/>
+          <a:lstStyle/>
+          <a:p>
+            <a:pPr algn="ctr"/>
+          </a:p>
+        </p:txBody>
+      </p:sp>
+      <p:sp>
+        <p:nvSpPr>
+          <p:cNvPr id="27" name="TextBox 26"/>
+          <p:cNvSpPr txBox="1"/>
+          <p:nvPr/>
+        </p:nvSpPr>
+        <p:spPr>
+          <a:xfrm>
+            <a:off x="384048" y="3240416"/>
+            <a:ext cx="2308997" cy="200000"/>
+          </a:xfrm>
+          <a:prstGeom prst="rect">
+            <a:avLst/>
+          </a:prstGeom>
+          <a:noFill/>
+        </p:spPr>
+        <p:txBody>
+          <a:bodyPr wrap="square">
+            <a:spAutoFit/>
+          </a:bodyPr>
+          <a:lstStyle/>
+          <a:p>
+            <a:pPr algn="l"/>
+            <a:r>
+              <a:rPr sz="1050" b="1" i="0">
+                <a:solidFill>
+                  <a:srgbClr val="FFFFFF"/>
+                </a:solidFill>
+              </a:rPr>
+              <a:t>E4  Security, Governance &amp; Compliance</a:t>
+            </a:r>
+          </a:p>
+        </p:txBody>
+      </p:sp>
+      <p:sp>
+        <p:nvSpPr>
+          <p:cNvPr id="28" name="TextBox 27"/>
+          <p:cNvSpPr txBox="1"/>
+          <p:nvPr/>
+        </p:nvSpPr>
+        <p:spPr>
+          <a:xfrm>
+            <a:off x="2613045" y="3262416"/>
+            <a:ext cx="380000" cy="160000"/>
+          </a:xfrm>
+          <a:prstGeom prst="rect">
+            <a:avLst/>
+          </a:prstGeom>
+          <a:noFill/>
+        </p:spPr>
+        <p:txBody>
+          <a:bodyPr wrap="square">
+            <a:spAutoFit/>
+          </a:bodyPr>
+          <a:lstStyle/>
+          <a:p>
+            <a:pPr algn="r"/>
+            <a:r>
+              <a:rPr sz="850" b="0" i="0">
+                <a:solidFill>
+                  <a:srgbClr val="B0C8E0"/>
+                </a:solidFill>
+              </a:rPr>
+              <a:t>16 features</a:t>
+            </a:r>
+          </a:p>
+        </p:txBody>
+      </p:sp>
+      <p:sp>
+        <p:nvSpPr>
+          <p:cNvPr id="29" name="TextBox 28"/>
+          <p:cNvSpPr txBox="1"/>
+          <p:nvPr/>
+        </p:nvSpPr>
+        <p:spPr>
+          <a:xfrm>
+            <a:off x="384048" y="3517416"/>
+            <a:ext cx="2608997" cy="1295992"/>
+          </a:xfrm>
+          <a:prstGeom prst="rect">
+            <a:avLst/>
+          </a:prstGeom>
+          <a:noFill/>
+        </p:spPr>
+        <p:txBody>
+          <a:bodyPr wrap="square">
+            <a:spAutoFit/>
+          </a:bodyPr>
+          <a:lstStyle/>
+          <a:p>
+            <a:pPr algn="l"/>
+            <a:r>
+              <a:rPr sz="950" b="0" i="0">
+                <a:solidFill>
+                  <a:srgbClr val="2C2C2C"/>
+                </a:solidFill>
+              </a:rPr>
+              <a:t>Data classified, protected, and compliant automatically — tag-driven ABAC, audit trails, and regulatory posture demonstrable on demand</a:t>
+            </a:r>
+          </a:p>
+        </p:txBody>
+      </p:sp>
+      <p:sp>
+        <p:nvSpPr>
+          <p:cNvPr id="30" name="Rectangle 29"/>
+          <p:cNvSpPr/>
+          <p:nvPr/>
+        </p:nvSpPr>
+        <p:spPr>
+          <a:xfrm>
+            <a:off x="3157773" y="3192416"/>
+            <a:ext cx="2828453" cy="1660992"/>
+          </a:xfrm>
+          <a:prstGeom prst="rect">
+            <a:avLst/>
+          </a:prstGeom>
+          <a:solidFill>
+            <a:srgbClr val="F2F4F7"/>
+          </a:solidFill>
+          <a:ln w="9525">
+            <a:solidFill>
+              <a:srgbClr val="006E8C"/>
+            </a:solidFill>
+          </a:ln>
+        </p:spPr>
+        <p:style>
+          <a:lnRef idx="1">
+            <a:schemeClr val="accent1"/>
+          </a:lnRef>
+          <a:fillRef idx="3">
+            <a:schemeClr val="accent1"/>
+          </a:fillRef>
+          <a:effectRef idx="2">
+            <a:schemeClr val="accent1"/>
+          </a:effectRef>
+          <a:fontRef idx="minor">
+            <a:schemeClr val="lt1"/>
+          </a:fontRef>
+        </p:style>
+        <p:txBody>
+          <a:bodyPr rtlCol="0" anchor="ctr"/>
+          <a:lstStyle/>
+          <a:p>
+            <a:pPr algn="ctr"/>
+          </a:p>
+        </p:txBody>
+      </p:sp>
+      <p:sp>
+        <p:nvSpPr>
+          <p:cNvPr id="31" name="Rectangle 30"/>
+          <p:cNvSpPr/>
+          <p:nvPr/>
+        </p:nvSpPr>
+        <p:spPr>
+          <a:xfrm>
+            <a:off x="3157773" y="3192416"/>
+            <a:ext cx="2828453" cy="265000"/>
+          </a:xfrm>
+          <a:prstGeom prst="rect">
+            <a:avLst/>
+          </a:prstGeom>
+          <a:solidFill>
+            <a:srgbClr val="004E6A"/>
+          </a:solidFill>
+          <a:ln>
+            <a:noFill/>
+          </a:ln>
+        </p:spPr>
+        <p:style>
+          <a:lnRef idx="1">
+            <a:schemeClr val="accent1"/>
+          </a:lnRef>
+          <a:fillRef idx="3">
+            <a:schemeClr val="accent1"/>
+          </a:fillRef>
+          <a:effectRef idx="2">
+            <a:schemeClr val="accent1"/>
+          </a:effectRef>
+          <a:fontRef idx="minor">
+            <a:schemeClr val="lt1"/>
+          </a:fontRef>
+        </p:style>
+        <p:txBody>
+          <a:bodyPr rtlCol="0" anchor="ctr"/>
+          <a:lstStyle/>
+          <a:p>
+            <a:pPr algn="ctr"/>
+          </a:p>
+        </p:txBody>
+      </p:sp>
+      <p:sp>
+        <p:nvSpPr>
+          <p:cNvPr id="32" name="TextBox 31"/>
+          <p:cNvSpPr txBox="1"/>
+          <p:nvPr/>
+        </p:nvSpPr>
+        <p:spPr>
+          <a:xfrm>
+            <a:off x="3267501" y="3240416"/>
+            <a:ext cx="2308997" cy="200000"/>
+          </a:xfrm>
+          <a:prstGeom prst="rect">
+            <a:avLst/>
+          </a:prstGeom>
+          <a:noFill/>
+        </p:spPr>
+        <p:txBody>
+          <a:bodyPr wrap="square">
+            <a:spAutoFit/>
+          </a:bodyPr>
+          <a:lstStyle/>
+          <a:p>
+            <a:pPr algn="l"/>
+            <a:r>
+              <a:rPr sz="1050" b="1" i="0">
+                <a:solidFill>
+                  <a:srgbClr val="FFFFFF"/>
+                </a:solidFill>
+              </a:rPr>
+              <a:t>E5  DataOps &amp; Engineering Excellence</a:t>
+            </a:r>
+          </a:p>
+        </p:txBody>
+      </p:sp>
+      <p:sp>
+        <p:nvSpPr>
+          <p:cNvPr id="33" name="TextBox 32"/>
+          <p:cNvSpPr txBox="1"/>
+          <p:nvPr/>
+        </p:nvSpPr>
+        <p:spPr>
+          <a:xfrm>
+            <a:off x="5496498" y="3262416"/>
+            <a:ext cx="380000" cy="160000"/>
+          </a:xfrm>
+          <a:prstGeom prst="rect">
+            <a:avLst/>
+          </a:prstGeom>
+          <a:noFill/>
+        </p:spPr>
+        <p:txBody>
+          <a:bodyPr wrap="square">
+            <a:spAutoFit/>
+          </a:bodyPr>
+          <a:lstStyle/>
+          <a:p>
+            <a:pPr algn="r"/>
+            <a:r>
+              <a:rPr sz="850" b="0" i="0">
+                <a:solidFill>
+                  <a:srgbClr val="B0C8E0"/>
+                </a:solidFill>
+              </a:rPr>
+              <a:t>12 features</a:t>
+            </a:r>
+          </a:p>
+        </p:txBody>
+      </p:sp>
+      <p:sp>
+        <p:nvSpPr>
+          <p:cNvPr id="34" name="TextBox 33"/>
+          <p:cNvSpPr txBox="1"/>
+          <p:nvPr/>
+        </p:nvSpPr>
+        <p:spPr>
+          <a:xfrm>
+            <a:off x="3267501" y="3517416"/>
+            <a:ext cx="2608997" cy="1295992"/>
+          </a:xfrm>
+          <a:prstGeom prst="rect">
+            <a:avLst/>
+          </a:prstGeom>
+          <a:noFill/>
+        </p:spPr>
+        <p:txBody>
+          <a:bodyPr wrap="square">
+            <a:spAutoFit/>
+          </a:bodyPr>
+          <a:lstStyle/>
+          <a:p>
+            <a:pPr algn="l"/>
+            <a:r>
+              <a:rPr sz="950" b="0" i="0">
+                <a:solidFill>
+                  <a:srgbClr val="2C2C2C"/>
+                </a:solidFill>
+              </a:rPr>
+              <a:t>Automated delivery pipeline — code promotes safely, tests run automatically, non-prod costs stay at ≤10% of production</a:t>
+            </a:r>
+          </a:p>
+        </p:txBody>
+      </p:sp>
+      <p:sp>
+        <p:nvSpPr>
+          <p:cNvPr id="35" name="Rectangle 34"/>
+          <p:cNvSpPr/>
+          <p:nvPr/>
+        </p:nvSpPr>
+        <p:spPr>
+          <a:xfrm>
+            <a:off x="6041226" y="3192416"/>
+            <a:ext cx="2828453" cy="1660992"/>
+          </a:xfrm>
+          <a:prstGeom prst="rect">
+            <a:avLst/>
+          </a:prstGeom>
+          <a:solidFill>
+            <a:srgbClr val="F2F4F7"/>
+          </a:solidFill>
+          <a:ln w="9525">
+            <a:solidFill>
+              <a:srgbClr val="006E8C"/>
+            </a:solidFill>
+          </a:ln>
+        </p:spPr>
+        <p:style>
+          <a:lnRef idx="1">
+            <a:schemeClr val="accent1"/>
+          </a:lnRef>
+          <a:fillRef idx="3">
+            <a:schemeClr val="accent1"/>
+          </a:fillRef>
+          <a:effectRef idx="2">
+            <a:schemeClr val="accent1"/>
+          </a:effectRef>
+          <a:fontRef idx="minor">
+            <a:schemeClr val="lt1"/>
+          </a:fontRef>
+        </p:style>
+        <p:txBody>
+          <a:bodyPr rtlCol="0" anchor="ctr"/>
+          <a:lstStyle/>
+          <a:p>
+            <a:pPr algn="ctr"/>
+          </a:p>
+        </p:txBody>
+      </p:sp>
+      <p:sp>
+        <p:nvSpPr>
+          <p:cNvPr id="36" name="Rectangle 35"/>
+          <p:cNvSpPr/>
+          <p:nvPr/>
+        </p:nvSpPr>
+        <p:spPr>
+          <a:xfrm>
+            <a:off x="6041226" y="3192416"/>
+            <a:ext cx="2828453" cy="265000"/>
+          </a:xfrm>
+          <a:prstGeom prst="rect">
+            <a:avLst/>
+          </a:prstGeom>
+          <a:solidFill>
+            <a:srgbClr val="004E6A"/>
+          </a:solidFill>
+          <a:ln>
+            <a:noFill/>
+          </a:ln>
+        </p:spPr>
+        <p:style>
+          <a:lnRef idx="1">
+            <a:schemeClr val="accent1"/>
+          </a:lnRef>
+          <a:fillRef idx="3">
+            <a:schemeClr val="accent1"/>
+          </a:fillRef>
+          <a:effectRef idx="2">
+            <a:schemeClr val="accent1"/>
+          </a:effectRef>
+          <a:fontRef idx="minor">
+            <a:schemeClr val="lt1"/>
+          </a:fontRef>
+        </p:style>
+        <p:txBody>
+          <a:bodyPr rtlCol="0" anchor="ctr"/>
+          <a:lstStyle/>
+          <a:p>
+            <a:pPr algn="ctr"/>
+          </a:p>
+        </p:txBody>
+      </p:sp>
+      <p:sp>
+        <p:nvSpPr>
+          <p:cNvPr id="37" name="TextBox 36"/>
+          <p:cNvSpPr txBox="1"/>
+          <p:nvPr/>
+        </p:nvSpPr>
+        <p:spPr>
+          <a:xfrm>
+            <a:off x="6150954" y="3240416"/>
+            <a:ext cx="2308997" cy="200000"/>
+          </a:xfrm>
+          <a:prstGeom prst="rect">
+            <a:avLst/>
+          </a:prstGeom>
+          <a:noFill/>
+        </p:spPr>
+        <p:txBody>
+          <a:bodyPr wrap="square">
+            <a:spAutoFit/>
+          </a:bodyPr>
+          <a:lstStyle/>
+          <a:p>
+            <a:pPr algn="l"/>
+            <a:r>
+              <a:rPr sz="1050" b="1" i="0">
+                <a:solidFill>
+                  <a:srgbClr val="FFFFFF"/>
+                </a:solidFill>
+              </a:rPr>
+              <a:t>E6  Discovery &amp; Catalogue</a:t>
+            </a:r>
+          </a:p>
+        </p:txBody>
+      </p:sp>
+      <p:sp>
+        <p:nvSpPr>
+          <p:cNvPr id="38" name="TextBox 37"/>
+          <p:cNvSpPr txBox="1"/>
+          <p:nvPr/>
+        </p:nvSpPr>
+        <p:spPr>
+          <a:xfrm>
+            <a:off x="8379951" y="3262416"/>
+            <a:ext cx="380000" cy="160000"/>
+          </a:xfrm>
+          <a:prstGeom prst="rect">
+            <a:avLst/>
+          </a:prstGeom>
+          <a:noFill/>
+        </p:spPr>
+        <p:txBody>
+          <a:bodyPr wrap="square">
+            <a:spAutoFit/>
+          </a:bodyPr>
+          <a:lstStyle/>
+          <a:p>
+            <a:pPr algn="r"/>
+            <a:r>
+              <a:rPr sz="850" b="0" i="0">
+                <a:solidFill>
+                  <a:srgbClr val="B0C8E0"/>
+                </a:solidFill>
+              </a:rPr>
+              <a:t>7 features</a:t>
+            </a:r>
+          </a:p>
+        </p:txBody>
+      </p:sp>
+      <p:sp>
+        <p:nvSpPr>
+          <p:cNvPr id="39" name="TextBox 38"/>
+          <p:cNvSpPr txBox="1"/>
+          <p:nvPr/>
+        </p:nvSpPr>
+        <p:spPr>
+          <a:xfrm>
+            <a:off x="6150954" y="3517416"/>
+            <a:ext cx="2608997" cy="1295992"/>
+          </a:xfrm>
+          <a:prstGeom prst="rect">
+            <a:avLst/>
+          </a:prstGeom>
+          <a:noFill/>
+        </p:spPr>
+        <p:txBody>
+          <a:bodyPr wrap="square">
+            <a:spAutoFit/>
+          </a:bodyPr>
+          <a:lstStyle/>
+          <a:p>
+            <a:pPr algn="l"/>
+            <a:r>
+              <a:rPr sz="950" b="0" i="0">
+                <a:solidFill>
+                  <a:srgbClr val="2C2C2C"/>
+                </a:solidFill>
+              </a:rPr>
+              <a:t>Every EDAP data asset discoverable in Alation with full metadata, lineage, and business context — kept current automatically</a:t>
+            </a:r>
+          </a:p>
+        </p:txBody>
+      </p:sp>
+      <p:sp>
+        <p:nvSpPr>
+          <p:cNvPr id="40" name="Rectangle 39"/>
+          <p:cNvSpPr/>
+          <p:nvPr/>
+        </p:nvSpPr>
+        <p:spPr>
+          <a:xfrm>
+            <a:off x="274320" y="4908408"/>
+            <a:ext cx="2828453" cy="1660992"/>
+          </a:xfrm>
+          <a:prstGeom prst="rect">
+            <a:avLst/>
+          </a:prstGeom>
+          <a:solidFill>
+            <a:srgbClr val="F2F4F7"/>
+          </a:solidFill>
+          <a:ln w="9525">
+            <a:solidFill>
+              <a:srgbClr val="006E8C"/>
+            </a:solidFill>
+          </a:ln>
+        </p:spPr>
+        <p:style>
+          <a:lnRef idx="1">
+            <a:schemeClr val="accent1"/>
+          </a:lnRef>
+          <a:fillRef idx="3">
+            <a:schemeClr val="accent1"/>
+          </a:fillRef>
+          <a:effectRef idx="2">
+            <a:schemeClr val="accent1"/>
+          </a:effectRef>
+          <a:fontRef idx="minor">
+            <a:schemeClr val="lt1"/>
+          </a:fontRef>
+        </p:style>
+        <p:txBody>
+          <a:bodyPr rtlCol="0" anchor="ctr"/>
+          <a:lstStyle/>
+          <a:p>
+            <a:pPr algn="ctr"/>
+          </a:p>
+        </p:txBody>
+      </p:sp>
+      <p:sp>
+        <p:nvSpPr>
+          <p:cNvPr id="41" name="Rectangle 40"/>
+          <p:cNvSpPr/>
+          <p:nvPr/>
+        </p:nvSpPr>
+        <p:spPr>
+          <a:xfrm>
+            <a:off x="274320" y="4908408"/>
+            <a:ext cx="2828453" cy="265000"/>
           </a:xfrm>
           <a:prstGeom prst="rect">
             <a:avLst/>
@@ -6295,7 +7180,6 @@
           <a:ln>
             <a:noFill/>
           </a:ln>
-          <a:effectLst/>
         </p:spPr>
         <p:style>
           <a:lnRef idx="1">
@@ -6321,14 +7205,14 @@
       </p:sp>
       <p:sp>
         <p:nvSpPr>
-          <p:cNvPr id="13" name="TextBox 12"/>
+          <p:cNvPr id="42" name="TextBox 41"/>
           <p:cNvSpPr txBox="1"/>
           <p:nvPr/>
         </p:nvSpPr>
         <p:spPr>
           <a:xfrm>
-            <a:off x="2999232" y="1700784"/>
-            <a:ext cx="3035808" cy="219456"/>
+            <a:off x="384048" y="4956408"/>
+            <a:ext cx="2308997" cy="200000"/>
           </a:xfrm>
           <a:prstGeom prst="rect">
             <a:avLst/>
@@ -6343,26 +7227,139 @@
           <a:p>
             <a:pPr algn="l"/>
             <a:r>
-              <a:rPr sz="900" b="1" i="0">
+              <a:rPr sz="1050" b="1" i="0">
                 <a:solidFill>
                   <a:srgbClr val="FFFFFF"/>
                 </a:solidFill>
               </a:rPr>
-              <a:t>This PI Delivers</a:t>
-            </a:r>
-          </a:p>
-        </p:txBody>
-      </p:sp>
-      <p:sp>
-        <p:nvSpPr>
-          <p:cNvPr id="14" name="Rectangle 13"/>
+              <a:t>E7  Analytics &amp; AI</a:t>
+            </a:r>
+          </a:p>
+        </p:txBody>
+      </p:sp>
+      <p:sp>
+        <p:nvSpPr>
+          <p:cNvPr id="43" name="TextBox 42"/>
+          <p:cNvSpPr txBox="1"/>
+          <p:nvPr/>
+        </p:nvSpPr>
+        <p:spPr>
+          <a:xfrm>
+            <a:off x="2613045" y="4978408"/>
+            <a:ext cx="380000" cy="160000"/>
+          </a:xfrm>
+          <a:prstGeom prst="rect">
+            <a:avLst/>
+          </a:prstGeom>
+          <a:noFill/>
+        </p:spPr>
+        <p:txBody>
+          <a:bodyPr wrap="square">
+            <a:spAutoFit/>
+          </a:bodyPr>
+          <a:lstStyle/>
+          <a:p>
+            <a:pPr algn="r"/>
+            <a:r>
+              <a:rPr sz="850" b="0" i="0">
+                <a:solidFill>
+                  <a:srgbClr val="B0C8E0"/>
+                </a:solidFill>
+              </a:rPr>
+              <a:t>6 features</a:t>
+            </a:r>
+          </a:p>
+        </p:txBody>
+      </p:sp>
+      <p:sp>
+        <p:nvSpPr>
+          <p:cNvPr id="44" name="TextBox 43"/>
+          <p:cNvSpPr txBox="1"/>
+          <p:nvPr/>
+        </p:nvSpPr>
+        <p:spPr>
+          <a:xfrm>
+            <a:off x="384048" y="5233408"/>
+            <a:ext cx="2608997" cy="1295992"/>
+          </a:xfrm>
+          <a:prstGeom prst="rect">
+            <a:avLst/>
+          </a:prstGeom>
+          <a:noFill/>
+        </p:spPr>
+        <p:txBody>
+          <a:bodyPr wrap="square">
+            <a:spAutoFit/>
+          </a:bodyPr>
+          <a:lstStyle/>
+          <a:p>
+            <a:pPr algn="l"/>
+            <a:r>
+              <a:rPr sz="950" b="0" i="0">
+                <a:solidFill>
+                  <a:srgbClr val="2C2C2C"/>
+                </a:solidFill>
+              </a:rPr>
+              <a:t>MLOps capabilities operational: experiment, train, deploy, and monitor models; three OMLIX algorithms running in the Customer domain</a:t>
+            </a:r>
+          </a:p>
+        </p:txBody>
+      </p:sp>
+      <p:sp>
+        <p:nvSpPr>
+          <p:cNvPr id="45" name="Rectangle 44"/>
           <p:cNvSpPr/>
           <p:nvPr/>
         </p:nvSpPr>
         <p:spPr>
           <a:xfrm>
-            <a:off x="6217920" y="1664208"/>
-            <a:ext cx="2880360" cy="292608"/>
+            <a:off x="3157773" y="4908408"/>
+            <a:ext cx="2828453" cy="1660992"/>
+          </a:xfrm>
+          <a:prstGeom prst="rect">
+            <a:avLst/>
+          </a:prstGeom>
+          <a:solidFill>
+            <a:srgbClr val="F2F4F7"/>
+          </a:solidFill>
+          <a:ln w="9525">
+            <a:solidFill>
+              <a:srgbClr val="006E8C"/>
+            </a:solidFill>
+          </a:ln>
+        </p:spPr>
+        <p:style>
+          <a:lnRef idx="1">
+            <a:schemeClr val="accent1"/>
+          </a:lnRef>
+          <a:fillRef idx="3">
+            <a:schemeClr val="accent1"/>
+          </a:fillRef>
+          <a:effectRef idx="2">
+            <a:schemeClr val="accent1"/>
+          </a:effectRef>
+          <a:fontRef idx="minor">
+            <a:schemeClr val="lt1"/>
+          </a:fontRef>
+        </p:style>
+        <p:txBody>
+          <a:bodyPr rtlCol="0" anchor="ctr"/>
+          <a:lstStyle/>
+          <a:p>
+            <a:pPr algn="ctr"/>
+          </a:p>
+        </p:txBody>
+      </p:sp>
+      <p:sp>
+        <p:nvSpPr>
+          <p:cNvPr id="46" name="Rectangle 45"/>
+          <p:cNvSpPr/>
+          <p:nvPr/>
+        </p:nvSpPr>
+        <p:spPr>
+          <a:xfrm>
+            <a:off x="3157773" y="4908408"/>
+            <a:ext cx="2828453" cy="265000"/>
           </a:xfrm>
           <a:prstGeom prst="rect">
             <a:avLst/>
@@ -6373,7 +7370,6 @@
           <a:ln>
             <a:noFill/>
           </a:ln>
-          <a:effectLst/>
         </p:spPr>
         <p:style>
           <a:lnRef idx="1">
@@ -6399,14 +7395,14 @@
       </p:sp>
       <p:sp>
         <p:nvSpPr>
-          <p:cNvPr id="15" name="TextBox 14"/>
+          <p:cNvPr id="47" name="TextBox 46"/>
           <p:cNvSpPr txBox="1"/>
           <p:nvPr/>
         </p:nvSpPr>
         <p:spPr>
           <a:xfrm>
-            <a:off x="6291072" y="1700784"/>
-            <a:ext cx="2761488" cy="219456"/>
+            <a:off x="3267501" y="4956408"/>
+            <a:ext cx="2308997" cy="200000"/>
           </a:xfrm>
           <a:prstGeom prst="rect">
             <a:avLst/>
@@ -6421,26 +7417,94 @@
           <a:p>
             <a:pPr algn="l"/>
             <a:r>
-              <a:rPr sz="900" b="1" i="0">
+              <a:rPr sz="1050" b="1" i="0">
                 <a:solidFill>
                   <a:srgbClr val="FFFFFF"/>
                 </a:solidFill>
               </a:rPr>
-              <a:t>Architectural Anchor</a:t>
-            </a:r>
-          </a:p>
-        </p:txBody>
-      </p:sp>
-      <p:sp>
-        <p:nvSpPr>
-          <p:cNvPr id="16" name="Rectangle 15"/>
+              <a:t>E8  Migration Pathways</a:t>
+            </a:r>
+          </a:p>
+        </p:txBody>
+      </p:sp>
+      <p:sp>
+        <p:nvSpPr>
+          <p:cNvPr id="48" name="TextBox 47"/>
+          <p:cNvSpPr txBox="1"/>
+          <p:nvPr/>
+        </p:nvSpPr>
+        <p:spPr>
+          <a:xfrm>
+            <a:off x="5496498" y="4978408"/>
+            <a:ext cx="380000" cy="160000"/>
+          </a:xfrm>
+          <a:prstGeom prst="rect">
+            <a:avLst/>
+          </a:prstGeom>
+          <a:noFill/>
+        </p:spPr>
+        <p:txBody>
+          <a:bodyPr wrap="square">
+            <a:spAutoFit/>
+          </a:bodyPr>
+          <a:lstStyle/>
+          <a:p>
+            <a:pPr algn="r"/>
+            <a:r>
+              <a:rPr sz="850" b="0" i="0">
+                <a:solidFill>
+                  <a:srgbClr val="B0C8E0"/>
+                </a:solidFill>
+              </a:rPr>
+              <a:t>6 features</a:t>
+            </a:r>
+          </a:p>
+        </p:txBody>
+      </p:sp>
+      <p:sp>
+        <p:nvSpPr>
+          <p:cNvPr id="49" name="TextBox 48"/>
+          <p:cNvSpPr txBox="1"/>
+          <p:nvPr/>
+        </p:nvSpPr>
+        <p:spPr>
+          <a:xfrm>
+            <a:off x="3267501" y="5233408"/>
+            <a:ext cx="2608997" cy="1295992"/>
+          </a:xfrm>
+          <a:prstGeom prst="rect">
+            <a:avLst/>
+          </a:prstGeom>
+          <a:noFill/>
+        </p:spPr>
+        <p:txBody>
+          <a:bodyPr wrap="square">
+            <a:spAutoFit/>
+          </a:bodyPr>
+          <a:lstStyle/>
+          <a:p>
+            <a:pPr algn="l"/>
+            <a:r>
+              <a:rPr sz="950" b="0" i="0">
+                <a:solidFill>
+                  <a:srgbClr val="2C2C2C"/>
+                </a:solidFill>
+              </a:rPr>
+              <a:t>Every legacy platform (Glue, ADF, SAP DS, SageMaker) has a documented, costed, proven migration path to EDAP</a:t>
+            </a:r>
+          </a:p>
+        </p:txBody>
+      </p:sp>
+      <p:sp>
+        <p:nvSpPr>
+          <p:cNvPr id="50" name="Rectangle 49"/>
           <p:cNvSpPr/>
           <p:nvPr/>
         </p:nvSpPr>
         <p:spPr>
           <a:xfrm>
-            <a:off x="274320" y="1975104"/>
-            <a:ext cx="2514600" cy="374904"/>
+            <a:off x="6041226" y="4908408"/>
+            <a:ext cx="2828453" cy="1660992"/>
           </a:xfrm>
           <a:prstGeom prst="rect">
             <a:avLst/>
@@ -6448,12 +7512,11 @@
           <a:solidFill>
             <a:srgbClr val="F2F4F7"/>
           </a:solidFill>
-          <a:ln w="6350">
+          <a:ln w="9525">
             <a:solidFill>
-              <a:srgbClr val="CCD6E0"/>
+              <a:srgbClr val="006E8C"/>
             </a:solidFill>
           </a:ln>
-          <a:effectLst/>
         </p:spPr>
         <p:style>
           <a:lnRef idx="1">
@@ -6479,27 +7542,24 @@
       </p:sp>
       <p:sp>
         <p:nvSpPr>
-          <p:cNvPr id="17" name="Rectangle 16"/>
+          <p:cNvPr id="51" name="Rectangle 50"/>
           <p:cNvSpPr/>
           <p:nvPr/>
         </p:nvSpPr>
         <p:spPr>
           <a:xfrm>
-            <a:off x="2926080" y="1975104"/>
-            <a:ext cx="3154680" cy="374904"/>
+            <a:off x="6041226" y="4908408"/>
+            <a:ext cx="2828453" cy="265000"/>
           </a:xfrm>
           <a:prstGeom prst="rect">
             <a:avLst/>
           </a:prstGeom>
           <a:solidFill>
-            <a:srgbClr val="F2F4F7"/>
+            <a:srgbClr val="1A3A2A"/>
           </a:solidFill>
-          <a:ln w="6350">
-            <a:solidFill>
-              <a:srgbClr val="CCD6E0"/>
-            </a:solidFill>
+          <a:ln>
+            <a:noFill/>
           </a:ln>
-          <a:effectLst/>
         </p:spPr>
         <p:style>
           <a:lnRef idx="1">
@@ -6525,60 +7585,14 @@
       </p:sp>
       <p:sp>
         <p:nvSpPr>
-          <p:cNvPr id="18" name="Rectangle 17"/>
-          <p:cNvSpPr/>
-          <p:nvPr/>
-        </p:nvSpPr>
-        <p:spPr>
-          <a:xfrm>
-            <a:off x="6217920" y="1975104"/>
-            <a:ext cx="2880360" cy="374904"/>
-          </a:xfrm>
-          <a:prstGeom prst="rect">
-            <a:avLst/>
-          </a:prstGeom>
-          <a:solidFill>
-            <a:srgbClr val="F2F4F7"/>
-          </a:solidFill>
-          <a:ln w="6350">
-            <a:solidFill>
-              <a:srgbClr val="CCD6E0"/>
-            </a:solidFill>
-          </a:ln>
-          <a:effectLst/>
-        </p:spPr>
-        <p:style>
-          <a:lnRef idx="1">
-            <a:schemeClr val="accent1"/>
-          </a:lnRef>
-          <a:fillRef idx="3">
-            <a:schemeClr val="accent1"/>
-          </a:fillRef>
-          <a:effectRef idx="2">
-            <a:schemeClr val="accent1"/>
-          </a:effectRef>
-          <a:fontRef idx="minor">
-            <a:schemeClr val="lt1"/>
-          </a:fontRef>
-        </p:style>
-        <p:txBody>
-          <a:bodyPr rtlCol="0" anchor="ctr"/>
-          <a:lstStyle/>
-          <a:p>
-            <a:pPr algn="ctr"/>
-          </a:p>
-        </p:txBody>
-      </p:sp>
-      <p:sp>
-        <p:nvSpPr>
-          <p:cNvPr id="19" name="TextBox 18"/>
+          <p:cNvPr id="52" name="TextBox 51"/>
           <p:cNvSpPr txBox="1"/>
           <p:nvPr/>
         </p:nvSpPr>
         <p:spPr>
           <a:xfrm>
-            <a:off x="347472" y="2011680"/>
-            <a:ext cx="2395727" cy="310896"/>
+            <a:off x="6150954" y="4956408"/>
+            <a:ext cx="2308997" cy="200000"/>
           </a:xfrm>
           <a:prstGeom prst="rect">
             <a:avLst/>
@@ -6593,26 +7607,26 @@
           <a:p>
             <a:pPr algn="l"/>
             <a:r>
-              <a:rPr sz="850" b="1" i="0">
-                <a:solidFill>
-                  <a:srgbClr val="1B2A4A"/>
-                </a:solidFill>
-              </a:rPr>
-              <a:t>E1  Platform Foundation</a:t>
-            </a:r>
-          </a:p>
-        </p:txBody>
-      </p:sp>
-      <p:sp>
-        <p:nvSpPr>
-          <p:cNvPr id="20" name="TextBox 19"/>
+              <a:rPr sz="1050" b="1" i="0">
+                <a:solidFill>
+                  <a:srgbClr val="FFFFFF"/>
+                </a:solidFill>
+              </a:rPr>
+              <a:t>E9  Capability Uplift &amp; Advisory</a:t>
+            </a:r>
+          </a:p>
+        </p:txBody>
+      </p:sp>
+      <p:sp>
+        <p:nvSpPr>
+          <p:cNvPr id="53" name="TextBox 52"/>
           <p:cNvSpPr txBox="1"/>
           <p:nvPr/>
         </p:nvSpPr>
         <p:spPr>
           <a:xfrm>
-            <a:off x="2999232" y="2011680"/>
-            <a:ext cx="3035808" cy="310896"/>
+            <a:off x="8379951" y="4978408"/>
+            <a:ext cx="380000" cy="160000"/>
           </a:xfrm>
           <a:prstGeom prst="rect">
             <a:avLst/>
@@ -6625,28 +7639,28 @@
           </a:bodyPr>
           <a:lstStyle/>
           <a:p>
-            <a:pPr algn="l"/>
+            <a:pPr algn="r"/>
             <a:r>
               <a:rPr sz="850" b="0" i="0">
                 <a:solidFill>
-                  <a:srgbClr val="2C2C2C"/>
-                </a:solidFill>
-              </a:rPr>
-              <a:t>Environments, UC metastore, identity, compute policies, CI/CD (DABs)</a:t>
-            </a:r>
-          </a:p>
-        </p:txBody>
-      </p:sp>
-      <p:sp>
-        <p:nvSpPr>
-          <p:cNvPr id="21" name="TextBox 20"/>
+                  <a:srgbClr val="B0C8E0"/>
+                </a:solidFill>
+              </a:rPr>
+              <a:t>17 features</a:t>
+            </a:r>
+          </a:p>
+        </p:txBody>
+      </p:sp>
+      <p:sp>
+        <p:nvSpPr>
+          <p:cNvPr id="54" name="TextBox 53"/>
           <p:cNvSpPr txBox="1"/>
           <p:nvPr/>
         </p:nvSpPr>
         <p:spPr>
           <a:xfrm>
-            <a:off x="6291072" y="2011680"/>
-            <a:ext cx="2761488" cy="310896"/>
+            <a:off x="6150954" y="5233408"/>
+            <a:ext cx="2608997" cy="1295992"/>
           </a:xfrm>
           <a:prstGeom prst="rect">
             <a:avLst/>
@@ -6661,1290 +7675,12 @@
           <a:p>
             <a:pPr algn="l"/>
             <a:r>
-              <a:rPr sz="850" b="0" i="0">
-                <a:solidFill>
-                  <a:srgbClr val="556B8A"/>
-                </a:solidFill>
-              </a:rPr>
-              <a:t>EDAP Access Model  |  Medallion Architecture</a:t>
-            </a:r>
-          </a:p>
-        </p:txBody>
-      </p:sp>
-      <p:sp>
-        <p:nvSpPr>
-          <p:cNvPr id="22" name="Rectangle 21"/>
-          <p:cNvSpPr/>
-          <p:nvPr/>
-        </p:nvSpPr>
-        <p:spPr>
-          <a:xfrm>
-            <a:off x="274320" y="2377440"/>
-            <a:ext cx="2514600" cy="374904"/>
-          </a:xfrm>
-          <a:prstGeom prst="rect">
-            <a:avLst/>
-          </a:prstGeom>
-          <a:solidFill>
-            <a:srgbClr val="FFFFFF"/>
-          </a:solidFill>
-          <a:ln w="6350">
-            <a:solidFill>
-              <a:srgbClr val="CCD6E0"/>
-            </a:solidFill>
-          </a:ln>
-          <a:effectLst/>
-        </p:spPr>
-        <p:style>
-          <a:lnRef idx="1">
-            <a:schemeClr val="accent1"/>
-          </a:lnRef>
-          <a:fillRef idx="3">
-            <a:schemeClr val="accent1"/>
-          </a:fillRef>
-          <a:effectRef idx="2">
-            <a:schemeClr val="accent1"/>
-          </a:effectRef>
-          <a:fontRef idx="minor">
-            <a:schemeClr val="lt1"/>
-          </a:fontRef>
-        </p:style>
-        <p:txBody>
-          <a:bodyPr rtlCol="0" anchor="ctr"/>
-          <a:lstStyle/>
-          <a:p>
-            <a:pPr algn="ctr"/>
-          </a:p>
-        </p:txBody>
-      </p:sp>
-      <p:sp>
-        <p:nvSpPr>
-          <p:cNvPr id="23" name="Rectangle 22"/>
-          <p:cNvSpPr/>
-          <p:nvPr/>
-        </p:nvSpPr>
-        <p:spPr>
-          <a:xfrm>
-            <a:off x="2926080" y="2377440"/>
-            <a:ext cx="3154680" cy="374904"/>
-          </a:xfrm>
-          <a:prstGeom prst="rect">
-            <a:avLst/>
-          </a:prstGeom>
-          <a:solidFill>
-            <a:srgbClr val="FFFFFF"/>
-          </a:solidFill>
-          <a:ln w="6350">
-            <a:solidFill>
-              <a:srgbClr val="CCD6E0"/>
-            </a:solidFill>
-          </a:ln>
-          <a:effectLst/>
-        </p:spPr>
-        <p:style>
-          <a:lnRef idx="1">
-            <a:schemeClr val="accent1"/>
-          </a:lnRef>
-          <a:fillRef idx="3">
-            <a:schemeClr val="accent1"/>
-          </a:fillRef>
-          <a:effectRef idx="2">
-            <a:schemeClr val="accent1"/>
-          </a:effectRef>
-          <a:fontRef idx="minor">
-            <a:schemeClr val="lt1"/>
-          </a:fontRef>
-        </p:style>
-        <p:txBody>
-          <a:bodyPr rtlCol="0" anchor="ctr"/>
-          <a:lstStyle/>
-          <a:p>
-            <a:pPr algn="ctr"/>
-          </a:p>
-        </p:txBody>
-      </p:sp>
-      <p:sp>
-        <p:nvSpPr>
-          <p:cNvPr id="24" name="Rectangle 23"/>
-          <p:cNvSpPr/>
-          <p:nvPr/>
-        </p:nvSpPr>
-        <p:spPr>
-          <a:xfrm>
-            <a:off x="6217920" y="2377440"/>
-            <a:ext cx="2880360" cy="374904"/>
-          </a:xfrm>
-          <a:prstGeom prst="rect">
-            <a:avLst/>
-          </a:prstGeom>
-          <a:solidFill>
-            <a:srgbClr val="FFFFFF"/>
-          </a:solidFill>
-          <a:ln w="6350">
-            <a:solidFill>
-              <a:srgbClr val="CCD6E0"/>
-            </a:solidFill>
-          </a:ln>
-          <a:effectLst/>
-        </p:spPr>
-        <p:style>
-          <a:lnRef idx="1">
-            <a:schemeClr val="accent1"/>
-          </a:lnRef>
-          <a:fillRef idx="3">
-            <a:schemeClr val="accent1"/>
-          </a:fillRef>
-          <a:effectRef idx="2">
-            <a:schemeClr val="accent1"/>
-          </a:effectRef>
-          <a:fontRef idx="minor">
-            <a:schemeClr val="lt1"/>
-          </a:fontRef>
-        </p:style>
-        <p:txBody>
-          <a:bodyPr rtlCol="0" anchor="ctr"/>
-          <a:lstStyle/>
-          <a:p>
-            <a:pPr algn="ctr"/>
-          </a:p>
-        </p:txBody>
-      </p:sp>
-      <p:sp>
-        <p:nvSpPr>
-          <p:cNvPr id="25" name="TextBox 24"/>
-          <p:cNvSpPr txBox="1"/>
-          <p:nvPr/>
-        </p:nvSpPr>
-        <p:spPr>
-          <a:xfrm>
-            <a:off x="347472" y="2414016"/>
-            <a:ext cx="2395727" cy="310896"/>
-          </a:xfrm>
-          <a:prstGeom prst="rect">
-            <a:avLst/>
-          </a:prstGeom>
-          <a:noFill/>
-        </p:spPr>
-        <p:txBody>
-          <a:bodyPr wrap="square">
-            <a:spAutoFit/>
-          </a:bodyPr>
-          <a:lstStyle/>
-          <a:p>
-            <a:pPr algn="l"/>
-            <a:r>
-              <a:rPr sz="850" b="1" i="0">
-                <a:solidFill>
-                  <a:srgbClr val="1B2A4A"/>
-                </a:solidFill>
-              </a:rPr>
-              <a:t>E2  Data Ingestion &amp; Integration</a:t>
-            </a:r>
-          </a:p>
-        </p:txBody>
-      </p:sp>
-      <p:sp>
-        <p:nvSpPr>
-          <p:cNvPr id="26" name="TextBox 25"/>
-          <p:cNvSpPr txBox="1"/>
-          <p:nvPr/>
-        </p:nvSpPr>
-        <p:spPr>
-          <a:xfrm>
-            <a:off x="2999232" y="2414016"/>
-            <a:ext cx="3035808" cy="310896"/>
-          </a:xfrm>
-          <a:prstGeom prst="rect">
-            <a:avLst/>
-          </a:prstGeom>
-          <a:noFill/>
-        </p:spPr>
-        <p:txBody>
-          <a:bodyPr wrap="square">
-            <a:spAutoFit/>
-          </a:bodyPr>
-          <a:lstStyle/>
-          <a:p>
-            <a:pPr algn="l"/>
-            <a:r>
-              <a:rPr sz="850" b="0" i="0">
+              <a:rPr sz="950" b="0" i="0">
                 <a:solidFill>
                   <a:srgbClr val="2C2C2C"/>
                 </a:solidFill>
               </a:rPr>
-              <a:t>Metadata-driven ingestion framework; CDC, batch &amp; event patterns proven</a:t>
-            </a:r>
-          </a:p>
-        </p:txBody>
-      </p:sp>
-      <p:sp>
-        <p:nvSpPr>
-          <p:cNvPr id="27" name="TextBox 26"/>
-          <p:cNvSpPr txBox="1"/>
-          <p:nvPr/>
-        </p:nvSpPr>
-        <p:spPr>
-          <a:xfrm>
-            <a:off x="6291072" y="2414016"/>
-            <a:ext cx="2761488" cy="310896"/>
-          </a:xfrm>
-          <a:prstGeom prst="rect">
-            <a:avLst/>
-          </a:prstGeom>
-          <a:noFill/>
-        </p:spPr>
-        <p:txBody>
-          <a:bodyPr wrap="square">
-            <a:spAutoFit/>
-          </a:bodyPr>
-          <a:lstStyle/>
-          <a:p>
-            <a:pPr algn="l"/>
-            <a:r>
-              <a:rPr sz="850" b="0" i="0">
-                <a:solidFill>
-                  <a:srgbClr val="556B8A"/>
-                </a:solidFill>
-              </a:rPr>
-              <a:t>Pipeline Framework (EDAP-FWK-001)</a:t>
-            </a:r>
-          </a:p>
-        </p:txBody>
-      </p:sp>
-      <p:sp>
-        <p:nvSpPr>
-          <p:cNvPr id="28" name="Rectangle 27"/>
-          <p:cNvSpPr/>
-          <p:nvPr/>
-        </p:nvSpPr>
-        <p:spPr>
-          <a:xfrm>
-            <a:off x="274320" y="2779776"/>
-            <a:ext cx="2514600" cy="374904"/>
-          </a:xfrm>
-          <a:prstGeom prst="rect">
-            <a:avLst/>
-          </a:prstGeom>
-          <a:solidFill>
-            <a:srgbClr val="F2F4F7"/>
-          </a:solidFill>
-          <a:ln w="6350">
-            <a:solidFill>
-              <a:srgbClr val="CCD6E0"/>
-            </a:solidFill>
-          </a:ln>
-          <a:effectLst/>
-        </p:spPr>
-        <p:style>
-          <a:lnRef idx="1">
-            <a:schemeClr val="accent1"/>
-          </a:lnRef>
-          <a:fillRef idx="3">
-            <a:schemeClr val="accent1"/>
-          </a:fillRef>
-          <a:effectRef idx="2">
-            <a:schemeClr val="accent1"/>
-          </a:effectRef>
-          <a:fontRef idx="minor">
-            <a:schemeClr val="lt1"/>
-          </a:fontRef>
-        </p:style>
-        <p:txBody>
-          <a:bodyPr rtlCol="0" anchor="ctr"/>
-          <a:lstStyle/>
-          <a:p>
-            <a:pPr algn="ctr"/>
-          </a:p>
-        </p:txBody>
-      </p:sp>
-      <p:sp>
-        <p:nvSpPr>
-          <p:cNvPr id="29" name="Rectangle 28"/>
-          <p:cNvSpPr/>
-          <p:nvPr/>
-        </p:nvSpPr>
-        <p:spPr>
-          <a:xfrm>
-            <a:off x="2926080" y="2779776"/>
-            <a:ext cx="3154680" cy="374904"/>
-          </a:xfrm>
-          <a:prstGeom prst="rect">
-            <a:avLst/>
-          </a:prstGeom>
-          <a:solidFill>
-            <a:srgbClr val="F2F4F7"/>
-          </a:solidFill>
-          <a:ln w="6350">
-            <a:solidFill>
-              <a:srgbClr val="CCD6E0"/>
-            </a:solidFill>
-          </a:ln>
-          <a:effectLst/>
-        </p:spPr>
-        <p:style>
-          <a:lnRef idx="1">
-            <a:schemeClr val="accent1"/>
-          </a:lnRef>
-          <a:fillRef idx="3">
-            <a:schemeClr val="accent1"/>
-          </a:fillRef>
-          <a:effectRef idx="2">
-            <a:schemeClr val="accent1"/>
-          </a:effectRef>
-          <a:fontRef idx="minor">
-            <a:schemeClr val="lt1"/>
-          </a:fontRef>
-        </p:style>
-        <p:txBody>
-          <a:bodyPr rtlCol="0" anchor="ctr"/>
-          <a:lstStyle/>
-          <a:p>
-            <a:pPr algn="ctr"/>
-          </a:p>
-        </p:txBody>
-      </p:sp>
-      <p:sp>
-        <p:nvSpPr>
-          <p:cNvPr id="30" name="Rectangle 29"/>
-          <p:cNvSpPr/>
-          <p:nvPr/>
-        </p:nvSpPr>
-        <p:spPr>
-          <a:xfrm>
-            <a:off x="6217920" y="2779776"/>
-            <a:ext cx="2880360" cy="374904"/>
-          </a:xfrm>
-          <a:prstGeom prst="rect">
-            <a:avLst/>
-          </a:prstGeom>
-          <a:solidFill>
-            <a:srgbClr val="F2F4F7"/>
-          </a:solidFill>
-          <a:ln w="6350">
-            <a:solidFill>
-              <a:srgbClr val="CCD6E0"/>
-            </a:solidFill>
-          </a:ln>
-          <a:effectLst/>
-        </p:spPr>
-        <p:style>
-          <a:lnRef idx="1">
-            <a:schemeClr val="accent1"/>
-          </a:lnRef>
-          <a:fillRef idx="3">
-            <a:schemeClr val="accent1"/>
-          </a:fillRef>
-          <a:effectRef idx="2">
-            <a:schemeClr val="accent1"/>
-          </a:effectRef>
-          <a:fontRef idx="minor">
-            <a:schemeClr val="lt1"/>
-          </a:fontRef>
-        </p:style>
-        <p:txBody>
-          <a:bodyPr rtlCol="0" anchor="ctr"/>
-          <a:lstStyle/>
-          <a:p>
-            <a:pPr algn="ctr"/>
-          </a:p>
-        </p:txBody>
-      </p:sp>
-      <p:sp>
-        <p:nvSpPr>
-          <p:cNvPr id="31" name="TextBox 30"/>
-          <p:cNvSpPr txBox="1"/>
-          <p:nvPr/>
-        </p:nvSpPr>
-        <p:spPr>
-          <a:xfrm>
-            <a:off x="347472" y="2816352"/>
-            <a:ext cx="2395727" cy="310896"/>
-          </a:xfrm>
-          <a:prstGeom prst="rect">
-            <a:avLst/>
-          </a:prstGeom>
-          <a:noFill/>
-        </p:spPr>
-        <p:txBody>
-          <a:bodyPr wrap="square">
-            <a:spAutoFit/>
-          </a:bodyPr>
-          <a:lstStyle/>
-          <a:p>
-            <a:pPr algn="l"/>
-            <a:r>
-              <a:rPr sz="850" b="1" i="0">
-                <a:solidFill>
-                  <a:srgbClr val="1B2A4A"/>
-                </a:solidFill>
-              </a:rPr>
-              <a:t>E4  Security, Governance &amp; Compliance</a:t>
-            </a:r>
-          </a:p>
-        </p:txBody>
-      </p:sp>
-      <p:sp>
-        <p:nvSpPr>
-          <p:cNvPr id="32" name="TextBox 31"/>
-          <p:cNvSpPr txBox="1"/>
-          <p:nvPr/>
-        </p:nvSpPr>
-        <p:spPr>
-          <a:xfrm>
-            <a:off x="2999232" y="2816352"/>
-            <a:ext cx="3035808" cy="310896"/>
-          </a:xfrm>
-          <a:prstGeom prst="rect">
-            <a:avLst/>
-          </a:prstGeom>
-          <a:noFill/>
-        </p:spPr>
-        <p:txBody>
-          <a:bodyPr wrap="square">
-            <a:spAutoFit/>
-          </a:bodyPr>
-          <a:lstStyle/>
-          <a:p>
-            <a:pPr algn="l"/>
-            <a:r>
-              <a:rPr sz="850" b="0" i="0">
-                <a:solidFill>
-                  <a:srgbClr val="2C2C2C"/>
-                </a:solidFill>
-              </a:rPr>
-              <a:t>ABAC policies activated; 4-layer tagging applied; Alation OCF connector live</a:t>
-            </a:r>
-          </a:p>
-        </p:txBody>
-      </p:sp>
-      <p:sp>
-        <p:nvSpPr>
-          <p:cNvPr id="33" name="TextBox 32"/>
-          <p:cNvSpPr txBox="1"/>
-          <p:nvPr/>
-        </p:nvSpPr>
-        <p:spPr>
-          <a:xfrm>
-            <a:off x="6291072" y="2816352"/>
-            <a:ext cx="2761488" cy="310896"/>
-          </a:xfrm>
-          <a:prstGeom prst="rect">
-            <a:avLst/>
-          </a:prstGeom>
-          <a:noFill/>
-        </p:spPr>
-        <p:txBody>
-          <a:bodyPr wrap="square">
-            <a:spAutoFit/>
-          </a:bodyPr>
-          <a:lstStyle/>
-          <a:p>
-            <a:pPr algn="l"/>
-            <a:r>
-              <a:rPr sz="850" b="0" i="0">
-                <a:solidFill>
-                  <a:srgbClr val="556B8A"/>
-                </a:solidFill>
-              </a:rPr>
-              <a:t>Tagging Strategy  |  Data Governance Roles</a:t>
-            </a:r>
-          </a:p>
-        </p:txBody>
-      </p:sp>
-      <p:sp>
-        <p:nvSpPr>
-          <p:cNvPr id="34" name="Rectangle 33"/>
-          <p:cNvSpPr/>
-          <p:nvPr/>
-        </p:nvSpPr>
-        <p:spPr>
-          <a:xfrm>
-            <a:off x="274320" y="3182112"/>
-            <a:ext cx="2514600" cy="374904"/>
-          </a:xfrm>
-          <a:prstGeom prst="rect">
-            <a:avLst/>
-          </a:prstGeom>
-          <a:solidFill>
-            <a:srgbClr val="FFFFFF"/>
-          </a:solidFill>
-          <a:ln w="6350">
-            <a:solidFill>
-              <a:srgbClr val="CCD6E0"/>
-            </a:solidFill>
-          </a:ln>
-          <a:effectLst/>
-        </p:spPr>
-        <p:style>
-          <a:lnRef idx="1">
-            <a:schemeClr val="accent1"/>
-          </a:lnRef>
-          <a:fillRef idx="3">
-            <a:schemeClr val="accent1"/>
-          </a:fillRef>
-          <a:effectRef idx="2">
-            <a:schemeClr val="accent1"/>
-          </a:effectRef>
-          <a:fontRef idx="minor">
-            <a:schemeClr val="lt1"/>
-          </a:fontRef>
-        </p:style>
-        <p:txBody>
-          <a:bodyPr rtlCol="0" anchor="ctr"/>
-          <a:lstStyle/>
-          <a:p>
-            <a:pPr algn="ctr"/>
-          </a:p>
-        </p:txBody>
-      </p:sp>
-      <p:sp>
-        <p:nvSpPr>
-          <p:cNvPr id="35" name="Rectangle 34"/>
-          <p:cNvSpPr/>
-          <p:nvPr/>
-        </p:nvSpPr>
-        <p:spPr>
-          <a:xfrm>
-            <a:off x="2926080" y="3182112"/>
-            <a:ext cx="3154680" cy="374904"/>
-          </a:xfrm>
-          <a:prstGeom prst="rect">
-            <a:avLst/>
-          </a:prstGeom>
-          <a:solidFill>
-            <a:srgbClr val="FFFFFF"/>
-          </a:solidFill>
-          <a:ln w="6350">
-            <a:solidFill>
-              <a:srgbClr val="CCD6E0"/>
-            </a:solidFill>
-          </a:ln>
-          <a:effectLst/>
-        </p:spPr>
-        <p:style>
-          <a:lnRef idx="1">
-            <a:schemeClr val="accent1"/>
-          </a:lnRef>
-          <a:fillRef idx="3">
-            <a:schemeClr val="accent1"/>
-          </a:fillRef>
-          <a:effectRef idx="2">
-            <a:schemeClr val="accent1"/>
-          </a:effectRef>
-          <a:fontRef idx="minor">
-            <a:schemeClr val="lt1"/>
-          </a:fontRef>
-        </p:style>
-        <p:txBody>
-          <a:bodyPr rtlCol="0" anchor="ctr"/>
-          <a:lstStyle/>
-          <a:p>
-            <a:pPr algn="ctr"/>
-          </a:p>
-        </p:txBody>
-      </p:sp>
-      <p:sp>
-        <p:nvSpPr>
-          <p:cNvPr id="36" name="Rectangle 35"/>
-          <p:cNvSpPr/>
-          <p:nvPr/>
-        </p:nvSpPr>
-        <p:spPr>
-          <a:xfrm>
-            <a:off x="6217920" y="3182112"/>
-            <a:ext cx="2880360" cy="374904"/>
-          </a:xfrm>
-          <a:prstGeom prst="rect">
-            <a:avLst/>
-          </a:prstGeom>
-          <a:solidFill>
-            <a:srgbClr val="FFFFFF"/>
-          </a:solidFill>
-          <a:ln w="6350">
-            <a:solidFill>
-              <a:srgbClr val="CCD6E0"/>
-            </a:solidFill>
-          </a:ln>
-          <a:effectLst/>
-        </p:spPr>
-        <p:style>
-          <a:lnRef idx="1">
-            <a:schemeClr val="accent1"/>
-          </a:lnRef>
-          <a:fillRef idx="3">
-            <a:schemeClr val="accent1"/>
-          </a:fillRef>
-          <a:effectRef idx="2">
-            <a:schemeClr val="accent1"/>
-          </a:effectRef>
-          <a:fontRef idx="minor">
-            <a:schemeClr val="lt1"/>
-          </a:fontRef>
-        </p:style>
-        <p:txBody>
-          <a:bodyPr rtlCol="0" anchor="ctr"/>
-          <a:lstStyle/>
-          <a:p>
-            <a:pPr algn="ctr"/>
-          </a:p>
-        </p:txBody>
-      </p:sp>
-      <p:sp>
-        <p:nvSpPr>
-          <p:cNvPr id="37" name="TextBox 36"/>
-          <p:cNvSpPr txBox="1"/>
-          <p:nvPr/>
-        </p:nvSpPr>
-        <p:spPr>
-          <a:xfrm>
-            <a:off x="347472" y="3218688"/>
-            <a:ext cx="2395727" cy="310896"/>
-          </a:xfrm>
-          <a:prstGeom prst="rect">
-            <a:avLst/>
-          </a:prstGeom>
-          <a:noFill/>
-        </p:spPr>
-        <p:txBody>
-          <a:bodyPr wrap="square">
-            <a:spAutoFit/>
-          </a:bodyPr>
-          <a:lstStyle/>
-          <a:p>
-            <a:pPr algn="l"/>
-            <a:r>
-              <a:rPr sz="850" b="1" i="0">
-                <a:solidFill>
-                  <a:srgbClr val="1B2A4A"/>
-                </a:solidFill>
-              </a:rPr>
-              <a:t>E5  DataOps &amp; Engineering Excellence</a:t>
-            </a:r>
-          </a:p>
-        </p:txBody>
-      </p:sp>
-      <p:sp>
-        <p:nvSpPr>
-          <p:cNvPr id="38" name="TextBox 37"/>
-          <p:cNvSpPr txBox="1"/>
-          <p:nvPr/>
-        </p:nvSpPr>
-        <p:spPr>
-          <a:xfrm>
-            <a:off x="2999232" y="3218688"/>
-            <a:ext cx="3035808" cy="310896"/>
-          </a:xfrm>
-          <a:prstGeom prst="rect">
-            <a:avLst/>
-          </a:prstGeom>
-          <a:noFill/>
-        </p:spPr>
-        <p:txBody>
-          <a:bodyPr wrap="square">
-            <a:spAutoFit/>
-          </a:bodyPr>
-          <a:lstStyle/>
-          <a:p>
-            <a:pPr algn="l"/>
-            <a:r>
-              <a:rPr sz="850" b="0" i="0">
-                <a:solidFill>
-                  <a:srgbClr val="2C2C2C"/>
-                </a:solidFill>
-              </a:rPr>
-              <a:t>Branching strategy, testing pyramid, cost guardrails ≤10% non-prod</a:t>
-            </a:r>
-          </a:p>
-        </p:txBody>
-      </p:sp>
-      <p:sp>
-        <p:nvSpPr>
-          <p:cNvPr id="39" name="TextBox 38"/>
-          <p:cNvSpPr txBox="1"/>
-          <p:nvPr/>
-        </p:nvSpPr>
-        <p:spPr>
-          <a:xfrm>
-            <a:off x="6291072" y="3218688"/>
-            <a:ext cx="2761488" cy="310896"/>
-          </a:xfrm>
-          <a:prstGeom prst="rect">
-            <a:avLst/>
-          </a:prstGeom>
-          <a:noFill/>
-        </p:spPr>
-        <p:txBody>
-          <a:bodyPr wrap="square">
-            <a:spAutoFit/>
-          </a:bodyPr>
-          <a:lstStyle/>
-          <a:p>
-            <a:pPr algn="l"/>
-            <a:r>
-              <a:rPr sz="850" b="0" i="0">
-                <a:solidFill>
-                  <a:srgbClr val="556B8A"/>
-                </a:solidFill>
-              </a:rPr>
-              <a:t>Databricks End-to-End Platform</a:t>
-            </a:r>
-          </a:p>
-        </p:txBody>
-      </p:sp>
-      <p:sp>
-        <p:nvSpPr>
-          <p:cNvPr id="40" name="Rectangle 39"/>
-          <p:cNvSpPr/>
-          <p:nvPr/>
-        </p:nvSpPr>
-        <p:spPr>
-          <a:xfrm>
-            <a:off x="274320" y="3584448"/>
-            <a:ext cx="2514600" cy="374904"/>
-          </a:xfrm>
-          <a:prstGeom prst="rect">
-            <a:avLst/>
-          </a:prstGeom>
-          <a:solidFill>
-            <a:srgbClr val="F2F4F7"/>
-          </a:solidFill>
-          <a:ln w="6350">
-            <a:solidFill>
-              <a:srgbClr val="CCD6E0"/>
-            </a:solidFill>
-          </a:ln>
-          <a:effectLst/>
-        </p:spPr>
-        <p:style>
-          <a:lnRef idx="1">
-            <a:schemeClr val="accent1"/>
-          </a:lnRef>
-          <a:fillRef idx="3">
-            <a:schemeClr val="accent1"/>
-          </a:fillRef>
-          <a:effectRef idx="2">
-            <a:schemeClr val="accent1"/>
-          </a:effectRef>
-          <a:fontRef idx="minor">
-            <a:schemeClr val="lt1"/>
-          </a:fontRef>
-        </p:style>
-        <p:txBody>
-          <a:bodyPr rtlCol="0" anchor="ctr"/>
-          <a:lstStyle/>
-          <a:p>
-            <a:pPr algn="ctr"/>
-          </a:p>
-        </p:txBody>
-      </p:sp>
-      <p:sp>
-        <p:nvSpPr>
-          <p:cNvPr id="41" name="Rectangle 40"/>
-          <p:cNvSpPr/>
-          <p:nvPr/>
-        </p:nvSpPr>
-        <p:spPr>
-          <a:xfrm>
-            <a:off x="2926080" y="3584448"/>
-            <a:ext cx="3154680" cy="374904"/>
-          </a:xfrm>
-          <a:prstGeom prst="rect">
-            <a:avLst/>
-          </a:prstGeom>
-          <a:solidFill>
-            <a:srgbClr val="F2F4F7"/>
-          </a:solidFill>
-          <a:ln w="6350">
-            <a:solidFill>
-              <a:srgbClr val="CCD6E0"/>
-            </a:solidFill>
-          </a:ln>
-          <a:effectLst/>
-        </p:spPr>
-        <p:style>
-          <a:lnRef idx="1">
-            <a:schemeClr val="accent1"/>
-          </a:lnRef>
-          <a:fillRef idx="3">
-            <a:schemeClr val="accent1"/>
-          </a:fillRef>
-          <a:effectRef idx="2">
-            <a:schemeClr val="accent1"/>
-          </a:effectRef>
-          <a:fontRef idx="minor">
-            <a:schemeClr val="lt1"/>
-          </a:fontRef>
-        </p:style>
-        <p:txBody>
-          <a:bodyPr rtlCol="0" anchor="ctr"/>
-          <a:lstStyle/>
-          <a:p>
-            <a:pPr algn="ctr"/>
-          </a:p>
-        </p:txBody>
-      </p:sp>
-      <p:sp>
-        <p:nvSpPr>
-          <p:cNvPr id="42" name="Rectangle 41"/>
-          <p:cNvSpPr/>
-          <p:nvPr/>
-        </p:nvSpPr>
-        <p:spPr>
-          <a:xfrm>
-            <a:off x="6217920" y="3584448"/>
-            <a:ext cx="2880360" cy="374904"/>
-          </a:xfrm>
-          <a:prstGeom prst="rect">
-            <a:avLst/>
-          </a:prstGeom>
-          <a:solidFill>
-            <a:srgbClr val="F2F4F7"/>
-          </a:solidFill>
-          <a:ln w="6350">
-            <a:solidFill>
-              <a:srgbClr val="CCD6E0"/>
-            </a:solidFill>
-          </a:ln>
-          <a:effectLst/>
-        </p:spPr>
-        <p:style>
-          <a:lnRef idx="1">
-            <a:schemeClr val="accent1"/>
-          </a:lnRef>
-          <a:fillRef idx="3">
-            <a:schemeClr val="accent1"/>
-          </a:fillRef>
-          <a:effectRef idx="2">
-            <a:schemeClr val="accent1"/>
-          </a:effectRef>
-          <a:fontRef idx="minor">
-            <a:schemeClr val="lt1"/>
-          </a:fontRef>
-        </p:style>
-        <p:txBody>
-          <a:bodyPr rtlCol="0" anchor="ctr"/>
-          <a:lstStyle/>
-          <a:p>
-            <a:pPr algn="ctr"/>
-          </a:p>
-        </p:txBody>
-      </p:sp>
-      <p:sp>
-        <p:nvSpPr>
-          <p:cNvPr id="43" name="TextBox 42"/>
-          <p:cNvSpPr txBox="1"/>
-          <p:nvPr/>
-        </p:nvSpPr>
-        <p:spPr>
-          <a:xfrm>
-            <a:off x="347472" y="3621024"/>
-            <a:ext cx="2395727" cy="310896"/>
-          </a:xfrm>
-          <a:prstGeom prst="rect">
-            <a:avLst/>
-          </a:prstGeom>
-          <a:noFill/>
-        </p:spPr>
-        <p:txBody>
-          <a:bodyPr wrap="square">
-            <a:spAutoFit/>
-          </a:bodyPr>
-          <a:lstStyle/>
-          <a:p>
-            <a:pPr algn="l"/>
-            <a:r>
-              <a:rPr sz="850" b="1" i="0">
-                <a:solidFill>
-                  <a:srgbClr val="1B2A4A"/>
-                </a:solidFill>
-              </a:rPr>
-              <a:t>E3/6/7  Transformation, Catalogue &amp; AI</a:t>
-            </a:r>
-          </a:p>
-        </p:txBody>
-      </p:sp>
-      <p:sp>
-        <p:nvSpPr>
-          <p:cNvPr id="44" name="TextBox 43"/>
-          <p:cNvSpPr txBox="1"/>
-          <p:nvPr/>
-        </p:nvSpPr>
-        <p:spPr>
-          <a:xfrm>
-            <a:off x="2999232" y="3621024"/>
-            <a:ext cx="3035808" cy="310896"/>
-          </a:xfrm>
-          <a:prstGeom prst="rect">
-            <a:avLst/>
-          </a:prstGeom>
-          <a:noFill/>
-        </p:spPr>
-        <p:txBody>
-          <a:bodyPr wrap="square">
-            <a:spAutoFit/>
-          </a:bodyPr>
-          <a:lstStyle/>
-          <a:p>
-            <a:pPr algn="l"/>
-            <a:r>
-              <a:rPr sz="850" b="0" i="0">
-                <a:solidFill>
-                  <a:srgbClr val="2C2C2C"/>
-                </a:solidFill>
-              </a:rPr>
-              <a:t>Framework validated end-to-end; Alation–UC bidirectional sync proven</a:t>
-            </a:r>
-          </a:p>
-        </p:txBody>
-      </p:sp>
-      <p:sp>
-        <p:nvSpPr>
-          <p:cNvPr id="45" name="TextBox 44"/>
-          <p:cNvSpPr txBox="1"/>
-          <p:nvPr/>
-        </p:nvSpPr>
-        <p:spPr>
-          <a:xfrm>
-            <a:off x="6291072" y="3621024"/>
-            <a:ext cx="2761488" cy="310896"/>
-          </a:xfrm>
-          <a:prstGeom prst="rect">
-            <a:avLst/>
-          </a:prstGeom>
-          <a:noFill/>
-        </p:spPr>
-        <p:txBody>
-          <a:bodyPr wrap="square">
-            <a:spAutoFit/>
-          </a:bodyPr>
-          <a:lstStyle/>
-          <a:p>
-            <a:pPr algn="l"/>
-            <a:r>
-              <a:rPr sz="850" b="0" i="0">
-                <a:solidFill>
-                  <a:srgbClr val="556B8A"/>
-                </a:solidFill>
-              </a:rPr>
-              <a:t>Pipeline Framework  |  Medallion Architecture</a:t>
-            </a:r>
-          </a:p>
-        </p:txBody>
-      </p:sp>
-      <p:sp>
-        <p:nvSpPr>
-          <p:cNvPr id="46" name="Rectangle 45"/>
-          <p:cNvSpPr/>
-          <p:nvPr/>
-        </p:nvSpPr>
-        <p:spPr>
-          <a:xfrm>
-            <a:off x="274320" y="3986783"/>
-            <a:ext cx="2514600" cy="374904"/>
-          </a:xfrm>
-          <a:prstGeom prst="rect">
-            <a:avLst/>
-          </a:prstGeom>
-          <a:solidFill>
-            <a:srgbClr val="FFFFFF"/>
-          </a:solidFill>
-          <a:ln w="6350">
-            <a:solidFill>
-              <a:srgbClr val="CCD6E0"/>
-            </a:solidFill>
-          </a:ln>
-          <a:effectLst/>
-        </p:spPr>
-        <p:style>
-          <a:lnRef idx="1">
-            <a:schemeClr val="accent1"/>
-          </a:lnRef>
-          <a:fillRef idx="3">
-            <a:schemeClr val="accent1"/>
-          </a:fillRef>
-          <a:effectRef idx="2">
-            <a:schemeClr val="accent1"/>
-          </a:effectRef>
-          <a:fontRef idx="minor">
-            <a:schemeClr val="lt1"/>
-          </a:fontRef>
-        </p:style>
-        <p:txBody>
-          <a:bodyPr rtlCol="0" anchor="ctr"/>
-          <a:lstStyle/>
-          <a:p>
-            <a:pPr algn="ctr"/>
-          </a:p>
-        </p:txBody>
-      </p:sp>
-      <p:sp>
-        <p:nvSpPr>
-          <p:cNvPr id="47" name="Rectangle 46"/>
-          <p:cNvSpPr/>
-          <p:nvPr/>
-        </p:nvSpPr>
-        <p:spPr>
-          <a:xfrm>
-            <a:off x="2926080" y="3986783"/>
-            <a:ext cx="3154680" cy="374904"/>
-          </a:xfrm>
-          <a:prstGeom prst="rect">
-            <a:avLst/>
-          </a:prstGeom>
-          <a:solidFill>
-            <a:srgbClr val="FFFFFF"/>
-          </a:solidFill>
-          <a:ln w="6350">
-            <a:solidFill>
-              <a:srgbClr val="CCD6E0"/>
-            </a:solidFill>
-          </a:ln>
-          <a:effectLst/>
-        </p:spPr>
-        <p:style>
-          <a:lnRef idx="1">
-            <a:schemeClr val="accent1"/>
-          </a:lnRef>
-          <a:fillRef idx="3">
-            <a:schemeClr val="accent1"/>
-          </a:fillRef>
-          <a:effectRef idx="2">
-            <a:schemeClr val="accent1"/>
-          </a:effectRef>
-          <a:fontRef idx="minor">
-            <a:schemeClr val="lt1"/>
-          </a:fontRef>
-        </p:style>
-        <p:txBody>
-          <a:bodyPr rtlCol="0" anchor="ctr"/>
-          <a:lstStyle/>
-          <a:p>
-            <a:pPr algn="ctr"/>
-          </a:p>
-        </p:txBody>
-      </p:sp>
-      <p:sp>
-        <p:nvSpPr>
-          <p:cNvPr id="48" name="Rectangle 47"/>
-          <p:cNvSpPr/>
-          <p:nvPr/>
-        </p:nvSpPr>
-        <p:spPr>
-          <a:xfrm>
-            <a:off x="6217920" y="3986783"/>
-            <a:ext cx="2880360" cy="374904"/>
-          </a:xfrm>
-          <a:prstGeom prst="rect">
-            <a:avLst/>
-          </a:prstGeom>
-          <a:solidFill>
-            <a:srgbClr val="FFFFFF"/>
-          </a:solidFill>
-          <a:ln w="6350">
-            <a:solidFill>
-              <a:srgbClr val="CCD6E0"/>
-            </a:solidFill>
-          </a:ln>
-          <a:effectLst/>
-        </p:spPr>
-        <p:style>
-          <a:lnRef idx="1">
-            <a:schemeClr val="accent1"/>
-          </a:lnRef>
-          <a:fillRef idx="3">
-            <a:schemeClr val="accent1"/>
-          </a:fillRef>
-          <a:effectRef idx="2">
-            <a:schemeClr val="accent1"/>
-          </a:effectRef>
-          <a:fontRef idx="minor">
-            <a:schemeClr val="lt1"/>
-          </a:fontRef>
-        </p:style>
-        <p:txBody>
-          <a:bodyPr rtlCol="0" anchor="ctr"/>
-          <a:lstStyle/>
-          <a:p>
-            <a:pPr algn="ctr"/>
-          </a:p>
-        </p:txBody>
-      </p:sp>
-      <p:sp>
-        <p:nvSpPr>
-          <p:cNvPr id="49" name="TextBox 48"/>
-          <p:cNvSpPr txBox="1"/>
-          <p:nvPr/>
-        </p:nvSpPr>
-        <p:spPr>
-          <a:xfrm>
-            <a:off x="347472" y="4023359"/>
-            <a:ext cx="2395727" cy="310896"/>
-          </a:xfrm>
-          <a:prstGeom prst="rect">
-            <a:avLst/>
-          </a:prstGeom>
-          <a:noFill/>
-        </p:spPr>
-        <p:txBody>
-          <a:bodyPr wrap="square">
-            <a:spAutoFit/>
-          </a:bodyPr>
-          <a:lstStyle/>
-          <a:p>
-            <a:pPr algn="l"/>
-            <a:r>
-              <a:rPr sz="850" b="1" i="0">
-                <a:solidFill>
-                  <a:srgbClr val="1B2A4A"/>
-                </a:solidFill>
-              </a:rPr>
-              <a:t>E8/9  Migration &amp; Capability Uplift</a:t>
-            </a:r>
-          </a:p>
-        </p:txBody>
-      </p:sp>
-      <p:sp>
-        <p:nvSpPr>
-          <p:cNvPr id="50" name="TextBox 49"/>
-          <p:cNvSpPr txBox="1"/>
-          <p:nvPr/>
-        </p:nvSpPr>
-        <p:spPr>
-          <a:xfrm>
-            <a:off x="2999232" y="4023359"/>
-            <a:ext cx="3035808" cy="310896"/>
-          </a:xfrm>
-          <a:prstGeom prst="rect">
-            <a:avLst/>
-          </a:prstGeom>
-          <a:noFill/>
-        </p:spPr>
-        <p:txBody>
-          <a:bodyPr wrap="square">
-            <a:spAutoFit/>
-          </a:bodyPr>
-          <a:lstStyle/>
-          <a:p>
-            <a:pPr algn="l"/>
-            <a:r>
-              <a:rPr sz="850" b="0" i="0">
-                <a:solidFill>
-                  <a:srgbClr val="2C2C2C"/>
-                </a:solidFill>
-              </a:rPr>
-              <a:t>Migration pathways documented; WC engineers shadowing &amp; self-sufficient</a:t>
-            </a:r>
-          </a:p>
-        </p:txBody>
-      </p:sp>
-      <p:sp>
-        <p:nvSpPr>
-          <p:cNvPr id="51" name="TextBox 50"/>
-          <p:cNvSpPr txBox="1"/>
-          <p:nvPr/>
-        </p:nvSpPr>
-        <p:spPr>
-          <a:xfrm>
-            <a:off x="6291072" y="4023359"/>
-            <a:ext cx="2761488" cy="310896"/>
-          </a:xfrm>
-          <a:prstGeom prst="rect">
-            <a:avLst/>
-          </a:prstGeom>
-          <a:noFill/>
-        </p:spPr>
-        <p:txBody>
-          <a:bodyPr wrap="square">
-            <a:spAutoFit/>
-          </a:bodyPr>
-          <a:lstStyle/>
-          <a:p>
-            <a:pPr algn="l"/>
-            <a:r>
-              <a:rPr sz="850" b="0" i="0">
-                <a:solidFill>
-                  <a:srgbClr val="556B8A"/>
-                </a:solidFill>
-              </a:rPr>
-              <a:t>Lifecycle Guides  |  EA Vision</a:t>
-            </a:r>
-          </a:p>
-        </p:txBody>
-      </p:sp>
-      <p:sp>
-        <p:nvSpPr>
-          <p:cNvPr id="52" name="Rectangle 51"/>
-          <p:cNvSpPr/>
-          <p:nvPr/>
-        </p:nvSpPr>
-        <p:spPr>
-          <a:xfrm>
-            <a:off x="274320" y="6400800"/>
-            <a:ext cx="8595360" cy="182880"/>
-          </a:xfrm>
-          <a:prstGeom prst="rect">
-            <a:avLst/>
-          </a:prstGeom>
-          <a:solidFill>
-            <a:srgbClr val="006E8C"/>
-          </a:solidFill>
-          <a:ln>
-            <a:noFill/>
-          </a:ln>
-          <a:effectLst/>
-        </p:spPr>
-        <p:style>
-          <a:lnRef idx="1">
-            <a:schemeClr val="accent1"/>
-          </a:lnRef>
-          <a:fillRef idx="3">
-            <a:schemeClr val="accent1"/>
-          </a:fillRef>
-          <a:effectRef idx="2">
-            <a:schemeClr val="accent1"/>
-          </a:effectRef>
-          <a:fontRef idx="minor">
-            <a:schemeClr val="lt1"/>
-          </a:fontRef>
-        </p:style>
-        <p:txBody>
-          <a:bodyPr rtlCol="0" anchor="ctr"/>
-          <a:lstStyle/>
-          <a:p>
-            <a:pPr algn="ctr"/>
-          </a:p>
-        </p:txBody>
-      </p:sp>
-      <p:sp>
-        <p:nvSpPr>
-          <p:cNvPr id="53" name="TextBox 52"/>
-          <p:cNvSpPr txBox="1"/>
-          <p:nvPr/>
-        </p:nvSpPr>
-        <p:spPr>
-          <a:xfrm>
-            <a:off x="411480" y="6409944"/>
-            <a:ext cx="8321040" cy="164592"/>
-          </a:xfrm>
-          <a:prstGeom prst="rect">
-            <a:avLst/>
-          </a:prstGeom>
-          <a:noFill/>
-        </p:spPr>
-        <p:txBody>
-          <a:bodyPr wrap="square">
-            <a:spAutoFit/>
-          </a:bodyPr>
-          <a:lstStyle/>
-          <a:p>
-            <a:pPr algn="l"/>
-            <a:r>
-              <a:rPr sz="800" b="0" i="0">
-                <a:solidFill>
-                  <a:srgbClr val="FFFFFF"/>
-                </a:solidFill>
-              </a:rPr>
-              <a:t>Scope items S2–S23 each map to one or more epics. The full feature set (95 features) is traceable to architectural decisions already closed in the wiki.</a:t>
+              <a:t>WC team self-sufficient on EDAP — trained, certified, embedded in delivery, with endorsed governance frameworks for data products and AI</a:t>
             </a:r>
           </a:p>
         </p:txBody>
@@ -7987,7 +7723,6 @@
           <a:ln>
             <a:noFill/>
           </a:ln>
-          <a:effectLst/>
         </p:spPr>
         <p:style>
           <a:lnRef idx="1">
@@ -8013,75 +7748,7 @@
       </p:sp>
       <p:sp>
         <p:nvSpPr>
-          <p:cNvPr id="3" name="TextBox 2"/>
-          <p:cNvSpPr txBox="1"/>
-          <p:nvPr/>
-        </p:nvSpPr>
-        <p:spPr>
-          <a:xfrm>
-            <a:off x="274320" y="109728"/>
-            <a:ext cx="8229600" cy="502920"/>
-          </a:xfrm>
-          <a:prstGeom prst="rect">
-            <a:avLst/>
-          </a:prstGeom>
-          <a:noFill/>
-        </p:spPr>
-        <p:txBody>
-          <a:bodyPr wrap="square">
-            <a:spAutoFit/>
-          </a:bodyPr>
-          <a:lstStyle/>
-          <a:p>
-            <a:pPr algn="l"/>
-            <a:r>
-              <a:rPr sz="2200" b="1" i="0">
-                <a:solidFill>
-                  <a:srgbClr val="FFFFFF"/>
-                </a:solidFill>
-              </a:rPr>
-              <a:t>How We Know It's Working</a:t>
-            </a:r>
-          </a:p>
-        </p:txBody>
-      </p:sp>
-      <p:sp>
-        <p:nvSpPr>
-          <p:cNvPr id="4" name="TextBox 3"/>
-          <p:cNvSpPr txBox="1"/>
-          <p:nvPr/>
-        </p:nvSpPr>
-        <p:spPr>
-          <a:xfrm>
-            <a:off x="274320" y="621792"/>
-            <a:ext cx="8229600" cy="347472"/>
-          </a:xfrm>
-          <a:prstGeom prst="rect">
-            <a:avLst/>
-          </a:prstGeom>
-          <a:noFill/>
-        </p:spPr>
-        <p:txBody>
-          <a:bodyPr wrap="square">
-            <a:spAutoFit/>
-          </a:bodyPr>
-          <a:lstStyle/>
-          <a:p>
-            <a:pPr algn="l"/>
-            <a:r>
-              <a:rPr sz="1100" b="0" i="0">
-                <a:solidFill>
-                  <a:srgbClr val="B0C8E0"/>
-                </a:solidFill>
-              </a:rPr>
-              <a:t>Success measures, risks, and the conditions for a self-sustaining platform</a:t>
-            </a:r>
-          </a:p>
-        </p:txBody>
-      </p:sp>
-      <p:sp>
-        <p:nvSpPr>
-          <p:cNvPr id="5" name="Rectangle 4"/>
+          <p:cNvPr id="3" name="Rectangle 2"/>
           <p:cNvSpPr/>
           <p:nvPr/>
         </p:nvSpPr>
@@ -8099,7 +7766,6 @@
           <a:ln>
             <a:noFill/>
           </a:ln>
-          <a:effectLst/>
         </p:spPr>
         <p:style>
           <a:lnRef idx="1">
@@ -8125,7 +7791,7 @@
       </p:sp>
       <p:sp>
         <p:nvSpPr>
-          <p:cNvPr id="6" name="Rectangle 5"/>
+          <p:cNvPr id="4" name="Rectangle 3"/>
           <p:cNvSpPr/>
           <p:nvPr/>
         </p:nvSpPr>
@@ -8143,7 +7809,6 @@
           <a:ln>
             <a:noFill/>
           </a:ln>
-          <a:effectLst/>
         </p:spPr>
         <p:style>
           <a:lnRef idx="1">
@@ -8169,14 +7834,14 @@
       </p:sp>
       <p:sp>
         <p:nvSpPr>
-          <p:cNvPr id="7" name="TextBox 6"/>
+          <p:cNvPr id="5" name="TextBox 4"/>
           <p:cNvSpPr txBox="1"/>
           <p:nvPr/>
         </p:nvSpPr>
         <p:spPr>
           <a:xfrm>
-            <a:off x="274320" y="6638544"/>
-            <a:ext cx="6400800" cy="201168"/>
+            <a:off x="274320" y="109728"/>
+            <a:ext cx="8595360" cy="503000"/>
           </a:xfrm>
           <a:prstGeom prst="rect">
             <a:avLst/>
@@ -8191,26 +7856,26 @@
           <a:p>
             <a:pPr algn="l"/>
             <a:r>
-              <a:rPr sz="800" b="0" i="0">
-                <a:solidFill>
-                  <a:srgbClr val="B0C8E0"/>
-                </a:solidFill>
-              </a:rPr>
-              <a:t>Water Corporation  |  EDAP Programme  |  March 2026</a:t>
-            </a:r>
-          </a:p>
-        </p:txBody>
-      </p:sp>
-      <p:sp>
-        <p:nvSpPr>
-          <p:cNvPr id="8" name="TextBox 7"/>
+              <a:rPr sz="2200" b="1" i="0">
+                <a:solidFill>
+                  <a:srgbClr val="FFFFFF"/>
+                </a:solidFill>
+              </a:rPr>
+              <a:t>Project Outcomes — Supporting the Strategic Vision</a:t>
+            </a:r>
+          </a:p>
+        </p:txBody>
+      </p:sp>
+      <p:sp>
+        <p:nvSpPr>
+          <p:cNvPr id="6" name="TextBox 5"/>
           <p:cNvSpPr txBox="1"/>
           <p:nvPr/>
         </p:nvSpPr>
         <p:spPr>
           <a:xfrm>
-            <a:off x="8503920" y="6638544"/>
-            <a:ext cx="548640" cy="201168"/>
+            <a:off x="274320" y="619000"/>
+            <a:ext cx="8595360" cy="380000"/>
           </a:xfrm>
           <a:prstGeom prst="rect">
             <a:avLst/>
@@ -8223,28 +7888,28 @@
           </a:bodyPr>
           <a:lstStyle/>
           <a:p>
-            <a:pPr algn="r"/>
-            <a:r>
-              <a:rPr sz="800" b="0" i="0">
+            <a:pPr algn="l"/>
+            <a:r>
+              <a:rPr sz="1100" b="0" i="0">
                 <a:solidFill>
                   <a:srgbClr val="B0C8E0"/>
                 </a:solidFill>
               </a:rPr>
-              <a:t>4 / 4</a:t>
-            </a:r>
-          </a:p>
-        </p:txBody>
-      </p:sp>
-      <p:sp>
-        <p:nvSpPr>
-          <p:cNvPr id="9" name="TextBox 8"/>
+              <a:t>How this project’s deliverables connect to each of the five strategic themes</a:t>
+            </a:r>
+          </a:p>
+        </p:txBody>
+      </p:sp>
+      <p:sp>
+        <p:nvSpPr>
+          <p:cNvPr id="7" name="TextBox 6"/>
           <p:cNvSpPr txBox="1"/>
           <p:nvPr/>
         </p:nvSpPr>
         <p:spPr>
           <a:xfrm>
-            <a:off x="274320" y="1207008"/>
-            <a:ext cx="8595360" cy="347472"/>
+            <a:off x="274320" y="6674400"/>
+            <a:ext cx="6858000" cy="180000"/>
           </a:xfrm>
           <a:prstGeom prst="rect">
             <a:avLst/>
@@ -8259,12 +7924,80 @@
           <a:p>
             <a:pPr algn="l"/>
             <a:r>
-              <a:rPr sz="1050" b="0" i="0">
+              <a:rPr sz="800" b="0" i="0">
+                <a:solidFill>
+                  <a:srgbClr val="B0C8E0"/>
+                </a:solidFill>
+              </a:rPr>
+              <a:t>Water Corporation  |  EDAP Programme  |  March 2026</a:t>
+            </a:r>
+          </a:p>
+        </p:txBody>
+      </p:sp>
+      <p:sp>
+        <p:nvSpPr>
+          <p:cNvPr id="8" name="TextBox 7"/>
+          <p:cNvSpPr txBox="1"/>
+          <p:nvPr/>
+        </p:nvSpPr>
+        <p:spPr>
+          <a:xfrm>
+            <a:off x="8319680" y="6674400"/>
+            <a:ext cx="550000" cy="180000"/>
+          </a:xfrm>
+          <a:prstGeom prst="rect">
+            <a:avLst/>
+          </a:prstGeom>
+          <a:noFill/>
+        </p:spPr>
+        <p:txBody>
+          <a:bodyPr wrap="square">
+            <a:spAutoFit/>
+          </a:bodyPr>
+          <a:lstStyle/>
+          <a:p>
+            <a:pPr algn="r"/>
+            <a:r>
+              <a:rPr sz="800" b="0" i="0">
+                <a:solidFill>
+                  <a:srgbClr val="B0C8E0"/>
+                </a:solidFill>
+              </a:rPr>
+              <a:t>4 / 4</a:t>
+            </a:r>
+          </a:p>
+        </p:txBody>
+      </p:sp>
+      <p:sp>
+        <p:nvSpPr>
+          <p:cNvPr id="9" name="TextBox 8"/>
+          <p:cNvSpPr txBox="1"/>
+          <p:nvPr/>
+        </p:nvSpPr>
+        <p:spPr>
+          <a:xfrm>
+            <a:off x="274320" y="1196424"/>
+            <a:ext cx="8595360" cy="260000"/>
+          </a:xfrm>
+          <a:prstGeom prst="rect">
+            <a:avLst/>
+          </a:prstGeom>
+          <a:noFill/>
+        </p:spPr>
+        <p:txBody>
+          <a:bodyPr wrap="square">
+            <a:spAutoFit/>
+          </a:bodyPr>
+          <a:lstStyle/>
+          <a:p>
+            <a:pPr algn="l"/>
+            <a:r>
+              <a:rPr sz="1050" b="0" i="1">
                 <a:solidFill>
                   <a:srgbClr val="2C2C2C"/>
                 </a:solidFill>
               </a:rPr>
-              <a:t>The wikis define what 'done' looks like. The delivery scope is the path to get there. These measures confirm the architecture is landing — not just deployed.</a:t>
+              <a:t>Each outcome is traceable to a scope item and an epic. Together they confirm EDAP has landed — not just been deployed.</a:t>
             </a:r>
           </a:p>
         </p:txBody>
@@ -8277,8 +8010,8 @@
         </p:nvSpPr>
         <p:spPr>
           <a:xfrm>
-            <a:off x="274320" y="1664208"/>
-            <a:ext cx="4160520" cy="1920240"/>
+            <a:off x="274320" y="1476424"/>
+            <a:ext cx="8595360" cy="950000"/>
           </a:xfrm>
           <a:prstGeom prst="rect">
             <a:avLst/>
@@ -8288,10 +8021,9 @@
           </a:solidFill>
           <a:ln w="9525">
             <a:solidFill>
-              <a:srgbClr val="CCD6E0"/>
+              <a:srgbClr val="006E8C"/>
             </a:solidFill>
           </a:ln>
-          <a:effectLst/>
         </p:spPr>
         <p:style>
           <a:lnRef idx="1">
@@ -8317,59 +8049,24 @@
       </p:sp>
       <p:sp>
         <p:nvSpPr>
-          <p:cNvPr id="11" name="TextBox 10"/>
-          <p:cNvSpPr txBox="1"/>
-          <p:nvPr/>
-        </p:nvSpPr>
-        <p:spPr>
-          <a:xfrm>
-            <a:off x="384048" y="1737360"/>
-            <a:ext cx="3977639" cy="256032"/>
-          </a:xfrm>
-          <a:prstGeom prst="rect">
-            <a:avLst/>
-          </a:prstGeom>
-          <a:noFill/>
-        </p:spPr>
-        <p:txBody>
-          <a:bodyPr wrap="square">
-            <a:spAutoFit/>
-          </a:bodyPr>
-          <a:lstStyle/>
-          <a:p>
-            <a:pPr algn="l"/>
-            <a:r>
-              <a:rPr sz="1000" b="1" i="0">
-                <a:solidFill>
-                  <a:srgbClr val="006E8C"/>
-                </a:solidFill>
-              </a:rPr>
-              <a:t>Single Source of Truth</a:t>
-            </a:r>
-          </a:p>
-        </p:txBody>
-      </p:sp>
-      <p:sp>
-        <p:nvSpPr>
-          <p:cNvPr id="12" name="Rectangle 11"/>
+          <p:cNvPr id="11" name="Rectangle 10"/>
           <p:cNvSpPr/>
           <p:nvPr/>
         </p:nvSpPr>
         <p:spPr>
           <a:xfrm>
-            <a:off x="384048" y="1993392"/>
-            <a:ext cx="3941063" cy="22860"/>
+            <a:off x="274320" y="1476424"/>
+            <a:ext cx="1640000" cy="950000"/>
           </a:xfrm>
           <a:prstGeom prst="rect">
             <a:avLst/>
           </a:prstGeom>
           <a:solidFill>
-            <a:srgbClr val="006E8C"/>
+            <a:srgbClr val="1B2A4A"/>
           </a:solidFill>
           <a:ln>
             <a:noFill/>
           </a:ln>
-          <a:effectLst/>
         </p:spPr>
         <p:style>
           <a:lnRef idx="1">
@@ -8395,14 +8092,14 @@
       </p:sp>
       <p:sp>
         <p:nvSpPr>
-          <p:cNvPr id="13" name="TextBox 12"/>
+          <p:cNvPr id="12" name="TextBox 11"/>
           <p:cNvSpPr txBox="1"/>
           <p:nvPr/>
         </p:nvSpPr>
         <p:spPr>
           <a:xfrm>
-            <a:off x="384048" y="2048256"/>
-            <a:ext cx="3941063" cy="1417320"/>
+            <a:off x="384048" y="1542260"/>
+            <a:ext cx="1420544" cy="818327"/>
           </a:xfrm>
           <a:prstGeom prst="rect">
             <a:avLst/>
@@ -8415,48 +8112,114 @@
           </a:bodyPr>
           <a:lstStyle/>
           <a:p>
-            <a:pPr>
+            <a:pPr algn="l"/>
+            <a:r>
+              <a:rPr sz="1050" b="1" i="0">
+                <a:solidFill>
+                  <a:srgbClr val="FFFFFF"/>
+                </a:solidFill>
+              </a:rPr>
+              <a:t>Trusted Data</a:t>
+            </a:r>
+          </a:p>
+          <a:p>
+            <a:pPr algn="l"/>
+            <a:r>
+              <a:rPr sz="1050" b="1" i="0">
+                <a:solidFill>
+                  <a:srgbClr val="FFFFFF"/>
+                </a:solidFill>
+              </a:rPr>
+              <a:t>Foundation</a:t>
+            </a:r>
+          </a:p>
+          <a:p>
+            <a:pPr algn="l">
               <a:spcBef>
-                <a:spcPts val="200"/>
+                <a:spcPts val="500"/>
               </a:spcBef>
             </a:pPr>
             <a:r>
-              <a:rPr sz="950">
+              <a:rPr sz="850" b="0" i="0">
+                <a:solidFill>
+                  <a:srgbClr val="006E8C"/>
+                </a:solidFill>
+              </a:rPr>
+              <a:t>Epics: E1 · E2 · E3</a:t>
+            </a:r>
+          </a:p>
+        </p:txBody>
+      </p:sp>
+      <p:sp>
+        <p:nvSpPr>
+          <p:cNvPr id="13" name="TextBox 12"/>
+          <p:cNvSpPr txBox="1"/>
+          <p:nvPr/>
+        </p:nvSpPr>
+        <p:spPr>
+          <a:xfrm>
+            <a:off x="2024048" y="1542260"/>
+            <a:ext cx="6735904" cy="818327"/>
+          </a:xfrm>
+          <a:prstGeom prst="rect">
+            <a:avLst/>
+          </a:prstGeom>
+          <a:noFill/>
+        </p:spPr>
+        <p:txBody>
+          <a:bodyPr wrap="square">
+            <a:spAutoFit/>
+          </a:bodyPr>
+          <a:lstStyle/>
+          <a:p>
+            <a:pPr algn="l">
+              <a:spcAft>
+                <a:spcPts val="300"/>
+              </a:spcAft>
+            </a:pPr>
+            <a:r>
+              <a:rPr sz="900" b="0" i="0">
                 <a:solidFill>
                   <a:srgbClr val="2C2C2C"/>
                 </a:solidFill>
               </a:rPr>
-              <a:t>• Any authorised user can find, understand, and access any data asset</a:t>
-            </a:r>
-          </a:p>
-          <a:p>
-            <a:pPr>
+              <a:t>•  Databricks lakehouse across Dev / Test / Prod with Unity Catalog metastore and domain-isolated catalogues</a:t>
+            </a:r>
+          </a:p>
+          <a:p>
+            <a:pPr algn="l">
               <a:spcBef>
-                <a:spcPts val="200"/>
+                <a:spcPts val="400"/>
               </a:spcBef>
+              <a:spcAft>
+                <a:spcPts val="300"/>
+              </a:spcAft>
             </a:pPr>
             <a:r>
-              <a:rPr sz="950">
+              <a:rPr sz="900" b="0" i="0">
                 <a:solidFill>
                   <a:srgbClr val="2C2C2C"/>
                 </a:solidFill>
               </a:rPr>
-              <a:t>• Alation + Unity Catalog show consistent lineage end-to-end</a:t>
-            </a:r>
-          </a:p>
-          <a:p>
-            <a:pPr>
+              <a:t>•  Metadata-driven ingestion framework: configuration-based onboarding for batch, CDC, streaming, and file sources</a:t>
+            </a:r>
+          </a:p>
+          <a:p>
+            <a:pPr algn="l">
               <a:spcBef>
-                <a:spcPts val="200"/>
+                <a:spcPts val="400"/>
               </a:spcBef>
+              <a:spcAft>
+                <a:spcPts val="300"/>
+              </a:spcAft>
             </a:pPr>
             <a:r>
-              <a:rPr sz="950">
+              <a:rPr sz="900" b="0" i="0">
                 <a:solidFill>
                   <a:srgbClr val="2C2C2C"/>
                 </a:solidFill>
               </a:rPr>
-              <a:t>• No parallel pipelines serving the same domain</a:t>
+              <a:t>•  Business-ready dimensional models in Gold layer with contractual quality guarantees and automated SLA tracking</a:t>
             </a:r>
           </a:p>
         </p:txBody>
@@ -8469,8 +8232,8 @@
         </p:nvSpPr>
         <p:spPr>
           <a:xfrm>
-            <a:off x="4526279" y="1664208"/>
-            <a:ext cx="4160520" cy="1920240"/>
+            <a:off x="274320" y="2471424"/>
+            <a:ext cx="8595360" cy="950000"/>
           </a:xfrm>
           <a:prstGeom prst="rect">
             <a:avLst/>
@@ -8480,10 +8243,9 @@
           </a:solidFill>
           <a:ln w="9525">
             <a:solidFill>
-              <a:srgbClr val="CCD6E0"/>
+              <a:srgbClr val="006E8C"/>
             </a:solidFill>
           </a:ln>
-          <a:effectLst/>
         </p:spPr>
         <p:style>
           <a:lnRef idx="1">
@@ -8509,59 +8271,24 @@
       </p:sp>
       <p:sp>
         <p:nvSpPr>
-          <p:cNvPr id="15" name="TextBox 14"/>
-          <p:cNvSpPr txBox="1"/>
-          <p:nvPr/>
-        </p:nvSpPr>
-        <p:spPr>
-          <a:xfrm>
-            <a:off x="4636007" y="1737360"/>
-            <a:ext cx="3977639" cy="256032"/>
-          </a:xfrm>
-          <a:prstGeom prst="rect">
-            <a:avLst/>
-          </a:prstGeom>
-          <a:noFill/>
-        </p:spPr>
-        <p:txBody>
-          <a:bodyPr wrap="square">
-            <a:spAutoFit/>
-          </a:bodyPr>
-          <a:lstStyle/>
-          <a:p>
-            <a:pPr algn="l"/>
-            <a:r>
-              <a:rPr sz="1000" b="1" i="0">
-                <a:solidFill>
-                  <a:srgbClr val="006E8C"/>
-                </a:solidFill>
-              </a:rPr>
-              <a:t>Compliance by Design</a:t>
-            </a:r>
-          </a:p>
-        </p:txBody>
-      </p:sp>
-      <p:sp>
-        <p:nvSpPr>
-          <p:cNvPr id="16" name="Rectangle 15"/>
+          <p:cNvPr id="15" name="Rectangle 14"/>
           <p:cNvSpPr/>
           <p:nvPr/>
         </p:nvSpPr>
         <p:spPr>
           <a:xfrm>
-            <a:off x="4636007" y="1993392"/>
-            <a:ext cx="3941063" cy="22860"/>
+            <a:off x="274320" y="2471424"/>
+            <a:ext cx="1640000" cy="950000"/>
           </a:xfrm>
           <a:prstGeom prst="rect">
             <a:avLst/>
           </a:prstGeom>
           <a:solidFill>
-            <a:srgbClr val="006E8C"/>
+            <a:srgbClr val="1B2A4A"/>
           </a:solidFill>
           <a:ln>
             <a:noFill/>
           </a:ln>
-          <a:effectLst/>
         </p:spPr>
         <p:style>
           <a:lnRef idx="1">
@@ -8587,14 +8314,14 @@
       </p:sp>
       <p:sp>
         <p:nvSpPr>
-          <p:cNvPr id="17" name="TextBox 16"/>
+          <p:cNvPr id="16" name="TextBox 15"/>
           <p:cNvSpPr txBox="1"/>
           <p:nvPr/>
         </p:nvSpPr>
         <p:spPr>
           <a:xfrm>
-            <a:off x="4636007" y="2048256"/>
-            <a:ext cx="3941063" cy="1417320"/>
+            <a:off x="384048" y="2537260"/>
+            <a:ext cx="1420544" cy="818327"/>
           </a:xfrm>
           <a:prstGeom prst="rect">
             <a:avLst/>
@@ -8607,48 +8334,114 @@
           </a:bodyPr>
           <a:lstStyle/>
           <a:p>
-            <a:pPr>
+            <a:pPr algn="l"/>
+            <a:r>
+              <a:rPr sz="1050" b="1" i="0">
+                <a:solidFill>
+                  <a:srgbClr val="FFFFFF"/>
+                </a:solidFill>
+              </a:rPr>
+              <a:t>Compliance</a:t>
+            </a:r>
+          </a:p>
+          <a:p>
+            <a:pPr algn="l"/>
+            <a:r>
+              <a:rPr sz="1050" b="1" i="0">
+                <a:solidFill>
+                  <a:srgbClr val="FFFFFF"/>
+                </a:solidFill>
+              </a:rPr>
+              <a:t>by Design</a:t>
+            </a:r>
+          </a:p>
+          <a:p>
+            <a:pPr algn="l">
               <a:spcBef>
-                <a:spcPts val="200"/>
+                <a:spcPts val="500"/>
               </a:spcBef>
             </a:pPr>
             <a:r>
-              <a:rPr sz="950">
+              <a:rPr sz="850" b="0" i="0">
+                <a:solidFill>
+                  <a:srgbClr val="006E8C"/>
+                </a:solidFill>
+              </a:rPr>
+              <a:t>Epics: E4</a:t>
+            </a:r>
+          </a:p>
+        </p:txBody>
+      </p:sp>
+      <p:sp>
+        <p:nvSpPr>
+          <p:cNvPr id="17" name="TextBox 16"/>
+          <p:cNvSpPr txBox="1"/>
+          <p:nvPr/>
+        </p:nvSpPr>
+        <p:spPr>
+          <a:xfrm>
+            <a:off x="2024048" y="2537260"/>
+            <a:ext cx="6735904" cy="818327"/>
+          </a:xfrm>
+          <a:prstGeom prst="rect">
+            <a:avLst/>
+          </a:prstGeom>
+          <a:noFill/>
+        </p:spPr>
+        <p:txBody>
+          <a:bodyPr wrap="square">
+            <a:spAutoFit/>
+          </a:bodyPr>
+          <a:lstStyle/>
+          <a:p>
+            <a:pPr algn="l">
+              <a:spcAft>
+                <a:spcPts val="300"/>
+              </a:spcAft>
+            </a:pPr>
+            <a:r>
+              <a:rPr sz="900" b="0" i="0">
                 <a:solidFill>
                   <a:srgbClr val="2C2C2C"/>
                 </a:solidFill>
               </a:rPr>
-              <a:t>• PRIS Act audit satisfiable from Unity Catalog system tables</a:t>
-            </a:r>
-          </a:p>
-          <a:p>
-            <a:pPr>
+              <a:t>•  4-layer tagging model live: WAICP classification → sensitivity reason → access handling → operational metadata</a:t>
+            </a:r>
+          </a:p>
+          <a:p>
+            <a:pPr algn="l">
               <a:spcBef>
-                <a:spcPts val="200"/>
+                <a:spcPts val="400"/>
               </a:spcBef>
+              <a:spcAft>
+                <a:spcPts val="300"/>
+              </a:spcAft>
             </a:pPr>
             <a:r>
-              <a:rPr sz="950">
+              <a:rPr sz="900" b="0" i="0">
                 <a:solidFill>
                   <a:srgbClr val="2C2C2C"/>
                 </a:solidFill>
               </a:rPr>
-              <a:t>• All PI columns masked or anonymised at Bronze → Silver boundary</a:t>
-            </a:r>
-          </a:p>
-          <a:p>
-            <a:pPr>
+              <a:t>•  Alation–Unity Catalog bidirectional sync: steward classifications automatically enforce ABAC policies in Databricks</a:t>
+            </a:r>
+          </a:p>
+          <a:p>
+            <a:pPr algn="l">
               <a:spcBef>
-                <a:spcPts val="200"/>
+                <a:spcPts val="400"/>
               </a:spcBef>
+              <a:spcAft>
+                <a:spcPts val="300"/>
+              </a:spcAft>
             </a:pPr>
             <a:r>
-              <a:rPr sz="950">
+              <a:rPr sz="900" b="0" i="0">
                 <a:solidFill>
                   <a:srgbClr val="2C2C2C"/>
                 </a:solidFill>
               </a:rPr>
-              <a:t>• SOCI controls evidenced without manual intervention</a:t>
+              <a:t>•  PRIS / SOCI / State Records compliance demonstrable on demand from Unity Catalog system tables</a:t>
             </a:r>
           </a:p>
         </p:txBody>
@@ -8661,8 +8454,8 @@
         </p:nvSpPr>
         <p:spPr>
           <a:xfrm>
-            <a:off x="274320" y="3694176"/>
-            <a:ext cx="4160520" cy="1920240"/>
+            <a:off x="274320" y="3466424"/>
+            <a:ext cx="8595360" cy="720000"/>
           </a:xfrm>
           <a:prstGeom prst="rect">
             <a:avLst/>
@@ -8672,10 +8465,9 @@
           </a:solidFill>
           <a:ln w="9525">
             <a:solidFill>
-              <a:srgbClr val="CCD6E0"/>
+              <a:srgbClr val="006E8C"/>
             </a:solidFill>
           </a:ln>
-          <a:effectLst/>
         </p:spPr>
         <p:style>
           <a:lnRef idx="1">
@@ -8701,59 +8493,24 @@
       </p:sp>
       <p:sp>
         <p:nvSpPr>
-          <p:cNvPr id="19" name="TextBox 18"/>
-          <p:cNvSpPr txBox="1"/>
-          <p:nvPr/>
-        </p:nvSpPr>
-        <p:spPr>
-          <a:xfrm>
-            <a:off x="384048" y="3767328"/>
-            <a:ext cx="3977639" cy="256032"/>
-          </a:xfrm>
-          <a:prstGeom prst="rect">
-            <a:avLst/>
-          </a:prstGeom>
-          <a:noFill/>
-        </p:spPr>
-        <p:txBody>
-          <a:bodyPr wrap="square">
-            <a:spAutoFit/>
-          </a:bodyPr>
-          <a:lstStyle/>
-          <a:p>
-            <a:pPr algn="l"/>
-            <a:r>
-              <a:rPr sz="1000" b="1" i="0">
-                <a:solidFill>
-                  <a:srgbClr val="006E8C"/>
-                </a:solidFill>
-              </a:rPr>
-              <a:t>Speed &amp; Self-Service</a:t>
-            </a:r>
-          </a:p>
-        </p:txBody>
-      </p:sp>
-      <p:sp>
-        <p:nvSpPr>
-          <p:cNvPr id="20" name="Rectangle 19"/>
+          <p:cNvPr id="19" name="Rectangle 18"/>
           <p:cNvSpPr/>
           <p:nvPr/>
         </p:nvSpPr>
         <p:spPr>
           <a:xfrm>
-            <a:off x="384048" y="4023360"/>
-            <a:ext cx="3941063" cy="22860"/>
+            <a:off x="274320" y="3466424"/>
+            <a:ext cx="1640000" cy="720000"/>
           </a:xfrm>
           <a:prstGeom prst="rect">
             <a:avLst/>
           </a:prstGeom>
           <a:solidFill>
-            <a:srgbClr val="006E8C"/>
+            <a:srgbClr val="1B2A4A"/>
           </a:solidFill>
           <a:ln>
             <a:noFill/>
           </a:ln>
-          <a:effectLst/>
         </p:spPr>
         <p:style>
           <a:lnRef idx="1">
@@ -8779,14 +8536,14 @@
       </p:sp>
       <p:sp>
         <p:nvSpPr>
-          <p:cNvPr id="21" name="TextBox 20"/>
+          <p:cNvPr id="20" name="TextBox 19"/>
           <p:cNvSpPr txBox="1"/>
           <p:nvPr/>
         </p:nvSpPr>
         <p:spPr>
           <a:xfrm>
-            <a:off x="384048" y="4078224"/>
-            <a:ext cx="3941063" cy="1417320"/>
+            <a:off x="384048" y="3532260"/>
+            <a:ext cx="1420544" cy="588327"/>
           </a:xfrm>
           <a:prstGeom prst="rect">
             <a:avLst/>
@@ -8799,48 +8556,96 @@
           </a:bodyPr>
           <a:lstStyle/>
           <a:p>
-            <a:pPr>
+            <a:pPr algn="l"/>
+            <a:r>
+              <a:rPr sz="1050" b="1" i="0">
+                <a:solidFill>
+                  <a:srgbClr val="FFFFFF"/>
+                </a:solidFill>
+              </a:rPr>
+              <a:t>Discoverable</a:t>
+            </a:r>
+          </a:p>
+          <a:p>
+            <a:pPr algn="l"/>
+            <a:r>
+              <a:rPr sz="1050" b="1" i="0">
+                <a:solidFill>
+                  <a:srgbClr val="FFFFFF"/>
+                </a:solidFill>
+              </a:rPr>
+              <a:t>and Liquid Data</a:t>
+            </a:r>
+          </a:p>
+          <a:p>
+            <a:pPr algn="l">
               <a:spcBef>
-                <a:spcPts val="200"/>
+                <a:spcPts val="500"/>
               </a:spcBef>
             </a:pPr>
             <a:r>
-              <a:rPr sz="950">
+              <a:rPr sz="850" b="0" i="0">
+                <a:solidFill>
+                  <a:srgbClr val="006E8C"/>
+                </a:solidFill>
+              </a:rPr>
+              <a:t>Epics: E3 · E6</a:t>
+            </a:r>
+          </a:p>
+        </p:txBody>
+      </p:sp>
+      <p:sp>
+        <p:nvSpPr>
+          <p:cNvPr id="21" name="TextBox 20"/>
+          <p:cNvSpPr txBox="1"/>
+          <p:nvPr/>
+        </p:nvSpPr>
+        <p:spPr>
+          <a:xfrm>
+            <a:off x="2024048" y="3532260"/>
+            <a:ext cx="6735904" cy="588327"/>
+          </a:xfrm>
+          <a:prstGeom prst="rect">
+            <a:avLst/>
+          </a:prstGeom>
+          <a:noFill/>
+        </p:spPr>
+        <p:txBody>
+          <a:bodyPr wrap="square">
+            <a:spAutoFit/>
+          </a:bodyPr>
+          <a:lstStyle/>
+          <a:p>
+            <a:pPr algn="l">
+              <a:spcAft>
+                <a:spcPts val="300"/>
+              </a:spcAft>
+            </a:pPr>
+            <a:r>
+              <a:rPr sz="900" b="0" i="0">
                 <a:solidFill>
                   <a:srgbClr val="2C2C2C"/>
                 </a:solidFill>
               </a:rPr>
-              <a:t>• New source system onboarded in days via configuration (not code)</a:t>
-            </a:r>
-          </a:p>
-          <a:p>
-            <a:pPr>
+              <a:t>•  Every EDAP asset discoverable in Alation with full end-to-end lineage from source system through to Gold</a:t>
+            </a:r>
+          </a:p>
+          <a:p>
+            <a:pPr algn="l">
               <a:spcBef>
-                <a:spcPts val="200"/>
+                <a:spcPts val="400"/>
               </a:spcBef>
+              <a:spcAft>
+                <a:spcPts val="300"/>
+              </a:spcAft>
             </a:pPr>
             <a:r>
-              <a:rPr sz="950">
+              <a:rPr sz="900" b="0" i="0">
                 <a:solidFill>
                   <a:srgbClr val="2C2C2C"/>
                 </a:solidFill>
               </a:rPr>
-              <a:t>• Domain teams run their own pipelines without platform team tickets</a:t>
-            </a:r>
-          </a:p>
-          <a:p>
-            <a:pPr>
-              <a:spcBef>
-                <a:spcPts val="200"/>
-              </a:spcBef>
-            </a:pPr>
-            <a:r>
-              <a:rPr sz="950">
-                <a:solidFill>
-                  <a:srgbClr val="2C2C2C"/>
-                </a:solidFill>
-              </a:rPr>
-              <a:t>• Non-prod compute cost ≤10% of production</a:t>
+              <a:t>•  Metadata current automatically via OCF connector; stewardship workflows operational with clear accountability</a:t>
             </a:r>
           </a:p>
         </p:txBody>
@@ -8853,8 +8658,8 @@
         </p:nvSpPr>
         <p:spPr>
           <a:xfrm>
-            <a:off x="4526279" y="3694176"/>
-            <a:ext cx="4160520" cy="1920240"/>
+            <a:off x="274320" y="4231424"/>
+            <a:ext cx="8595360" cy="720000"/>
           </a:xfrm>
           <a:prstGeom prst="rect">
             <a:avLst/>
@@ -8864,10 +8669,9 @@
           </a:solidFill>
           <a:ln w="9525">
             <a:solidFill>
-              <a:srgbClr val="CCD6E0"/>
+              <a:srgbClr val="006E8C"/>
             </a:solidFill>
           </a:ln>
-          <a:effectLst/>
         </p:spPr>
         <p:style>
           <a:lnRef idx="1">
@@ -8893,59 +8697,24 @@
       </p:sp>
       <p:sp>
         <p:nvSpPr>
-          <p:cNvPr id="23" name="TextBox 22"/>
-          <p:cNvSpPr txBox="1"/>
-          <p:nvPr/>
-        </p:nvSpPr>
-        <p:spPr>
-          <a:xfrm>
-            <a:off x="4636007" y="3767328"/>
-            <a:ext cx="3977639" cy="256032"/>
-          </a:xfrm>
-          <a:prstGeom prst="rect">
-            <a:avLst/>
-          </a:prstGeom>
-          <a:noFill/>
-        </p:spPr>
-        <p:txBody>
-          <a:bodyPr wrap="square">
-            <a:spAutoFit/>
-          </a:bodyPr>
-          <a:lstStyle/>
-          <a:p>
-            <a:pPr algn="l"/>
-            <a:r>
-              <a:rPr sz="1000" b="1" i="0">
-                <a:solidFill>
-                  <a:srgbClr val="006E8C"/>
-                </a:solidFill>
-              </a:rPr>
-              <a:t>Trustworthy AI</a:t>
-            </a:r>
-          </a:p>
-        </p:txBody>
-      </p:sp>
-      <p:sp>
-        <p:nvSpPr>
-          <p:cNvPr id="24" name="Rectangle 23"/>
+          <p:cNvPr id="23" name="Rectangle 22"/>
           <p:cNvSpPr/>
           <p:nvPr/>
         </p:nvSpPr>
         <p:spPr>
           <a:xfrm>
-            <a:off x="4636007" y="4023360"/>
-            <a:ext cx="3941063" cy="22860"/>
+            <a:off x="274320" y="4231424"/>
+            <a:ext cx="1640000" cy="720000"/>
           </a:xfrm>
           <a:prstGeom prst="rect">
             <a:avLst/>
           </a:prstGeom>
           <a:solidFill>
-            <a:srgbClr val="006E8C"/>
+            <a:srgbClr val="1B2A4A"/>
           </a:solidFill>
           <a:ln>
             <a:noFill/>
           </a:ln>
-          <a:effectLst/>
         </p:spPr>
         <p:style>
           <a:lnRef idx="1">
@@ -8971,14 +8740,14 @@
       </p:sp>
       <p:sp>
         <p:nvSpPr>
-          <p:cNvPr id="25" name="TextBox 24"/>
+          <p:cNvPr id="24" name="TextBox 23"/>
           <p:cNvSpPr txBox="1"/>
           <p:nvPr/>
         </p:nvSpPr>
         <p:spPr>
           <a:xfrm>
-            <a:off x="4636007" y="4078224"/>
-            <a:ext cx="3941063" cy="1417320"/>
+            <a:off x="384048" y="4297260"/>
+            <a:ext cx="1420544" cy="588327"/>
           </a:xfrm>
           <a:prstGeom prst="rect">
             <a:avLst/>
@@ -8991,48 +8760,96 @@
           </a:bodyPr>
           <a:lstStyle/>
           <a:p>
-            <a:pPr>
+            <a:pPr algn="l"/>
+            <a:r>
+              <a:rPr sz="1050" b="1" i="0">
+                <a:solidFill>
+                  <a:srgbClr val="FFFFFF"/>
+                </a:solidFill>
+              </a:rPr>
+              <a:t>Intelligence</a:t>
+            </a:r>
+          </a:p>
+          <a:p>
+            <a:pPr algn="l"/>
+            <a:r>
+              <a:rPr sz="1050" b="1" i="0">
+                <a:solidFill>
+                  <a:srgbClr val="FFFFFF"/>
+                </a:solidFill>
+              </a:rPr>
+              <a:t>at Scale</a:t>
+            </a:r>
+          </a:p>
+          <a:p>
+            <a:pPr algn="l">
               <a:spcBef>
-                <a:spcPts val="200"/>
+                <a:spcPts val="500"/>
               </a:spcBef>
             </a:pPr>
             <a:r>
-              <a:rPr sz="950">
+              <a:rPr sz="850" b="0" i="0">
+                <a:solidFill>
+                  <a:srgbClr val="006E8C"/>
+                </a:solidFill>
+              </a:rPr>
+              <a:t>Epics: E7 · E8</a:t>
+            </a:r>
+          </a:p>
+        </p:txBody>
+      </p:sp>
+      <p:sp>
+        <p:nvSpPr>
+          <p:cNvPr id="25" name="TextBox 24"/>
+          <p:cNvSpPr txBox="1"/>
+          <p:nvPr/>
+        </p:nvSpPr>
+        <p:spPr>
+          <a:xfrm>
+            <a:off x="2024048" y="4297260"/>
+            <a:ext cx="6735904" cy="588327"/>
+          </a:xfrm>
+          <a:prstGeom prst="rect">
+            <a:avLst/>
+          </a:prstGeom>
+          <a:noFill/>
+        </p:spPr>
+        <p:txBody>
+          <a:bodyPr wrap="square">
+            <a:spAutoFit/>
+          </a:bodyPr>
+          <a:lstStyle/>
+          <a:p>
+            <a:pPr algn="l">
+              <a:spcAft>
+                <a:spcPts val="300"/>
+              </a:spcAft>
+            </a:pPr>
+            <a:r>
+              <a:rPr sz="900" b="0" i="0">
                 <a:solidFill>
                   <a:srgbClr val="2C2C2C"/>
                 </a:solidFill>
               </a:rPr>
-              <a:t>• All models have cards: training data, owner, risk tier, performance</a:t>
-            </a:r>
-          </a:p>
-          <a:p>
-            <a:pPr>
+              <a:t>•  MLOps pipeline operational: experiment tracking, feature store, model registry, deployment, and drift monitoring</a:t>
+            </a:r>
+          </a:p>
+          <a:p>
+            <a:pPr algn="l">
               <a:spcBef>
-                <a:spcPts val="200"/>
+                <a:spcPts val="400"/>
               </a:spcBef>
+              <a:spcAft>
+                <a:spcPts val="300"/>
+              </a:spcAft>
             </a:pPr>
             <a:r>
-              <a:rPr sz="950">
+              <a:rPr sz="900" b="0" i="0">
                 <a:solidFill>
                   <a:srgbClr val="2C2C2C"/>
                 </a:solidFill>
               </a:rPr>
-              <a:t>• No model in production without an approved AI Risk Assessment</a:t>
-            </a:r>
-          </a:p>
-          <a:p>
-            <a:pPr>
-              <a:spcBef>
-                <a:spcPts val="200"/>
-              </a:spcBef>
-            </a:pPr>
-            <a:r>
-              <a:rPr sz="950">
-                <a:solidFill>
-                  <a:srgbClr val="2C2C2C"/>
-                </a:solidFill>
-              </a:rPr>
-              <a:t>• WC engineers lead reviews and own model lifecycle</a:t>
+              <a:t>•  Three OMLIX algorithms in production; migration pathways for Glue, ADF, SAP DS, and SageMaker documented and proven</a:t>
             </a:r>
           </a:p>
         </p:txBody>
@@ -9045,19 +8862,20 @@
         </p:nvSpPr>
         <p:spPr>
           <a:xfrm>
-            <a:off x="274320" y="5623560"/>
-            <a:ext cx="8595360" cy="228600"/>
+            <a:off x="274320" y="4996424"/>
+            <a:ext cx="8595360" cy="950000"/>
           </a:xfrm>
           <a:prstGeom prst="rect">
             <a:avLst/>
           </a:prstGeom>
           <a:solidFill>
-            <a:srgbClr val="7A1F1F"/>
+            <a:srgbClr val="F2F4F7"/>
           </a:solidFill>
-          <a:ln>
-            <a:noFill/>
+          <a:ln w="9525">
+            <a:solidFill>
+              <a:srgbClr val="006E8C"/>
+            </a:solidFill>
           </a:ln>
-          <a:effectLst/>
         </p:spPr>
         <p:style>
           <a:lnRef idx="1">
@@ -9083,14 +8901,57 @@
       </p:sp>
       <p:sp>
         <p:nvSpPr>
-          <p:cNvPr id="27" name="TextBox 26"/>
+          <p:cNvPr id="27" name="Rectangle 26"/>
+          <p:cNvSpPr/>
+          <p:nvPr/>
+        </p:nvSpPr>
+        <p:spPr>
+          <a:xfrm>
+            <a:off x="274320" y="4996424"/>
+            <a:ext cx="1640000" cy="950000"/>
+          </a:xfrm>
+          <a:prstGeom prst="rect">
+            <a:avLst/>
+          </a:prstGeom>
+          <a:solidFill>
+            <a:srgbClr val="1B2A4A"/>
+          </a:solidFill>
+          <a:ln>
+            <a:noFill/>
+          </a:ln>
+        </p:spPr>
+        <p:style>
+          <a:lnRef idx="1">
+            <a:schemeClr val="accent1"/>
+          </a:lnRef>
+          <a:fillRef idx="3">
+            <a:schemeClr val="accent1"/>
+          </a:fillRef>
+          <a:effectRef idx="2">
+            <a:schemeClr val="accent1"/>
+          </a:effectRef>
+          <a:fontRef idx="minor">
+            <a:schemeClr val="lt1"/>
+          </a:fontRef>
+        </p:style>
+        <p:txBody>
+          <a:bodyPr rtlCol="0" anchor="ctr"/>
+          <a:lstStyle/>
+          <a:p>
+            <a:pPr algn="ctr"/>
+          </a:p>
+        </p:txBody>
+      </p:sp>
+      <p:sp>
+        <p:nvSpPr>
+          <p:cNvPr id="28" name="TextBox 27"/>
           <p:cNvSpPr txBox="1"/>
           <p:nvPr/>
         </p:nvSpPr>
         <p:spPr>
           <a:xfrm>
-            <a:off x="411480" y="5632704"/>
-            <a:ext cx="8321040" cy="201168"/>
+            <a:off x="384048" y="5062260"/>
+            <a:ext cx="1420544" cy="818327"/>
           </a:xfrm>
           <a:prstGeom prst="rect">
             <a:avLst/>
@@ -9105,12 +8966,112 @@
           <a:p>
             <a:pPr algn="l"/>
             <a:r>
-              <a:rPr sz="800" b="0" i="0">
+              <a:rPr sz="1050" b="1" i="0">
                 <a:solidFill>
                   <a:srgbClr val="FFFFFF"/>
                 </a:solidFill>
               </a:rPr>
-              <a:t>Key risk: scope without sequencing.  E1 Foundation must complete before E2–E7 can deliver at pace.  Any de-scoping of governance features (E4) breaks the compliance by design principle.</a:t>
+              <a:t>Enduring</a:t>
+            </a:r>
+          </a:p>
+          <a:p>
+            <a:pPr algn="l"/>
+            <a:r>
+              <a:rPr sz="1050" b="1" i="0">
+                <a:solidFill>
+                  <a:srgbClr val="FFFFFF"/>
+                </a:solidFill>
+              </a:rPr>
+              <a:t>Capability</a:t>
+            </a:r>
+          </a:p>
+          <a:p>
+            <a:pPr algn="l">
+              <a:spcBef>
+                <a:spcPts val="500"/>
+              </a:spcBef>
+            </a:pPr>
+            <a:r>
+              <a:rPr sz="850" b="0" i="0">
+                <a:solidFill>
+                  <a:srgbClr val="006E8C"/>
+                </a:solidFill>
+              </a:rPr>
+              <a:t>Epics: E5 · E9</a:t>
+            </a:r>
+          </a:p>
+        </p:txBody>
+      </p:sp>
+      <p:sp>
+        <p:nvSpPr>
+          <p:cNvPr id="29" name="TextBox 28"/>
+          <p:cNvSpPr txBox="1"/>
+          <p:nvPr/>
+        </p:nvSpPr>
+        <p:spPr>
+          <a:xfrm>
+            <a:off x="2024048" y="5062260"/>
+            <a:ext cx="6735904" cy="818327"/>
+          </a:xfrm>
+          <a:prstGeom prst="rect">
+            <a:avLst/>
+          </a:prstGeom>
+          <a:noFill/>
+        </p:spPr>
+        <p:txBody>
+          <a:bodyPr wrap="square">
+            <a:spAutoFit/>
+          </a:bodyPr>
+          <a:lstStyle/>
+          <a:p>
+            <a:pPr algn="l">
+              <a:spcAft>
+                <a:spcPts val="300"/>
+              </a:spcAft>
+            </a:pPr>
+            <a:r>
+              <a:rPr sz="900" b="0" i="0">
+                <a:solidFill>
+                  <a:srgbClr val="2C2C2C"/>
+                </a:solidFill>
+              </a:rPr>
+              <a:t>•  DataOps CI/CD: branching, automated test pyramid, one-click promotion Dev → Test → Prod, non-prod cost ≤10% of production</a:t>
+            </a:r>
+          </a:p>
+          <a:p>
+            <a:pPr algn="l">
+              <a:spcBef>
+                <a:spcPts val="400"/>
+              </a:spcBef>
+              <a:spcAft>
+                <a:spcPts val="300"/>
+              </a:spcAft>
+            </a:pPr>
+            <a:r>
+              <a:rPr sz="900" b="0" i="0">
+                <a:solidFill>
+                  <a:srgbClr val="2C2C2C"/>
+                </a:solidFill>
+              </a:rPr>
+              <a:t>•  WC engineers Databricks-certified, embedded in code review, and leading delivery of their own domain pipelines</a:t>
+            </a:r>
+          </a:p>
+          <a:p>
+            <a:pPr algn="l">
+              <a:spcBef>
+                <a:spcPts val="400"/>
+              </a:spcBef>
+              <a:spcAft>
+                <a:spcPts val="300"/>
+              </a:spcAft>
+            </a:pPr>
+            <a:r>
+              <a:rPr sz="900" b="0" i="0">
+                <a:solidFill>
+                  <a:srgbClr val="2C2C2C"/>
+                </a:solidFill>
+              </a:rPr>
+              <a:t>•  Reusable runbooks, templates, and frameworks so WC owns and operates the platform beyond project close</a:t>
             </a:r>
           </a:p>
         </p:txBody>
